--- a/HH_AI経営診断_週次進捗レビュー.pptx
+++ b/HH_AI経営診断_週次進捗レビュー.pptx
@@ -509,10 +509,10 @@
           <a:lstStyle/>
           <a:p>
             <a:r>
-              <a:rPr lang="en-US" dirty="0"/>
+              <a:rPr lang="ja-JP" dirty="0"/>
               <a:t/>
             </a:r>
-            <a:endParaRPr lang="en-US" dirty="0"/>
+            <a:endParaRPr lang="ja-JP" dirty="0"/>
           </a:p>
         </p:txBody>
       </p:sp>
@@ -532,10 +532,10 @@
           <a:lstStyle/>
           <a:p>
             <a:fld id="{F7021451-1387-4CA6-816F-3879F97B5CBC}" type="slidenum">
-              <a:rPr lang="en-US"/>
+              <a:rPr lang="ja-JP"/>
               <a:t>1</a:t>
             </a:fld>
-            <a:endParaRPr lang="en-US"/>
+            <a:endParaRPr lang="ja-JP"/>
           </a:p>
         </p:txBody>
       </p:sp>
@@ -597,10 +597,10 @@
           <a:lstStyle/>
           <a:p>
             <a:r>
-              <a:rPr lang="en-US" dirty="0"/>
+              <a:rPr lang="ja-JP" dirty="0"/>
               <a:t/>
             </a:r>
-            <a:endParaRPr lang="en-US" dirty="0"/>
+            <a:endParaRPr lang="ja-JP" dirty="0"/>
           </a:p>
         </p:txBody>
       </p:sp>
@@ -620,10 +620,10 @@
           <a:lstStyle/>
           <a:p>
             <a:fld id="{F7021451-1387-4CA6-816F-3879F97B5CBC}" type="slidenum">
-              <a:rPr lang="en-US"/>
+              <a:rPr lang="ja-JP"/>
               <a:t>2</a:t>
             </a:fld>
-            <a:endParaRPr lang="en-US"/>
+            <a:endParaRPr lang="ja-JP"/>
           </a:p>
         </p:txBody>
       </p:sp>
@@ -685,10 +685,10 @@
           <a:lstStyle/>
           <a:p>
             <a:r>
-              <a:rPr lang="en-US" dirty="0"/>
+              <a:rPr lang="ja-JP" dirty="0"/>
               <a:t/>
             </a:r>
-            <a:endParaRPr lang="en-US" dirty="0"/>
+            <a:endParaRPr lang="ja-JP" dirty="0"/>
           </a:p>
         </p:txBody>
       </p:sp>
@@ -708,10 +708,10 @@
           <a:lstStyle/>
           <a:p>
             <a:fld id="{F7021451-1387-4CA6-816F-3879F97B5CBC}" type="slidenum">
-              <a:rPr lang="en-US"/>
+              <a:rPr lang="ja-JP"/>
               <a:t>3</a:t>
             </a:fld>
-            <a:endParaRPr lang="en-US"/>
+            <a:endParaRPr lang="ja-JP"/>
           </a:p>
         </p:txBody>
       </p:sp>
@@ -773,10 +773,10 @@
           <a:lstStyle/>
           <a:p>
             <a:r>
-              <a:rPr lang="en-US" dirty="0"/>
+              <a:rPr lang="ja-JP" dirty="0"/>
               <a:t/>
             </a:r>
-            <a:endParaRPr lang="en-US" dirty="0"/>
+            <a:endParaRPr lang="ja-JP" dirty="0"/>
           </a:p>
         </p:txBody>
       </p:sp>
@@ -796,10 +796,10 @@
           <a:lstStyle/>
           <a:p>
             <a:fld id="{F7021451-1387-4CA6-816F-3879F97B5CBC}" type="slidenum">
-              <a:rPr lang="en-US"/>
+              <a:rPr lang="ja-JP"/>
               <a:t>4</a:t>
             </a:fld>
-            <a:endParaRPr lang="en-US"/>
+            <a:endParaRPr lang="ja-JP"/>
           </a:p>
         </p:txBody>
       </p:sp>
@@ -861,10 +861,10 @@
           <a:lstStyle/>
           <a:p>
             <a:r>
-              <a:rPr lang="en-US" dirty="0"/>
+              <a:rPr lang="ja-JP" dirty="0"/>
               <a:t/>
             </a:r>
-            <a:endParaRPr lang="en-US" dirty="0"/>
+            <a:endParaRPr lang="ja-JP" dirty="0"/>
           </a:p>
         </p:txBody>
       </p:sp>
@@ -884,10 +884,10 @@
           <a:lstStyle/>
           <a:p>
             <a:fld id="{F7021451-1387-4CA6-816F-3879F97B5CBC}" type="slidenum">
-              <a:rPr lang="en-US"/>
+              <a:rPr lang="ja-JP"/>
               <a:t>5</a:t>
             </a:fld>
-            <a:endParaRPr lang="en-US"/>
+            <a:endParaRPr lang="ja-JP"/>
           </a:p>
         </p:txBody>
       </p:sp>
@@ -949,10 +949,10 @@
           <a:lstStyle/>
           <a:p>
             <a:r>
-              <a:rPr lang="en-US" dirty="0"/>
+              <a:rPr lang="ja-JP" dirty="0"/>
               <a:t/>
             </a:r>
-            <a:endParaRPr lang="en-US" dirty="0"/>
+            <a:endParaRPr lang="ja-JP" dirty="0"/>
           </a:p>
         </p:txBody>
       </p:sp>
@@ -972,10 +972,10 @@
           <a:lstStyle/>
           <a:p>
             <a:fld id="{F7021451-1387-4CA6-816F-3879F97B5CBC}" type="slidenum">
-              <a:rPr lang="en-US"/>
+              <a:rPr lang="ja-JP"/>
               <a:t>6</a:t>
             </a:fld>
-            <a:endParaRPr lang="en-US"/>
+            <a:endParaRPr lang="ja-JP"/>
           </a:p>
         </p:txBody>
       </p:sp>
@@ -1037,10 +1037,10 @@
           <a:lstStyle/>
           <a:p>
             <a:r>
-              <a:rPr lang="en-US" dirty="0"/>
+              <a:rPr lang="ja-JP" dirty="0"/>
               <a:t/>
             </a:r>
-            <a:endParaRPr lang="en-US" dirty="0"/>
+            <a:endParaRPr lang="ja-JP" dirty="0"/>
           </a:p>
         </p:txBody>
       </p:sp>
@@ -1060,10 +1060,10 @@
           <a:lstStyle/>
           <a:p>
             <a:fld id="{F7021451-1387-4CA6-816F-3879F97B5CBC}" type="slidenum">
-              <a:rPr lang="en-US"/>
+              <a:rPr lang="ja-JP"/>
               <a:t>7</a:t>
             </a:fld>
-            <a:endParaRPr lang="en-US"/>
+            <a:endParaRPr lang="ja-JP"/>
           </a:p>
         </p:txBody>
       </p:sp>
@@ -1125,10 +1125,10 @@
           <a:lstStyle/>
           <a:p>
             <a:r>
-              <a:rPr lang="en-US" dirty="0"/>
+              <a:rPr lang="ja-JP" dirty="0"/>
               <a:t/>
             </a:r>
-            <a:endParaRPr lang="en-US" dirty="0"/>
+            <a:endParaRPr lang="ja-JP" dirty="0"/>
           </a:p>
         </p:txBody>
       </p:sp>
@@ -1148,10 +1148,10 @@
           <a:lstStyle/>
           <a:p>
             <a:fld id="{F7021451-1387-4CA6-816F-3879F97B5CBC}" type="slidenum">
-              <a:rPr lang="en-US"/>
+              <a:rPr lang="ja-JP"/>
               <a:t>8</a:t>
             </a:fld>
-            <a:endParaRPr lang="en-US"/>
+            <a:endParaRPr lang="ja-JP"/>
           </a:p>
         </p:txBody>
       </p:sp>
@@ -1213,10 +1213,10 @@
           <a:lstStyle/>
           <a:p>
             <a:r>
-              <a:rPr lang="en-US" dirty="0"/>
+              <a:rPr lang="ja-JP" dirty="0"/>
               <a:t/>
             </a:r>
-            <a:endParaRPr lang="en-US" dirty="0"/>
+            <a:endParaRPr lang="ja-JP" dirty="0"/>
           </a:p>
         </p:txBody>
       </p:sp>
@@ -1236,10 +1236,10 @@
           <a:lstStyle/>
           <a:p>
             <a:fld id="{F7021451-1387-4CA6-816F-3879F97B5CBC}" type="slidenum">
-              <a:rPr lang="en-US"/>
+              <a:rPr lang="ja-JP"/>
               <a:t>9</a:t>
             </a:fld>
-            <a:endParaRPr lang="en-US"/>
+            <a:endParaRPr lang="ja-JP"/>
           </a:p>
         </p:txBody>
       </p:sp>
@@ -1466,7 +1466,7 @@
     </p:bodyStyle>
     <p:otherStyle>
       <a:defPPr>
-        <a:defRPr lang="en-US"/>
+        <a:defRPr lang="ja-JP"/>
       </a:defPPr>
       <a:lvl1pPr marL="0" algn="l" defTabSz="914400" rtl="0" eaLnBrk="1" latinLnBrk="0" hangingPunct="1">
         <a:defRPr sz="1800" kern="1200">
@@ -1632,7 +1632,7 @@
               <a:buNone/>
             </a:pPr>
             <a:r>
-              <a:rPr lang="en-US" sz="1300" b="1" spc="200" kern="0" dirty="0">
+              <a:rPr lang="ja-JP" sz="1300" b="1" spc="200" kern="0" dirty="0">
                 <a:solidFill>
                   <a:srgbClr val="046A38"/>
                 </a:solidFill>
@@ -1642,7 +1642,7 @@
               </a:rPr>
               <a:t>阪急阪神ホールディングス様 ｜ AI経営診断 PoC</a:t>
             </a:r>
-            <a:endParaRPr lang="en-US" sz="1300" dirty="0"/>
+            <a:endParaRPr lang="ja-JP" sz="1300" dirty="0"/>
           </a:p>
         </p:txBody>
       </p:sp>
@@ -1671,7 +1671,7 @@
               <a:buNone/>
             </a:pPr>
             <a:r>
-              <a:rPr lang="en-US" sz="4200" b="1" dirty="0">
+              <a:rPr lang="ja-JP" sz="4200" b="1" dirty="0">
                 <a:solidFill>
                   <a:srgbClr val="1A1A1A"/>
                 </a:solidFill>
@@ -1681,7 +1681,7 @@
               </a:rPr>
               <a:t>AI経営診断OS</a:t>
             </a:r>
-            <a:endParaRPr lang="en-US" sz="4200" dirty="0"/>
+            <a:endParaRPr lang="ja-JP" sz="4200" dirty="0"/>
           </a:p>
         </p:txBody>
       </p:sp>
@@ -1710,7 +1710,7 @@
               <a:buNone/>
             </a:pPr>
             <a:r>
-              <a:rPr lang="en-US" sz="3000" b="1" dirty="0">
+              <a:rPr lang="ja-JP" sz="3000" b="1" dirty="0">
                 <a:solidFill>
                   <a:srgbClr val="046A38"/>
                 </a:solidFill>
@@ -1720,7 +1720,7 @@
               </a:rPr>
               <a:t>週次進捗レビュー ＆ アプリレビュー</a:t>
             </a:r>
-            <a:endParaRPr lang="en-US" sz="3000" dirty="0"/>
+            <a:endParaRPr lang="ja-JP" sz="3000" dirty="0"/>
           </a:p>
         </p:txBody>
       </p:sp>
@@ -1752,7 +1752,7 @@
               <a:buNone/>
             </a:pPr>
             <a:r>
-              <a:rPr lang="en-US" sz="1400" dirty="0">
+              <a:rPr lang="ja-JP" sz="1400" dirty="0">
                 <a:solidFill>
                   <a:srgbClr val="53565A"/>
                 </a:solidFill>
@@ -1762,7 +1762,7 @@
               </a:rPr>
               <a:t>経営者の「3つの問い」に答えるAI経営診断OSの開発進捗を共有し、モックアプリを体験いただきながら、設計の方向性・データ整備・優先度について論点をすり合わせます。</a:t>
             </a:r>
-            <a:endParaRPr lang="en-US" sz="1400" dirty="0"/>
+            <a:endParaRPr lang="ja-JP" sz="1400" dirty="0"/>
           </a:p>
         </p:txBody>
       </p:sp>
@@ -1814,7 +1814,7 @@
               <a:buNone/>
             </a:pPr>
             <a:r>
-              <a:rPr lang="en-US" sz="1200" b="1" dirty="0">
+              <a:rPr lang="ja-JP" sz="1200" b="1" dirty="0">
                 <a:solidFill>
                   <a:srgbClr val="1A1A1A"/>
                 </a:solidFill>
@@ -1824,7 +1824,7 @@
               </a:rPr>
               <a:t>本日の目的</a:t>
             </a:r>
-            <a:endParaRPr lang="en-US" sz="1200" dirty="0"/>
+            <a:endParaRPr lang="ja-JP" sz="1200" dirty="0"/>
           </a:p>
         </p:txBody>
       </p:sp>
@@ -1853,7 +1853,7 @@
               <a:buNone/>
             </a:pPr>
             <a:r>
-              <a:rPr lang="en-US" sz="1100" dirty="0">
+              <a:rPr lang="ja-JP" sz="1100" dirty="0">
                 <a:solidFill>
                   <a:srgbClr val="53565A"/>
                 </a:solidFill>
@@ -1863,7 +1863,7 @@
               </a:rPr>
               <a:t>進捗共有 ＋ モック体験によるFB取得</a:t>
             </a:r>
-            <a:endParaRPr lang="en-US" sz="1100" dirty="0"/>
+            <a:endParaRPr lang="ja-JP" sz="1100" dirty="0"/>
           </a:p>
         </p:txBody>
       </p:sp>
@@ -1892,7 +1892,7 @@
               <a:buNone/>
             </a:pPr>
             <a:r>
-              <a:rPr lang="en-US" sz="1200" b="1" dirty="0">
+              <a:rPr lang="ja-JP" sz="1200" b="1" dirty="0">
                 <a:solidFill>
                   <a:srgbClr val="1A1A1A"/>
                 </a:solidFill>
@@ -1902,7 +1902,7 @@
               </a:rPr>
               <a:t>フェーズ</a:t>
             </a:r>
-            <a:endParaRPr lang="en-US" sz="1200" dirty="0"/>
+            <a:endParaRPr lang="ja-JP" sz="1200" dirty="0"/>
           </a:p>
         </p:txBody>
       </p:sp>
@@ -1931,7 +1931,7 @@
               <a:buNone/>
             </a:pPr>
             <a:r>
-              <a:rPr lang="en-US" sz="1100" dirty="0">
+              <a:rPr lang="ja-JP" sz="1100" dirty="0">
                 <a:solidFill>
                   <a:srgbClr val="53565A"/>
                 </a:solidFill>
@@ -1941,7 +1941,7 @@
               </a:rPr>
               <a:t>PoC（公開／マスキングデータ前提）</a:t>
             </a:r>
-            <a:endParaRPr lang="en-US" sz="1100" dirty="0"/>
+            <a:endParaRPr lang="ja-JP" sz="1100" dirty="0"/>
           </a:p>
         </p:txBody>
       </p:sp>
@@ -1970,7 +1970,7 @@
               <a:buNone/>
             </a:pPr>
             <a:r>
-              <a:rPr lang="en-US" sz="1200" b="1" dirty="0">
+              <a:rPr lang="ja-JP" sz="1200" b="1" dirty="0">
                 <a:solidFill>
                   <a:srgbClr val="1A1A1A"/>
                 </a:solidFill>
@@ -1980,7 +1980,7 @@
               </a:rPr>
               <a:t>日付</a:t>
             </a:r>
-            <a:endParaRPr lang="en-US" sz="1200" dirty="0"/>
+            <a:endParaRPr lang="ja-JP" sz="1200" dirty="0"/>
           </a:p>
         </p:txBody>
       </p:sp>
@@ -2009,7 +2009,7 @@
               <a:buNone/>
             </a:pPr>
             <a:r>
-              <a:rPr lang="en-US" sz="1100" dirty="0">
+              <a:rPr lang="ja-JP" sz="1100" dirty="0">
                 <a:solidFill>
                   <a:srgbClr val="53565A"/>
                 </a:solidFill>
@@ -2019,7 +2019,7 @@
               </a:rPr>
               <a:t>2026年7月 週次定例</a:t>
             </a:r>
-            <a:endParaRPr lang="en-US" sz="1100" dirty="0"/>
+            <a:endParaRPr lang="ja-JP" sz="1100" dirty="0"/>
           </a:p>
         </p:txBody>
       </p:sp>
@@ -2048,7 +2048,7 @@
               <a:buNone/>
             </a:pPr>
             <a:r>
-              <a:rPr lang="en-US" sz="1000" b="1" dirty="0">
+              <a:rPr lang="ja-JP" sz="1000" b="1" dirty="0">
                 <a:solidFill>
                   <a:srgbClr val="046A38"/>
                 </a:solidFill>
@@ -2058,7 +2058,7 @@
               </a:rPr>
               <a:t>Deloitte</a:t>
             </a:r>
-            <a:endParaRPr lang="en-US" sz="1000" dirty="0"/>
+            <a:endParaRPr lang="ja-JP" sz="1000" dirty="0"/>
           </a:p>
         </p:txBody>
       </p:sp>
@@ -2139,7 +2139,7 @@
               <a:buNone/>
             </a:pPr>
             <a:r>
-              <a:rPr lang="en-US" sz="1100" b="1" spc="200" kern="0" dirty="0">
+              <a:rPr lang="ja-JP" sz="1100" b="1" spc="200" kern="0" dirty="0">
                 <a:solidFill>
                   <a:srgbClr val="046A38"/>
                 </a:solidFill>
@@ -2149,7 +2149,7 @@
               </a:rPr>
               <a:t>AGENDA</a:t>
             </a:r>
-            <a:endParaRPr lang="en-US" sz="1100" dirty="0"/>
+            <a:endParaRPr lang="ja-JP" sz="1100" dirty="0"/>
           </a:p>
         </p:txBody>
       </p:sp>
@@ -2178,7 +2178,7 @@
               <a:buNone/>
             </a:pPr>
             <a:r>
-              <a:rPr lang="en-US" sz="2500" b="1" dirty="0">
+              <a:rPr lang="ja-JP" sz="2500" b="1" dirty="0">
                 <a:solidFill>
                   <a:srgbClr val="1A1A1A"/>
                 </a:solidFill>
@@ -2188,7 +2188,7 @@
               </a:rPr>
               <a:t>本日のアジェンダ と 進捗ハイライト</a:t>
             </a:r>
-            <a:endParaRPr lang="en-US" sz="2500" dirty="0"/>
+            <a:endParaRPr lang="ja-JP" sz="2500" dirty="0"/>
           </a:p>
         </p:txBody>
       </p:sp>
@@ -2217,7 +2217,7 @@
               <a:buNone/>
             </a:pPr>
             <a:r>
-              <a:rPr lang="en-US" sz="1300" b="1" dirty="0">
+              <a:rPr lang="ja-JP" sz="1300" b="1" dirty="0">
                 <a:solidFill>
                   <a:srgbClr val="86BC25"/>
                 </a:solidFill>
@@ -2227,7 +2227,7 @@
               </a:rPr>
               <a:t>01</a:t>
             </a:r>
-            <a:endParaRPr lang="en-US" sz="1300" dirty="0"/>
+            <a:endParaRPr lang="ja-JP" sz="1300" dirty="0"/>
           </a:p>
         </p:txBody>
       </p:sp>
@@ -2259,7 +2259,7 @@
               <a:buNone/>
             </a:pPr>
             <a:r>
-              <a:rPr lang="en-US" sz="1300" b="1" dirty="0">
+              <a:rPr lang="ja-JP" sz="1300" b="1" dirty="0">
                 <a:solidFill>
                   <a:srgbClr val="1A1A1A"/>
                 </a:solidFill>
@@ -2269,7 +2269,7 @@
               </a:rPr>
               <a:t>先方要望の理解と進め方</a:t>
             </a:r>
-            <a:endParaRPr lang="en-US" sz="1300" dirty="0"/>
+            <a:endParaRPr lang="ja-JP" sz="1300" dirty="0"/>
           </a:p>
           <a:p>
             <a:pPr indent="0" marL="0">
@@ -2279,7 +2279,7 @@
               <a:buNone/>
             </a:pPr>
             <a:r>
-              <a:rPr lang="en-US" sz="1050" dirty="0">
+              <a:rPr lang="ja-JP" sz="1050" dirty="0">
                 <a:solidFill>
                   <a:srgbClr val="53565A"/>
                 </a:solidFill>
@@ -2289,7 +2289,7 @@
               </a:rPr>
               <a:t>経営者の3つの問い ／ PoCの前提</a:t>
             </a:r>
-            <a:endParaRPr lang="en-US" sz="1300" dirty="0"/>
+            <a:endParaRPr lang="ja-JP" sz="1300" dirty="0"/>
           </a:p>
         </p:txBody>
       </p:sp>
@@ -2341,7 +2341,7 @@
               <a:buNone/>
             </a:pPr>
             <a:r>
-              <a:rPr lang="en-US" sz="1300" b="1" dirty="0">
+              <a:rPr lang="ja-JP" sz="1300" b="1" dirty="0">
                 <a:solidFill>
                   <a:srgbClr val="86BC25"/>
                 </a:solidFill>
@@ -2351,7 +2351,7 @@
               </a:rPr>
               <a:t>02</a:t>
             </a:r>
-            <a:endParaRPr lang="en-US" sz="1300" dirty="0"/>
+            <a:endParaRPr lang="ja-JP" sz="1300" dirty="0"/>
           </a:p>
         </p:txBody>
       </p:sp>
@@ -2383,7 +2383,7 @@
               <a:buNone/>
             </a:pPr>
             <a:r>
-              <a:rPr lang="en-US" sz="1300" b="1" dirty="0">
+              <a:rPr lang="ja-JP" sz="1300" b="1" dirty="0">
                 <a:solidFill>
                   <a:srgbClr val="1A1A1A"/>
                 </a:solidFill>
@@ -2393,7 +2393,7 @@
               </a:rPr>
               <a:t>アプリ全体像</a:t>
             </a:r>
-            <a:endParaRPr lang="en-US" sz="1300" dirty="0"/>
+            <a:endParaRPr lang="ja-JP" sz="1300" dirty="0"/>
           </a:p>
           <a:p>
             <a:pPr indent="0" marL="0">
@@ -2403,7 +2403,7 @@
               <a:buNone/>
             </a:pPr>
             <a:r>
-              <a:rPr lang="en-US" sz="1050" dirty="0">
+              <a:rPr lang="ja-JP" sz="1050" dirty="0">
                 <a:solidFill>
                   <a:srgbClr val="53565A"/>
                 </a:solidFill>
@@ -2413,7 +2413,7 @@
               </a:rPr>
               <a:t>4機能 × 3つの問い × 想定UC7</a:t>
             </a:r>
-            <a:endParaRPr lang="en-US" sz="1300" dirty="0"/>
+            <a:endParaRPr lang="ja-JP" sz="1300" dirty="0"/>
           </a:p>
         </p:txBody>
       </p:sp>
@@ -2465,7 +2465,7 @@
               <a:buNone/>
             </a:pPr>
             <a:r>
-              <a:rPr lang="en-US" sz="1300" b="1" dirty="0">
+              <a:rPr lang="ja-JP" sz="1300" b="1" dirty="0">
                 <a:solidFill>
                   <a:srgbClr val="86BC25"/>
                 </a:solidFill>
@@ -2475,7 +2475,7 @@
               </a:rPr>
               <a:t>03</a:t>
             </a:r>
-            <a:endParaRPr lang="en-US" sz="1300" dirty="0"/>
+            <a:endParaRPr lang="ja-JP" sz="1300" dirty="0"/>
           </a:p>
         </p:txBody>
       </p:sp>
@@ -2507,7 +2507,7 @@
               <a:buNone/>
             </a:pPr>
             <a:r>
-              <a:rPr lang="en-US" sz="1300" b="1" dirty="0">
+              <a:rPr lang="ja-JP" sz="1300" b="1" dirty="0">
                 <a:solidFill>
                   <a:srgbClr val="1A1A1A"/>
                 </a:solidFill>
@@ -2517,7 +2517,7 @@
               </a:rPr>
               <a:t>優先度検討と実現の仕組み</a:t>
             </a:r>
-            <a:endParaRPr lang="en-US" sz="1300" dirty="0"/>
+            <a:endParaRPr lang="ja-JP" sz="1300" dirty="0"/>
           </a:p>
           <a:p>
             <a:pPr indent="0" marL="0">
@@ -2527,7 +2527,7 @@
               <a:buNone/>
             </a:pPr>
             <a:r>
-              <a:rPr lang="en-US" sz="1050" dirty="0">
+              <a:rPr lang="ja-JP" sz="1050" dirty="0">
                 <a:solidFill>
                   <a:srgbClr val="53565A"/>
                 </a:solidFill>
@@ -2537,7 +2537,7 @@
               </a:rPr>
               <a:t>Impact × Feasibility ／ 重要ポイント</a:t>
             </a:r>
-            <a:endParaRPr lang="en-US" sz="1300" dirty="0"/>
+            <a:endParaRPr lang="ja-JP" sz="1300" dirty="0"/>
           </a:p>
         </p:txBody>
       </p:sp>
@@ -2589,7 +2589,7 @@
               <a:buNone/>
             </a:pPr>
             <a:r>
-              <a:rPr lang="en-US" sz="1300" b="1" dirty="0">
+              <a:rPr lang="ja-JP" sz="1300" b="1" dirty="0">
                 <a:solidFill>
                   <a:srgbClr val="86BC25"/>
                 </a:solidFill>
@@ -2599,7 +2599,7 @@
               </a:rPr>
               <a:t>04</a:t>
             </a:r>
-            <a:endParaRPr lang="en-US" sz="1300" dirty="0"/>
+            <a:endParaRPr lang="ja-JP" sz="1300" dirty="0"/>
           </a:p>
         </p:txBody>
       </p:sp>
@@ -2631,7 +2631,7 @@
               <a:buNone/>
             </a:pPr>
             <a:r>
-              <a:rPr lang="en-US" sz="1300" b="1" dirty="0">
+              <a:rPr lang="ja-JP" sz="1300" b="1" dirty="0">
                 <a:solidFill>
                   <a:srgbClr val="1A1A1A"/>
                 </a:solidFill>
@@ -2641,7 +2641,7 @@
               </a:rPr>
               <a:t>各機能のコア要素</a:t>
             </a:r>
-            <a:endParaRPr lang="en-US" sz="1300" dirty="0"/>
+            <a:endParaRPr lang="ja-JP" sz="1300" dirty="0"/>
           </a:p>
           <a:p>
             <a:pPr indent="0" marL="0">
@@ -2651,7 +2651,7 @@
               <a:buNone/>
             </a:pPr>
             <a:r>
-              <a:rPr lang="en-US" sz="1050" dirty="0">
+              <a:rPr lang="ja-JP" sz="1050" dirty="0">
                 <a:solidFill>
                   <a:srgbClr val="53565A"/>
                 </a:solidFill>
@@ -2661,7 +2661,7 @@
               </a:rPr>
               <a:t>機能 × リンクUC × 想定データ一覧</a:t>
             </a:r>
-            <a:endParaRPr lang="en-US" sz="1300" dirty="0"/>
+            <a:endParaRPr lang="ja-JP" sz="1300" dirty="0"/>
           </a:p>
         </p:txBody>
       </p:sp>
@@ -2713,7 +2713,7 @@
               <a:buNone/>
             </a:pPr>
             <a:r>
-              <a:rPr lang="en-US" sz="1300" b="1" dirty="0">
+              <a:rPr lang="ja-JP" sz="1300" b="1" dirty="0">
                 <a:solidFill>
                   <a:srgbClr val="86BC25"/>
                 </a:solidFill>
@@ -2723,7 +2723,7 @@
               </a:rPr>
               <a:t>05</a:t>
             </a:r>
-            <a:endParaRPr lang="en-US" sz="1300" dirty="0"/>
+            <a:endParaRPr lang="ja-JP" sz="1300" dirty="0"/>
           </a:p>
         </p:txBody>
       </p:sp>
@@ -2755,7 +2755,7 @@
               <a:buNone/>
             </a:pPr>
             <a:r>
-              <a:rPr lang="en-US" sz="1300" b="1" dirty="0">
+              <a:rPr lang="ja-JP" sz="1300" b="1" dirty="0">
                 <a:solidFill>
                   <a:srgbClr val="1A1A1A"/>
                 </a:solidFill>
@@ -2765,7 +2765,7 @@
               </a:rPr>
               <a:t>データ詳細</a:t>
             </a:r>
-            <a:endParaRPr lang="en-US" sz="1300" dirty="0"/>
+            <a:endParaRPr lang="ja-JP" sz="1300" dirty="0"/>
           </a:p>
           <a:p>
             <a:pPr indent="0" marL="0">
@@ -2775,7 +2775,7 @@
               <a:buNone/>
             </a:pPr>
             <a:r>
-              <a:rPr lang="en-US" sz="1050" dirty="0">
+              <a:rPr lang="ja-JP" sz="1050" dirty="0">
                 <a:solidFill>
                   <a:srgbClr val="53565A"/>
                 </a:solidFill>
@@ -2785,7 +2785,7 @@
               </a:rPr>
               <a:t>ソース・リンク・取得方法（API／DL）</a:t>
             </a:r>
-            <a:endParaRPr lang="en-US" sz="1300" dirty="0"/>
+            <a:endParaRPr lang="ja-JP" sz="1300" dirty="0"/>
           </a:p>
         </p:txBody>
       </p:sp>
@@ -2837,7 +2837,7 @@
               <a:buNone/>
             </a:pPr>
             <a:r>
-              <a:rPr lang="en-US" sz="1300" b="1" dirty="0">
+              <a:rPr lang="ja-JP" sz="1300" b="1" dirty="0">
                 <a:solidFill>
                   <a:srgbClr val="86BC25"/>
                 </a:solidFill>
@@ -2847,7 +2847,7 @@
               </a:rPr>
               <a:t>06</a:t>
             </a:r>
-            <a:endParaRPr lang="en-US" sz="1300" dirty="0"/>
+            <a:endParaRPr lang="ja-JP" sz="1300" dirty="0"/>
           </a:p>
         </p:txBody>
       </p:sp>
@@ -2879,7 +2879,7 @@
               <a:buNone/>
             </a:pPr>
             <a:r>
-              <a:rPr lang="en-US" sz="1300" b="1" dirty="0">
+              <a:rPr lang="ja-JP" sz="1300" b="1" dirty="0">
                 <a:solidFill>
                   <a:srgbClr val="1A1A1A"/>
                 </a:solidFill>
@@ -2889,7 +2889,7 @@
               </a:rPr>
               <a:t>進捗の現在地と課題</a:t>
             </a:r>
-            <a:endParaRPr lang="en-US" sz="1300" dirty="0"/>
+            <a:endParaRPr lang="ja-JP" sz="1300" dirty="0"/>
           </a:p>
           <a:p>
             <a:pPr indent="0" marL="0">
@@ -2899,7 +2899,7 @@
               <a:buNone/>
             </a:pPr>
             <a:r>
-              <a:rPr lang="en-US" sz="1050" dirty="0">
+              <a:rPr lang="ja-JP" sz="1050" dirty="0">
                 <a:solidFill>
                   <a:srgbClr val="53565A"/>
                 </a:solidFill>
@@ -2909,7 +2909,7 @@
               </a:rPr>
               <a:t>モック実装状況 ／ リスク</a:t>
             </a:r>
-            <a:endParaRPr lang="en-US" sz="1300" dirty="0"/>
+            <a:endParaRPr lang="ja-JP" sz="1300" dirty="0"/>
           </a:p>
         </p:txBody>
       </p:sp>
@@ -2961,7 +2961,7 @@
               <a:buNone/>
             </a:pPr>
             <a:r>
-              <a:rPr lang="en-US" sz="1300" b="1" dirty="0">
+              <a:rPr lang="ja-JP" sz="1300" b="1" dirty="0">
                 <a:solidFill>
                   <a:srgbClr val="86BC25"/>
                 </a:solidFill>
@@ -2971,7 +2971,7 @@
               </a:rPr>
               <a:t>07</a:t>
             </a:r>
-            <a:endParaRPr lang="en-US" sz="1300" dirty="0"/>
+            <a:endParaRPr lang="ja-JP" sz="1300" dirty="0"/>
           </a:p>
         </p:txBody>
       </p:sp>
@@ -3003,7 +3003,7 @@
               <a:buNone/>
             </a:pPr>
             <a:r>
-              <a:rPr lang="en-US" sz="1300" b="1" dirty="0">
+              <a:rPr lang="ja-JP" sz="1300" b="1" dirty="0">
                 <a:solidFill>
                   <a:srgbClr val="1A1A1A"/>
                 </a:solidFill>
@@ -3019,7 +3019,7 @@
               </a:lnSpc>
               <a:buNone/>
             </a:pPr>
-            <a:endParaRPr lang="en-US" sz="1300" dirty="0"/>
+            <a:endParaRPr lang="ja-JP" sz="1300" dirty="0"/>
           </a:p>
         </p:txBody>
       </p:sp>
@@ -3071,7 +3071,7 @@
               <a:buNone/>
             </a:pPr>
             <a:r>
-              <a:rPr lang="en-US" sz="1200" b="1" spc="100" kern="0" dirty="0">
+              <a:rPr lang="ja-JP" sz="1200" b="1" spc="100" kern="0" dirty="0">
                 <a:solidFill>
                   <a:srgbClr val="046A38"/>
                 </a:solidFill>
@@ -3081,7 +3081,7 @@
               </a:rPr>
               <a:t>今週のハイライト</a:t>
             </a:r>
-            <a:endParaRPr lang="en-US" sz="1200" dirty="0"/>
+            <a:endParaRPr lang="ja-JP" sz="1200" dirty="0"/>
           </a:p>
         </p:txBody>
       </p:sp>
@@ -3144,7 +3144,7 @@
               <a:buNone/>
             </a:pPr>
             <a:r>
-              <a:rPr lang="en-US" sz="1050" b="1" dirty="0">
+              <a:rPr lang="ja-JP" sz="1050" b="1" dirty="0">
                 <a:solidFill>
                   <a:srgbClr val="8A8D87"/>
                 </a:solidFill>
@@ -3154,7 +3154,7 @@
               </a:rPr>
               <a:t>全体設計</a:t>
             </a:r>
-            <a:endParaRPr lang="en-US" sz="1050" dirty="0"/>
+            <a:endParaRPr lang="ja-JP" sz="1050" dirty="0"/>
           </a:p>
         </p:txBody>
       </p:sp>
@@ -3183,7 +3183,7 @@
               <a:buNone/>
             </a:pPr>
             <a:r>
-              <a:rPr lang="en-US" sz="1900" b="1" dirty="0">
+              <a:rPr lang="ja-JP" sz="1900" b="1" dirty="0">
                 <a:solidFill>
                   <a:srgbClr val="046A38"/>
                 </a:solidFill>
@@ -3193,7 +3193,7 @@
               </a:rPr>
               <a:t>4機能</a:t>
             </a:r>
-            <a:endParaRPr lang="en-US" sz="1900" dirty="0"/>
+            <a:endParaRPr lang="ja-JP" sz="1900" dirty="0"/>
           </a:p>
         </p:txBody>
       </p:sp>
@@ -3222,7 +3222,7 @@
               <a:buNone/>
             </a:pPr>
             <a:r>
-              <a:rPr lang="en-US" sz="950" dirty="0">
+              <a:rPr lang="ja-JP" sz="950" dirty="0">
                 <a:solidFill>
                   <a:srgbClr val="53565A"/>
                 </a:solidFill>
@@ -3232,7 +3232,7 @@
               </a:rPr>
               <a:t>3つの問い×UC7を統合</a:t>
             </a:r>
-            <a:endParaRPr lang="en-US" sz="950" dirty="0"/>
+            <a:endParaRPr lang="ja-JP" sz="950" dirty="0"/>
           </a:p>
         </p:txBody>
       </p:sp>
@@ -3295,7 +3295,7 @@
               <a:buNone/>
             </a:pPr>
             <a:r>
-              <a:rPr lang="en-US" sz="1050" b="1" dirty="0">
+              <a:rPr lang="ja-JP" sz="1050" b="1" dirty="0">
                 <a:solidFill>
                   <a:srgbClr val="8A8D87"/>
                 </a:solidFill>
@@ -3305,7 +3305,7 @@
               </a:rPr>
               <a:t>モック実装</a:t>
             </a:r>
-            <a:endParaRPr lang="en-US" sz="1050" dirty="0"/>
+            <a:endParaRPr lang="ja-JP" sz="1050" dirty="0"/>
           </a:p>
         </p:txBody>
       </p:sp>
@@ -3334,7 +3334,7 @@
               <a:buNone/>
             </a:pPr>
             <a:r>
-              <a:rPr lang="en-US" sz="1900" b="1" dirty="0">
+              <a:rPr lang="ja-JP" sz="1900" b="1" dirty="0">
                 <a:solidFill>
                   <a:srgbClr val="046A38"/>
                 </a:solidFill>
@@ -3344,7 +3344,7 @@
               </a:rPr>
               <a:t>8ビュー</a:t>
             </a:r>
-            <a:endParaRPr lang="en-US" sz="1900" dirty="0"/>
+            <a:endParaRPr lang="ja-JP" sz="1900" dirty="0"/>
           </a:p>
         </p:txBody>
       </p:sp>
@@ -3373,7 +3373,7 @@
               <a:buNone/>
             </a:pPr>
             <a:r>
-              <a:rPr lang="en-US" sz="950" dirty="0">
+              <a:rPr lang="ja-JP" sz="950" dirty="0">
                 <a:solidFill>
                   <a:srgbClr val="53565A"/>
                 </a:solidFill>
@@ -3383,7 +3383,7 @@
               </a:rPr>
               <a:t>体験可能な動作モック</a:t>
             </a:r>
-            <a:endParaRPr lang="en-US" sz="950" dirty="0"/>
+            <a:endParaRPr lang="ja-JP" sz="950" dirty="0"/>
           </a:p>
         </p:txBody>
       </p:sp>
@@ -3446,7 +3446,7 @@
               <a:buNone/>
             </a:pPr>
             <a:r>
-              <a:rPr lang="en-US" sz="1050" b="1" dirty="0">
+              <a:rPr lang="ja-JP" sz="1050" b="1" dirty="0">
                 <a:solidFill>
                   <a:srgbClr val="8A8D87"/>
                 </a:solidFill>
@@ -3456,7 +3456,7 @@
               </a:rPr>
               <a:t>実装済コア</a:t>
             </a:r>
-            <a:endParaRPr lang="en-US" sz="1050" dirty="0"/>
+            <a:endParaRPr lang="ja-JP" sz="1050" dirty="0"/>
           </a:p>
         </p:txBody>
       </p:sp>
@@ -3485,7 +3485,7 @@
               <a:buNone/>
             </a:pPr>
             <a:r>
-              <a:rPr lang="en-US" sz="1900" b="1" dirty="0">
+              <a:rPr lang="ja-JP" sz="1900" b="1" dirty="0">
                 <a:solidFill>
                   <a:srgbClr val="046A38"/>
                 </a:solidFill>
@@ -3495,7 +3495,7 @@
               </a:rPr>
               <a:t>①定期診断</a:t>
             </a:r>
-            <a:endParaRPr lang="en-US" sz="1900" dirty="0"/>
+            <a:endParaRPr lang="ja-JP" sz="1900" dirty="0"/>
           </a:p>
         </p:txBody>
       </p:sp>
@@ -3524,7 +3524,7 @@
               <a:buNone/>
             </a:pPr>
             <a:r>
-              <a:rPr lang="en-US" sz="950" dirty="0">
+              <a:rPr lang="ja-JP" sz="950" dirty="0">
                 <a:solidFill>
                   <a:srgbClr val="53565A"/>
                 </a:solidFill>
@@ -3534,7 +3534,7 @@
               </a:rPr>
               <a:t>5段パイプライン表示</a:t>
             </a:r>
-            <a:endParaRPr lang="en-US" sz="950" dirty="0"/>
+            <a:endParaRPr lang="ja-JP" sz="950" dirty="0"/>
           </a:p>
         </p:txBody>
       </p:sp>
@@ -3597,7 +3597,7 @@
               <a:buNone/>
             </a:pPr>
             <a:r>
-              <a:rPr lang="en-US" sz="1050" b="1" dirty="0">
+              <a:rPr lang="ja-JP" sz="1050" b="1" dirty="0">
                 <a:solidFill>
                   <a:srgbClr val="8A8D87"/>
                 </a:solidFill>
@@ -3607,7 +3607,7 @@
               </a:rPr>
               <a:t>本日ご相談</a:t>
             </a:r>
-            <a:endParaRPr lang="en-US" sz="1050" dirty="0"/>
+            <a:endParaRPr lang="ja-JP" sz="1050" dirty="0"/>
           </a:p>
         </p:txBody>
       </p:sp>
@@ -3636,7 +3636,7 @@
               <a:buNone/>
             </a:pPr>
             <a:r>
-              <a:rPr lang="en-US" sz="1900" b="1" dirty="0">
+              <a:rPr lang="ja-JP" sz="1900" b="1" dirty="0">
                 <a:solidFill>
                   <a:srgbClr val="046A38"/>
                 </a:solidFill>
@@ -3646,7 +3646,7 @@
               </a:rPr>
               <a:t>3件</a:t>
             </a:r>
-            <a:endParaRPr lang="en-US" sz="1900" dirty="0"/>
+            <a:endParaRPr lang="ja-JP" sz="1900" dirty="0"/>
           </a:p>
         </p:txBody>
       </p:sp>
@@ -3675,7 +3675,7 @@
               <a:buNone/>
             </a:pPr>
             <a:r>
-              <a:rPr lang="en-US" sz="950" dirty="0">
+              <a:rPr lang="ja-JP" sz="950" dirty="0">
                 <a:solidFill>
                   <a:srgbClr val="53565A"/>
                 </a:solidFill>
@@ -3685,7 +3685,7 @@
               </a:rPr>
               <a:t>優先度・データ・許諾</a:t>
             </a:r>
-            <a:endParaRPr lang="en-US" sz="950" dirty="0"/>
+            <a:endParaRPr lang="ja-JP" sz="950" dirty="0"/>
           </a:p>
         </p:txBody>
       </p:sp>
@@ -3751,7 +3751,7 @@
               <a:buNone/>
             </a:pPr>
             <a:r>
-              <a:rPr lang="en-US" sz="1200" b="1" dirty="0">
+              <a:rPr lang="ja-JP" sz="1200" b="1" dirty="0">
                 <a:solidFill>
                   <a:srgbClr val="1A1A1A"/>
                 </a:solidFill>
@@ -3768,7 +3768,7 @@
               <a:buNone/>
             </a:pPr>
             <a:r>
-              <a:rPr lang="en-US" sz="1200" dirty="0">
+              <a:rPr lang="ja-JP" sz="1200" dirty="0">
                 <a:solidFill>
                   <a:srgbClr val="53565A"/>
                 </a:solidFill>
@@ -3778,7 +3778,7 @@
               </a:rPr>
               <a:t>の反復サイクルの起点として、実際に触れる形でお見せします。</a:t>
             </a:r>
-            <a:endParaRPr lang="en-US" sz="1200" dirty="0"/>
+            <a:endParaRPr lang="ja-JP" sz="1200" dirty="0"/>
           </a:p>
         </p:txBody>
       </p:sp>
@@ -3807,7 +3807,7 @@
               <a:buNone/>
             </a:pPr>
             <a:r>
-              <a:rPr lang="en-US" sz="900" b="1" dirty="0">
+              <a:rPr lang="ja-JP" sz="900" b="1" dirty="0">
                 <a:solidFill>
                   <a:srgbClr val="046A38"/>
                 </a:solidFill>
@@ -3821,7 +3821,7 @@
               <a:buNone/>
             </a:pPr>
             <a:r>
-              <a:rPr lang="en-US" sz="900" dirty="0">
+              <a:rPr lang="ja-JP" sz="900" dirty="0">
                 <a:solidFill>
                   <a:srgbClr val="8A8D87"/>
                 </a:solidFill>
@@ -3831,7 +3831,7 @@
               </a:rPr>
               <a:t>    ｜    アジェンダ／ハイライト</a:t>
             </a:r>
-            <a:endParaRPr lang="en-US" sz="900" dirty="0"/>
+            <a:endParaRPr lang="ja-JP" sz="900" dirty="0"/>
           </a:p>
         </p:txBody>
       </p:sp>
@@ -3860,7 +3860,7 @@
               <a:buNone/>
             </a:pPr>
             <a:r>
-              <a:rPr lang="en-US" sz="900" dirty="0">
+              <a:rPr lang="ja-JP" sz="900" dirty="0">
                 <a:solidFill>
                   <a:srgbClr val="8A8D87"/>
                 </a:solidFill>
@@ -3870,7 +3870,7 @@
               </a:rPr>
               <a:t>02</a:t>
             </a:r>
-            <a:endParaRPr lang="en-US" sz="900" dirty="0"/>
+            <a:endParaRPr lang="ja-JP" sz="900" dirty="0"/>
           </a:p>
         </p:txBody>
       </p:sp>
@@ -3974,7 +3974,7 @@
               <a:buNone/>
             </a:pPr>
             <a:r>
-              <a:rPr lang="en-US" sz="1100" b="1" spc="200" kern="0" dirty="0">
+              <a:rPr lang="ja-JP" sz="1100" b="1" spc="200" kern="0" dirty="0">
                 <a:solidFill>
                   <a:srgbClr val="046A38"/>
                 </a:solidFill>
@@ -3984,7 +3984,7 @@
               </a:rPr>
               <a:t>UNDERSTANDING &amp; APPROACH</a:t>
             </a:r>
-            <a:endParaRPr lang="en-US" sz="1100" dirty="0"/>
+            <a:endParaRPr lang="ja-JP" sz="1100" dirty="0"/>
           </a:p>
         </p:txBody>
       </p:sp>
@@ -4013,7 +4013,7 @@
               <a:buNone/>
             </a:pPr>
             <a:r>
-              <a:rPr lang="en-US" sz="2500" b="1" dirty="0">
+              <a:rPr lang="ja-JP" sz="2500" b="1" dirty="0">
                 <a:solidFill>
                   <a:srgbClr val="1A1A1A"/>
                 </a:solidFill>
@@ -4023,7 +4023,7 @@
               </a:rPr>
               <a:t>先方要望の理解 と 進め方</a:t>
             </a:r>
-            <a:endParaRPr lang="en-US" sz="2500" dirty="0"/>
+            <a:endParaRPr lang="ja-JP" sz="2500" dirty="0"/>
           </a:p>
         </p:txBody>
       </p:sp>
@@ -4055,7 +4055,7 @@
               <a:buNone/>
             </a:pPr>
             <a:r>
-              <a:rPr lang="en-US" sz="1150" dirty="0">
+              <a:rPr lang="ja-JP" sz="1150" dirty="0">
                 <a:solidFill>
                   <a:srgbClr val="53565A"/>
                 </a:solidFill>
@@ -4065,7 +4065,7 @@
               </a:rPr>
               <a:t>すべてのユースケースは、経営者の「3つの問い」に帰着すると理解しました。この問いに答えることを設計の出発点に置いています。</a:t>
             </a:r>
-            <a:endParaRPr lang="en-US" sz="1150" dirty="0"/>
+            <a:endParaRPr lang="ja-JP" sz="1150" dirty="0"/>
           </a:p>
         </p:txBody>
       </p:sp>
@@ -4128,7 +4128,7 @@
               <a:buNone/>
             </a:pPr>
             <a:r>
-              <a:rPr lang="en-US" sz="1100" b="1" dirty="0">
+              <a:rPr lang="ja-JP" sz="1100" b="1" dirty="0">
                 <a:solidFill>
                   <a:srgbClr val="86BC25"/>
                 </a:solidFill>
@@ -4138,7 +4138,7 @@
               </a:rPr>
               <a:t>問い① ／ 気づく</a:t>
             </a:r>
-            <a:endParaRPr lang="en-US" sz="1100" dirty="0"/>
+            <a:endParaRPr lang="ja-JP" sz="1100" dirty="0"/>
           </a:p>
         </p:txBody>
       </p:sp>
@@ -4167,7 +4167,7 @@
               <a:buNone/>
             </a:pPr>
             <a:r>
-              <a:rPr lang="en-US" sz="1400" b="1" dirty="0">
+              <a:rPr lang="ja-JP" sz="1400" b="1" dirty="0">
                 <a:solidFill>
                   <a:srgbClr val="1A1A1A"/>
                 </a:solidFill>
@@ -4177,7 +4177,7 @@
               </a:rPr>
               <a:t>何が起きた／起きうるのか</a:t>
             </a:r>
-            <a:endParaRPr lang="en-US" sz="1400" dirty="0"/>
+            <a:endParaRPr lang="ja-JP" sz="1400" dirty="0"/>
           </a:p>
         </p:txBody>
       </p:sp>
@@ -4209,7 +4209,7 @@
               <a:buNone/>
             </a:pPr>
             <a:r>
-              <a:rPr lang="en-US" sz="1050" dirty="0">
+              <a:rPr lang="ja-JP" sz="1050" dirty="0">
                 <a:solidFill>
                   <a:srgbClr val="53565A"/>
                 </a:solidFill>
@@ -4219,7 +4219,7 @@
               </a:rPr>
               <a:t>計画とのズレ、外部環境の変化、突発事象。見えていなかったものに気づきたい。</a:t>
             </a:r>
-            <a:endParaRPr lang="en-US" sz="1050" dirty="0"/>
+            <a:endParaRPr lang="ja-JP" sz="1050" dirty="0"/>
           </a:p>
         </p:txBody>
       </p:sp>
@@ -4282,7 +4282,7 @@
               <a:buNone/>
             </a:pPr>
             <a:r>
-              <a:rPr lang="en-US" sz="1100" b="1" dirty="0">
+              <a:rPr lang="ja-JP" sz="1100" b="1" dirty="0">
                 <a:solidFill>
                   <a:srgbClr val="86BC25"/>
                 </a:solidFill>
@@ -4292,7 +4292,7 @@
               </a:rPr>
               <a:t>問い② ／ 見極める</a:t>
             </a:r>
-            <a:endParaRPr lang="en-US" sz="1100" dirty="0"/>
+            <a:endParaRPr lang="ja-JP" sz="1100" dirty="0"/>
           </a:p>
         </p:txBody>
       </p:sp>
@@ -4321,7 +4321,7 @@
               <a:buNone/>
             </a:pPr>
             <a:r>
-              <a:rPr lang="en-US" sz="1400" b="1" dirty="0">
+              <a:rPr lang="ja-JP" sz="1400" b="1" dirty="0">
                 <a:solidFill>
                   <a:srgbClr val="1A1A1A"/>
                 </a:solidFill>
@@ -4331,7 +4331,7 @@
               </a:rPr>
               <a:t>うちにどれくらい効くのか</a:t>
             </a:r>
-            <a:endParaRPr lang="en-US" sz="1400" dirty="0"/>
+            <a:endParaRPr lang="ja-JP" sz="1400" dirty="0"/>
           </a:p>
         </p:txBody>
       </p:sp>
@@ -4363,7 +4363,7 @@
               <a:buNone/>
             </a:pPr>
             <a:r>
-              <a:rPr lang="en-US" sz="1050" dirty="0">
+              <a:rPr lang="ja-JP" sz="1050" dirty="0">
                 <a:solidFill>
                   <a:srgbClr val="53565A"/>
                 </a:solidFill>
@@ -4373,7 +4373,7 @@
               </a:rPr>
               <a:t>どの事業に、どの経路で、どの程度の影響か。判断に足る確からしさで見極めたい。</a:t>
             </a:r>
-            <a:endParaRPr lang="en-US" sz="1050" dirty="0"/>
+            <a:endParaRPr lang="ja-JP" sz="1050" dirty="0"/>
           </a:p>
         </p:txBody>
       </p:sp>
@@ -4436,7 +4436,7 @@
               <a:buNone/>
             </a:pPr>
             <a:r>
-              <a:rPr lang="en-US" sz="1100" b="1" dirty="0">
+              <a:rPr lang="ja-JP" sz="1100" b="1" dirty="0">
                 <a:solidFill>
                   <a:srgbClr val="86BC25"/>
                 </a:solidFill>
@@ -4446,7 +4446,7 @@
               </a:rPr>
               <a:t>問い③ ／ 打ち手を選ぶ</a:t>
             </a:r>
-            <a:endParaRPr lang="en-US" sz="1100" dirty="0"/>
+            <a:endParaRPr lang="ja-JP" sz="1100" dirty="0"/>
           </a:p>
         </p:txBody>
       </p:sp>
@@ -4475,7 +4475,7 @@
               <a:buNone/>
             </a:pPr>
             <a:r>
-              <a:rPr lang="en-US" sz="1400" b="1" dirty="0">
+              <a:rPr lang="ja-JP" sz="1400" b="1" dirty="0">
                 <a:solidFill>
                   <a:srgbClr val="1A1A1A"/>
                 </a:solidFill>
@@ -4485,7 +4485,7 @@
               </a:rPr>
               <a:t>どうすればいいのか</a:t>
             </a:r>
-            <a:endParaRPr lang="en-US" sz="1400" dirty="0"/>
+            <a:endParaRPr lang="ja-JP" sz="1400" dirty="0"/>
           </a:p>
         </p:txBody>
       </p:sp>
@@ -4517,7 +4517,7 @@
               <a:buNone/>
             </a:pPr>
             <a:r>
-              <a:rPr lang="en-US" sz="1050" dirty="0">
+              <a:rPr lang="ja-JP" sz="1050" dirty="0">
                 <a:solidFill>
                   <a:srgbClr val="53565A"/>
                 </a:solidFill>
@@ -4527,7 +4527,7 @@
               </a:rPr>
               <a:t>取りうる選択肢は何か。それぞれの得失は。過去はどう対処したのか。</a:t>
             </a:r>
-            <a:endParaRPr lang="en-US" sz="1050" dirty="0"/>
+            <a:endParaRPr lang="ja-JP" sz="1050" dirty="0"/>
           </a:p>
         </p:txBody>
       </p:sp>
@@ -4556,7 +4556,7 @@
               <a:buNone/>
             </a:pPr>
             <a:r>
-              <a:rPr lang="en-US" sz="1200" b="1" spc="100" kern="0" dirty="0">
+              <a:rPr lang="ja-JP" sz="1200" b="1" spc="100" kern="0" dirty="0">
                 <a:solidFill>
                   <a:srgbClr val="046A38"/>
                 </a:solidFill>
@@ -4566,7 +4566,7 @@
               </a:rPr>
               <a:t>私たちの解釈</a:t>
             </a:r>
-            <a:endParaRPr lang="en-US" sz="1200" dirty="0"/>
+            <a:endParaRPr lang="ja-JP" sz="1200" dirty="0"/>
           </a:p>
         </p:txBody>
       </p:sp>
@@ -4602,7 +4602,7 @@
               <a:buChar char="•"/>
             </a:pPr>
             <a:r>
-              <a:rPr lang="en-US" sz="1100" dirty="0">
+              <a:rPr lang="ja-JP" sz="1100" dirty="0">
                 <a:solidFill>
                   <a:srgbClr val="53565A"/>
                 </a:solidFill>
@@ -4612,7 +4612,7 @@
               </a:rPr>
               <a:t>7つの想定UCは3つの問いのいずれかに必ず帰着。個別UCを別々に作らず、問いに答える「機能」の構造へ再編する。</a:t>
             </a:r>
-            <a:endParaRPr lang="en-US" sz="1100" dirty="0"/>
+            <a:endParaRPr lang="ja-JP" sz="1100" dirty="0"/>
           </a:p>
           <a:p>
             <a:pPr marL="177800" indent="-177800">
@@ -4626,7 +4626,7 @@
               <a:buChar char="•"/>
             </a:pPr>
             <a:r>
-              <a:rPr lang="en-US" sz="1100" dirty="0">
+              <a:rPr lang="ja-JP" sz="1100" dirty="0">
                 <a:solidFill>
                   <a:srgbClr val="53565A"/>
                 </a:solidFill>
@@ -4636,7 +4636,7 @@
               </a:rPr>
               <a:t>影響度は点推定せず「方向×大きさのオーダー×確度」の幅で示す。生成AIの弱点を仕様で守る。</a:t>
             </a:r>
-            <a:endParaRPr lang="en-US" sz="1100" dirty="0"/>
+            <a:endParaRPr lang="ja-JP" sz="1100" dirty="0"/>
           </a:p>
           <a:p>
             <a:pPr marL="177800" indent="-177800">
@@ -4650,7 +4650,7 @@
               <a:buChar char="•"/>
             </a:pPr>
             <a:r>
-              <a:rPr lang="en-US" sz="1100" dirty="0">
+              <a:rPr lang="ja-JP" sz="1100" dirty="0">
                 <a:solidFill>
                   <a:srgbClr val="53565A"/>
                 </a:solidFill>
@@ -4660,7 +4660,7 @@
               </a:rPr>
               <a:t>役員が見るのは「今日の論点」1画面。UIは増やさず、全機能の出力を経営ブリーフ1枚の型に固定する。</a:t>
             </a:r>
-            <a:endParaRPr lang="en-US" sz="1100" dirty="0"/>
+            <a:endParaRPr lang="ja-JP" sz="1100" dirty="0"/>
           </a:p>
         </p:txBody>
       </p:sp>
@@ -4689,7 +4689,7 @@
               <a:buNone/>
             </a:pPr>
             <a:r>
-              <a:rPr lang="en-US" sz="1200" b="1" spc="100" kern="0" dirty="0">
+              <a:rPr lang="ja-JP" sz="1200" b="1" spc="100" kern="0" dirty="0">
                 <a:solidFill>
                   <a:srgbClr val="046A38"/>
                 </a:solidFill>
@@ -4699,7 +4699,7 @@
               </a:rPr>
               <a:t>進め方（PoCの前提）</a:t>
             </a:r>
-            <a:endParaRPr lang="en-US" sz="1200" dirty="0"/>
+            <a:endParaRPr lang="ja-JP" sz="1200" dirty="0"/>
           </a:p>
         </p:txBody>
       </p:sp>
@@ -4735,7 +4735,7 @@
               <a:buChar char="•"/>
             </a:pPr>
             <a:r>
-              <a:rPr lang="en-US" sz="1100" dirty="0">
+              <a:rPr lang="ja-JP" sz="1100" dirty="0">
                 <a:solidFill>
                   <a:srgbClr val="53565A"/>
                 </a:solidFill>
@@ -4745,7 +4745,7 @@
               </a:rPr>
               <a:t>体験 → FB → 精緻化 の反復。まずモックで完成イメージを共有し、方向性を固める。</a:t>
             </a:r>
-            <a:endParaRPr lang="en-US" sz="1100" dirty="0"/>
+            <a:endParaRPr lang="ja-JP" sz="1100" dirty="0"/>
           </a:p>
           <a:p>
             <a:pPr marL="177800" indent="-177800">
@@ -4759,7 +4759,7 @@
               <a:buChar char="•"/>
             </a:pPr>
             <a:r>
-              <a:rPr lang="en-US" sz="1100" dirty="0">
+              <a:rPr lang="ja-JP" sz="1100" dirty="0">
                 <a:solidFill>
                   <a:srgbClr val="53565A"/>
                 </a:solidFill>
@@ -4769,7 +4769,7 @@
               </a:rPr>
               <a:t>公開データ ＋ マスキング社内データ 前提。精度保証はしない段階として合意。</a:t>
             </a:r>
-            <a:endParaRPr lang="en-US" sz="1100" dirty="0"/>
+            <a:endParaRPr lang="ja-JP" sz="1100" dirty="0"/>
           </a:p>
           <a:p>
             <a:pPr marL="177800" indent="-177800">
@@ -4783,7 +4783,7 @@
               <a:buChar char="•"/>
             </a:pPr>
             <a:r>
-              <a:rPr lang="en-US" sz="1100" dirty="0">
+              <a:rPr lang="ja-JP" sz="1100" dirty="0">
                 <a:solidFill>
                   <a:srgbClr val="53565A"/>
                 </a:solidFill>
@@ -4793,7 +4793,7 @@
               </a:rPr>
               <a:t>事業構造マップ・事例基盤はドラフト（たたき台）。妥当性は先方レビューで確定していく。</a:t>
             </a:r>
-            <a:endParaRPr lang="en-US" sz="1100" dirty="0"/>
+            <a:endParaRPr lang="ja-JP" sz="1100" dirty="0"/>
           </a:p>
         </p:txBody>
       </p:sp>
@@ -4822,7 +4822,7 @@
               <a:buNone/>
             </a:pPr>
             <a:r>
-              <a:rPr lang="en-US" sz="900" b="1" dirty="0">
+              <a:rPr lang="ja-JP" sz="900" b="1" dirty="0">
                 <a:solidFill>
                   <a:srgbClr val="046A38"/>
                 </a:solidFill>
@@ -4836,7 +4836,7 @@
               <a:buNone/>
             </a:pPr>
             <a:r>
-              <a:rPr lang="en-US" sz="900" dirty="0">
+              <a:rPr lang="ja-JP" sz="900" dirty="0">
                 <a:solidFill>
                   <a:srgbClr val="8A8D87"/>
                 </a:solidFill>
@@ -4846,7 +4846,7 @@
               </a:rPr>
               <a:t>    ｜    先方要望の理解と進め方</a:t>
             </a:r>
-            <a:endParaRPr lang="en-US" sz="900" dirty="0"/>
+            <a:endParaRPr lang="ja-JP" sz="900" dirty="0"/>
           </a:p>
         </p:txBody>
       </p:sp>
@@ -4875,7 +4875,7 @@
               <a:buNone/>
             </a:pPr>
             <a:r>
-              <a:rPr lang="en-US" sz="900" dirty="0">
+              <a:rPr lang="ja-JP" sz="900" dirty="0">
                 <a:solidFill>
                   <a:srgbClr val="8A8D87"/>
                 </a:solidFill>
@@ -4885,7 +4885,7 @@
               </a:rPr>
               <a:t>03</a:t>
             </a:r>
-            <a:endParaRPr lang="en-US" sz="900" dirty="0"/>
+            <a:endParaRPr lang="ja-JP" sz="900" dirty="0"/>
           </a:p>
         </p:txBody>
       </p:sp>
@@ -4989,7 +4989,7 @@
               <a:buNone/>
             </a:pPr>
             <a:r>
-              <a:rPr lang="en-US" sz="1100" b="1" spc="200" kern="0" dirty="0">
+              <a:rPr lang="ja-JP" sz="1100" b="1" spc="200" kern="0" dirty="0">
                 <a:solidFill>
                   <a:srgbClr val="046A38"/>
                 </a:solidFill>
@@ -4999,7 +4999,7 @@
               </a:rPr>
               <a:t>01 ｜ WHOLE PICTURE</a:t>
             </a:r>
-            <a:endParaRPr lang="en-US" sz="1100" dirty="0"/>
+            <a:endParaRPr lang="ja-JP" sz="1100" dirty="0"/>
           </a:p>
         </p:txBody>
       </p:sp>
@@ -5028,7 +5028,7 @@
               <a:buNone/>
             </a:pPr>
             <a:r>
-              <a:rPr lang="en-US" sz="2500" b="1" dirty="0">
+              <a:rPr lang="ja-JP" sz="2500" b="1" dirty="0">
                 <a:solidFill>
                   <a:srgbClr val="1A1A1A"/>
                 </a:solidFill>
@@ -5038,7 +5038,7 @@
               </a:rPr>
               <a:t>アプリ全体像 ― 4機能 × 3つの問い × 想定UC7</a:t>
             </a:r>
-            <a:endParaRPr lang="en-US" sz="2500" dirty="0"/>
+            <a:endParaRPr lang="ja-JP" sz="2500" dirty="0"/>
           </a:p>
         </p:txBody>
       </p:sp>
@@ -5070,7 +5070,7 @@
               <a:buNone/>
             </a:pPr>
             <a:r>
-              <a:rPr lang="en-US" sz="1150" dirty="0">
+              <a:rPr lang="ja-JP" sz="1150" dirty="0">
                 <a:solidFill>
                   <a:srgbClr val="53565A"/>
                 </a:solidFill>
@@ -5080,7 +5080,7 @@
               </a:rPr>
               <a:t>「気づく → 見極める → 打ち手」を1本のパイプラインでつなぐ。⓪が発火し、①②が診断し、③が相場観を供給する。</a:t>
             </a:r>
-            <a:endParaRPr lang="en-US" sz="1150" dirty="0"/>
+            <a:endParaRPr lang="ja-JP" sz="1150" dirty="0"/>
           </a:p>
         </p:txBody>
       </p:sp>
@@ -5143,7 +5143,7 @@
               <a:buNone/>
             </a:pPr>
             <a:r>
-              <a:rPr lang="en-US" sz="1400" b="1" dirty="0">
+              <a:rPr lang="ja-JP" sz="1400" b="1" dirty="0">
                 <a:solidFill>
                   <a:srgbClr val="046A38"/>
                 </a:solidFill>
@@ -5153,7 +5153,7 @@
               </a:rPr>
               <a:t>⓪ 常時センシング</a:t>
             </a:r>
-            <a:endParaRPr lang="en-US" sz="1400" dirty="0"/>
+            <a:endParaRPr lang="ja-JP" sz="1400" dirty="0"/>
           </a:p>
         </p:txBody>
       </p:sp>
@@ -5185,7 +5185,7 @@
               <a:buNone/>
             </a:pPr>
             <a:r>
-              <a:rPr lang="en-US" sz="950" dirty="0">
+              <a:rPr lang="ja-JP" sz="950" dirty="0">
                 <a:solidFill>
                   <a:srgbClr val="53565A"/>
                 </a:solidFill>
@@ -5195,7 +5195,7 @@
               </a:rPr>
               <a:t>KPI進捗・外部指標の定常監視（スケジュール駆動）　▶ UC-1・2 検知</a:t>
             </a:r>
-            <a:endParaRPr lang="en-US" sz="950" dirty="0"/>
+            <a:endParaRPr lang="ja-JP" sz="950" dirty="0"/>
           </a:p>
         </p:txBody>
       </p:sp>
@@ -5258,7 +5258,7 @@
               <a:buNone/>
             </a:pPr>
             <a:r>
-              <a:rPr lang="en-US" sz="1400" b="1" dirty="0">
+              <a:rPr lang="ja-JP" sz="1400" b="1" dirty="0">
                 <a:solidFill>
                   <a:srgbClr val="046A38"/>
                 </a:solidFill>
@@ -5268,7 +5268,7 @@
               </a:rPr>
               <a:t>① 定期診断</a:t>
             </a:r>
-            <a:endParaRPr lang="en-US" sz="1400" dirty="0"/>
+            <a:endParaRPr lang="ja-JP" sz="1400" dirty="0"/>
           </a:p>
         </p:txBody>
       </p:sp>
@@ -5300,7 +5300,7 @@
               <a:buNone/>
             </a:pPr>
             <a:r>
-              <a:rPr lang="en-US" sz="950" dirty="0">
+              <a:rPr lang="ja-JP" sz="950" dirty="0">
                 <a:solidFill>
                   <a:srgbClr val="53565A"/>
                 </a:solidFill>
@@ -5310,7 +5310,7 @@
               </a:rPr>
               <a:t>事業計画の整合性・論理性・リスク精査（計画提出で駆動）　▶ UC-1〜4</a:t>
             </a:r>
-            <a:endParaRPr lang="en-US" sz="950" dirty="0"/>
+            <a:endParaRPr lang="ja-JP" sz="950" dirty="0"/>
           </a:p>
         </p:txBody>
       </p:sp>
@@ -5373,7 +5373,7 @@
               <a:buNone/>
             </a:pPr>
             <a:r>
-              <a:rPr lang="en-US" sz="1400" b="1" dirty="0">
+              <a:rPr lang="ja-JP" sz="1400" b="1" dirty="0">
                 <a:solidFill>
                   <a:srgbClr val="B33A2B"/>
                 </a:solidFill>
@@ -5383,7 +5383,7 @@
               </a:rPr>
               <a:t>② 臨時診断</a:t>
             </a:r>
-            <a:endParaRPr lang="en-US" sz="1400" dirty="0"/>
+            <a:endParaRPr lang="ja-JP" sz="1400" dirty="0"/>
           </a:p>
         </p:txBody>
       </p:sp>
@@ -5415,7 +5415,7 @@
               <a:buNone/>
             </a:pPr>
             <a:r>
-              <a:rPr lang="en-US" sz="950" dirty="0">
+              <a:rPr lang="ja-JP" sz="950" dirty="0">
                 <a:solidFill>
                   <a:srgbClr val="53565A"/>
                 </a:solidFill>
@@ -5425,7 +5425,7 @@
               </a:rPr>
               <a:t>急変・突発事象の影響度シナリオ分析（イベント駆動）　▶ UC-5〜7</a:t>
             </a:r>
-            <a:endParaRPr lang="en-US" sz="950" dirty="0"/>
+            <a:endParaRPr lang="ja-JP" sz="950" dirty="0"/>
           </a:p>
         </p:txBody>
       </p:sp>
@@ -5488,7 +5488,7 @@
               <a:buNone/>
             </a:pPr>
             <a:r>
-              <a:rPr lang="en-US" sz="1400" b="1" dirty="0">
+              <a:rPr lang="ja-JP" sz="1400" b="1" dirty="0">
                 <a:solidFill>
                   <a:srgbClr val="046A38"/>
                 </a:solidFill>
@@ -5498,7 +5498,7 @@
               </a:rPr>
               <a:t>③ 事例ナレッジ基盤（RAG）</a:t>
             </a:r>
-            <a:endParaRPr lang="en-US" sz="1400" dirty="0"/>
+            <a:endParaRPr lang="ja-JP" sz="1400" dirty="0"/>
           </a:p>
         </p:txBody>
       </p:sp>
@@ -5530,7 +5530,7 @@
               <a:buNone/>
             </a:pPr>
             <a:r>
-              <a:rPr lang="en-US" sz="950" dirty="0">
+              <a:rPr lang="ja-JP" sz="950" dirty="0">
                 <a:solidFill>
                   <a:srgbClr val="53565A"/>
                 </a:solidFill>
@@ -5540,7 +5540,7 @@
               </a:rPr>
               <a:t>外部の類似イベント事例が主役　▶ ①②の出力に「過去の類似局面」を自動添付</a:t>
             </a:r>
-            <a:endParaRPr lang="en-US" sz="950" dirty="0"/>
+            <a:endParaRPr lang="ja-JP" sz="950" dirty="0"/>
           </a:p>
         </p:txBody>
       </p:sp>
@@ -5665,7 +5665,7 @@
               <a:buNone/>
             </a:pPr>
             <a:r>
-              <a:rPr lang="en-US" sz="1000" b="1" dirty="0">
+              <a:rPr lang="ja-JP" sz="1000" b="1" dirty="0">
                 <a:solidFill>
                   <a:srgbClr val="B33A2B"/>
                 </a:solidFill>
@@ -5675,7 +5675,7 @@
               </a:rPr>
               <a:t>急変検知で自動発火</a:t>
             </a:r>
-            <a:endParaRPr lang="en-US" sz="1000" dirty="0"/>
+            <a:endParaRPr lang="ja-JP" sz="1000" dirty="0"/>
           </a:p>
         </p:txBody>
       </p:sp>
@@ -5707,7 +5707,7 @@
               <a:buNone/>
             </a:pPr>
             <a:r>
-              <a:rPr lang="en-US" sz="850" dirty="0">
+              <a:rPr lang="ja-JP" sz="850" dirty="0">
                 <a:solidFill>
                   <a:srgbClr val="8A8D87"/>
                 </a:solidFill>
@@ -5717,7 +5717,7 @@
               </a:rPr>
               <a:t>同一パイプライン／トリガー違い</a:t>
             </a:r>
-            <a:endParaRPr lang="en-US" sz="850" dirty="0"/>
+            <a:endParaRPr lang="ja-JP" sz="850" dirty="0"/>
           </a:p>
         </p:txBody>
       </p:sp>
@@ -5746,7 +5746,7 @@
               <a:buNone/>
             </a:pPr>
             <a:r>
-              <a:rPr lang="en-US" sz="950" dirty="0">
+              <a:rPr lang="ja-JP" sz="950" dirty="0">
                 <a:solidFill>
                   <a:srgbClr val="8A8D87"/>
                 </a:solidFill>
@@ -5756,7 +5756,7 @@
               </a:rPr>
               <a:t>類似事例・相場観を供給</a:t>
             </a:r>
-            <a:endParaRPr lang="en-US" sz="950" dirty="0"/>
+            <a:endParaRPr lang="ja-JP" sz="950" dirty="0"/>
           </a:p>
         </p:txBody>
       </p:sp>
@@ -5798,7 +5798,7 @@
                         <a:buNone/>
                       </a:pPr>
                       <a:r>
-                        <a:rPr lang="en-US" sz="950" b="1" dirty="0">
+                        <a:rPr lang="ja-JP" sz="950" b="1" dirty="0">
                           <a:solidFill>
                             <a:srgbClr val="FFFFFF"/>
                           </a:solidFill>
@@ -5808,7 +5808,7 @@
                         </a:rPr>
                         <a:t>機能</a:t>
                       </a:r>
-                      <a:endParaRPr lang="en-US" sz="950" dirty="0">
+                      <a:endParaRPr lang="ja-JP" sz="950" dirty="0">
                         <a:latin typeface="Yu Gothic" charset="0"/>
                         <a:ea typeface="Yu Gothic" charset="0"/>
                         <a:cs typeface="Yu Gothic" charset="0"/>
@@ -5866,7 +5866,7 @@
                         <a:buNone/>
                       </a:pPr>
                       <a:r>
-                        <a:rPr lang="en-US" sz="950" b="1" dirty="0">
+                        <a:rPr lang="ja-JP" sz="950" b="1" dirty="0">
                           <a:solidFill>
                             <a:srgbClr val="FFFFFF"/>
                           </a:solidFill>
@@ -5876,7 +5876,7 @@
                         </a:rPr>
                         <a:t>役割（トリガー × レイヤー）</a:t>
                       </a:r>
-                      <a:endParaRPr lang="en-US" sz="950" dirty="0">
+                      <a:endParaRPr lang="ja-JP" sz="950" dirty="0">
                         <a:latin typeface="Yu Gothic" charset="0"/>
                         <a:ea typeface="Yu Gothic" charset="0"/>
                         <a:cs typeface="Yu Gothic" charset="0"/>
@@ -5934,7 +5934,7 @@
                         <a:buNone/>
                       </a:pPr>
                       <a:r>
-                        <a:rPr lang="en-US" sz="950" b="1" dirty="0">
+                        <a:rPr lang="ja-JP" sz="950" b="1" dirty="0">
                           <a:solidFill>
                             <a:srgbClr val="FFFFFF"/>
                           </a:solidFill>
@@ -5944,7 +5944,7 @@
                         </a:rPr>
                         <a:t>対応UC</a:t>
                       </a:r>
-                      <a:endParaRPr lang="en-US" sz="950" dirty="0">
+                      <a:endParaRPr lang="ja-JP" sz="950" dirty="0">
                         <a:latin typeface="Yu Gothic" charset="0"/>
                         <a:ea typeface="Yu Gothic" charset="0"/>
                         <a:cs typeface="Yu Gothic" charset="0"/>
@@ -6002,7 +6002,7 @@
                         <a:buNone/>
                       </a:pPr>
                       <a:r>
-                        <a:rPr lang="en-US" sz="950" b="1" dirty="0">
+                        <a:rPr lang="ja-JP" sz="950" b="1" dirty="0">
                           <a:solidFill>
                             <a:srgbClr val="FFFFFF"/>
                           </a:solidFill>
@@ -6012,7 +6012,7 @@
                         </a:rPr>
                         <a:t>答える問い</a:t>
                       </a:r>
-                      <a:endParaRPr lang="en-US" sz="950" dirty="0">
+                      <a:endParaRPr lang="ja-JP" sz="950" dirty="0">
                         <a:latin typeface="Yu Gothic" charset="0"/>
                         <a:ea typeface="Yu Gothic" charset="0"/>
                         <a:cs typeface="Yu Gothic" charset="0"/>
@@ -6072,7 +6072,7 @@
                         <a:buNone/>
                       </a:pPr>
                       <a:r>
-                        <a:rPr lang="en-US" sz="950" b="1" dirty="0">
+                        <a:rPr lang="ja-JP" sz="950" b="1" dirty="0">
                           <a:solidFill>
                             <a:srgbClr val="046A38"/>
                           </a:solidFill>
@@ -6082,7 +6082,7 @@
                         </a:rPr>
                         <a:t>⓪ 常時センシング</a:t>
                       </a:r>
-                      <a:endParaRPr lang="en-US" sz="950" dirty="0">
+                      <a:endParaRPr lang="ja-JP" sz="950" dirty="0">
                         <a:latin typeface="Yu Gothic" charset="0"/>
                         <a:ea typeface="Yu Gothic" charset="0"/>
                         <a:cs typeface="Yu Gothic" charset="0"/>
@@ -6137,7 +6137,7 @@
                         <a:buNone/>
                       </a:pPr>
                       <a:r>
-                        <a:rPr lang="en-US" sz="950" dirty="0">
+                        <a:rPr lang="ja-JP" sz="950" dirty="0">
                           <a:solidFill>
                             <a:srgbClr val="53565A"/>
                           </a:solidFill>
@@ -6147,7 +6147,7 @@
                         </a:rPr>
                         <a:t>KPI・外部指標を定常監視。急変検知で②を自動発火</a:t>
                       </a:r>
-                      <a:endParaRPr lang="en-US" sz="950" dirty="0">
+                      <a:endParaRPr lang="ja-JP" sz="950" dirty="0">
                         <a:latin typeface="Yu Gothic" charset="0"/>
                         <a:ea typeface="Yu Gothic" charset="0"/>
                         <a:cs typeface="Yu Gothic" charset="0"/>
@@ -6202,7 +6202,7 @@
                         <a:buNone/>
                       </a:pPr>
                       <a:r>
-                        <a:rPr lang="en-US" sz="950" dirty="0">
+                        <a:rPr lang="ja-JP" sz="950" dirty="0">
                           <a:solidFill>
                             <a:srgbClr val="53565A"/>
                           </a:solidFill>
@@ -6212,7 +6212,7 @@
                         </a:rPr>
                         <a:t>UC-1・2 検知</a:t>
                       </a:r>
-                      <a:endParaRPr lang="en-US" sz="950" dirty="0">
+                      <a:endParaRPr lang="ja-JP" sz="950" dirty="0">
                         <a:latin typeface="Yu Gothic" charset="0"/>
                         <a:ea typeface="Yu Gothic" charset="0"/>
                         <a:cs typeface="Yu Gothic" charset="0"/>
@@ -6267,7 +6267,7 @@
                         <a:buNone/>
                       </a:pPr>
                       <a:r>
-                        <a:rPr lang="en-US" sz="950" dirty="0">
+                        <a:rPr lang="ja-JP" sz="950" dirty="0">
                           <a:solidFill>
                             <a:srgbClr val="53565A"/>
                           </a:solidFill>
@@ -6277,7 +6277,7 @@
                         </a:rPr>
                         <a:t>問い①（気づく）</a:t>
                       </a:r>
-                      <a:endParaRPr lang="en-US" sz="950" dirty="0">
+                      <a:endParaRPr lang="ja-JP" sz="950" dirty="0">
                         <a:latin typeface="Yu Gothic" charset="0"/>
                         <a:ea typeface="Yu Gothic" charset="0"/>
                         <a:cs typeface="Yu Gothic" charset="0"/>
@@ -6334,7 +6334,7 @@
                         <a:buNone/>
                       </a:pPr>
                       <a:r>
-                        <a:rPr lang="en-US" sz="950" b="1" dirty="0">
+                        <a:rPr lang="ja-JP" sz="950" b="1" dirty="0">
                           <a:solidFill>
                             <a:srgbClr val="046A38"/>
                           </a:solidFill>
@@ -6344,7 +6344,7 @@
                         </a:rPr>
                         <a:t>① 定期診断</a:t>
                       </a:r>
-                      <a:endParaRPr lang="en-US" sz="950" dirty="0">
+                      <a:endParaRPr lang="ja-JP" sz="950" dirty="0">
                         <a:latin typeface="Yu Gothic" charset="0"/>
                         <a:ea typeface="Yu Gothic" charset="0"/>
                         <a:cs typeface="Yu Gothic" charset="0"/>
@@ -6399,7 +6399,7 @@
                         <a:buNone/>
                       </a:pPr>
                       <a:r>
-                        <a:rPr lang="en-US" sz="950" dirty="0">
+                        <a:rPr lang="ja-JP" sz="950" dirty="0">
                           <a:solidFill>
                             <a:srgbClr val="53565A"/>
                           </a:solidFill>
@@ -6409,7 +6409,7 @@
                         </a:rPr>
                         <a:t>各社事業計画の整合性・論理性・リスクをHD横断で精査</a:t>
                       </a:r>
-                      <a:endParaRPr lang="en-US" sz="950" dirty="0">
+                      <a:endParaRPr lang="ja-JP" sz="950" dirty="0">
                         <a:latin typeface="Yu Gothic" charset="0"/>
                         <a:ea typeface="Yu Gothic" charset="0"/>
                         <a:cs typeface="Yu Gothic" charset="0"/>
@@ -6464,7 +6464,7 @@
                         <a:buNone/>
                       </a:pPr>
                       <a:r>
-                        <a:rPr lang="en-US" sz="950" dirty="0">
+                        <a:rPr lang="ja-JP" sz="950" dirty="0">
                           <a:solidFill>
                             <a:srgbClr val="53565A"/>
                           </a:solidFill>
@@ -6474,7 +6474,7 @@
                         </a:rPr>
                         <a:t>UC-1〜4</a:t>
                       </a:r>
-                      <a:endParaRPr lang="en-US" sz="950" dirty="0">
+                      <a:endParaRPr lang="ja-JP" sz="950" dirty="0">
                         <a:latin typeface="Yu Gothic" charset="0"/>
                         <a:ea typeface="Yu Gothic" charset="0"/>
                         <a:cs typeface="Yu Gothic" charset="0"/>
@@ -6529,7 +6529,7 @@
                         <a:buNone/>
                       </a:pPr>
                       <a:r>
-                        <a:rPr lang="en-US" sz="950" dirty="0">
+                        <a:rPr lang="ja-JP" sz="950" dirty="0">
                           <a:solidFill>
                             <a:srgbClr val="53565A"/>
                           </a:solidFill>
@@ -6539,7 +6539,7 @@
                         </a:rPr>
                         <a:t>問い①②③ すべて</a:t>
                       </a:r>
-                      <a:endParaRPr lang="en-US" sz="950" dirty="0">
+                      <a:endParaRPr lang="ja-JP" sz="950" dirty="0">
                         <a:latin typeface="Yu Gothic" charset="0"/>
                         <a:ea typeface="Yu Gothic" charset="0"/>
                         <a:cs typeface="Yu Gothic" charset="0"/>
@@ -6596,7 +6596,7 @@
                         <a:buNone/>
                       </a:pPr>
                       <a:r>
-                        <a:rPr lang="en-US" sz="950" b="1" dirty="0">
+                        <a:rPr lang="ja-JP" sz="950" b="1" dirty="0">
                           <a:solidFill>
                             <a:srgbClr val="B33A2B"/>
                           </a:solidFill>
@@ -6606,7 +6606,7 @@
                         </a:rPr>
                         <a:t>② 臨時診断</a:t>
                       </a:r>
-                      <a:endParaRPr lang="en-US" sz="950" dirty="0">
+                      <a:endParaRPr lang="ja-JP" sz="950" dirty="0">
                         <a:latin typeface="Yu Gothic" charset="0"/>
                         <a:ea typeface="Yu Gothic" charset="0"/>
                         <a:cs typeface="Yu Gothic" charset="0"/>
@@ -6661,7 +6661,7 @@
                         <a:buNone/>
                       </a:pPr>
                       <a:r>
-                        <a:rPr lang="en-US" sz="950" dirty="0">
+                        <a:rPr lang="ja-JP" sz="950" dirty="0">
                           <a:solidFill>
                             <a:srgbClr val="53565A"/>
                           </a:solidFill>
@@ -6671,7 +6671,7 @@
                         </a:rPr>
                         <a:t>急変・突発事象の影響度をシナリオ分析（①と同一）</a:t>
                       </a:r>
-                      <a:endParaRPr lang="en-US" sz="950" dirty="0">
+                      <a:endParaRPr lang="ja-JP" sz="950" dirty="0">
                         <a:latin typeface="Yu Gothic" charset="0"/>
                         <a:ea typeface="Yu Gothic" charset="0"/>
                         <a:cs typeface="Yu Gothic" charset="0"/>
@@ -6726,7 +6726,7 @@
                         <a:buNone/>
                       </a:pPr>
                       <a:r>
-                        <a:rPr lang="en-US" sz="950" dirty="0">
+                        <a:rPr lang="ja-JP" sz="950" dirty="0">
                           <a:solidFill>
                             <a:srgbClr val="53565A"/>
                           </a:solidFill>
@@ -6736,7 +6736,7 @@
                         </a:rPr>
                         <a:t>UC-5〜7</a:t>
                       </a:r>
-                      <a:endParaRPr lang="en-US" sz="950" dirty="0">
+                      <a:endParaRPr lang="ja-JP" sz="950" dirty="0">
                         <a:latin typeface="Yu Gothic" charset="0"/>
                         <a:ea typeface="Yu Gothic" charset="0"/>
                         <a:cs typeface="Yu Gothic" charset="0"/>
@@ -6791,7 +6791,7 @@
                         <a:buNone/>
                       </a:pPr>
                       <a:r>
-                        <a:rPr lang="en-US" sz="950" dirty="0">
+                        <a:rPr lang="ja-JP" sz="950" dirty="0">
                           <a:solidFill>
                             <a:srgbClr val="53565A"/>
                           </a:solidFill>
@@ -6801,7 +6801,7 @@
                         </a:rPr>
                         <a:t>問い②③</a:t>
                       </a:r>
-                      <a:endParaRPr lang="en-US" sz="950" dirty="0">
+                      <a:endParaRPr lang="ja-JP" sz="950" dirty="0">
                         <a:latin typeface="Yu Gothic" charset="0"/>
                         <a:ea typeface="Yu Gothic" charset="0"/>
                         <a:cs typeface="Yu Gothic" charset="0"/>
@@ -6858,7 +6858,7 @@
                         <a:buNone/>
                       </a:pPr>
                       <a:r>
-                        <a:rPr lang="en-US" sz="950" b="1" dirty="0">
+                        <a:rPr lang="ja-JP" sz="950" b="1" dirty="0">
                           <a:solidFill>
                             <a:srgbClr val="046A38"/>
                           </a:solidFill>
@@ -6868,7 +6868,7 @@
                         </a:rPr>
                         <a:t>③ 事例ナレッジ基盤</a:t>
                       </a:r>
-                      <a:endParaRPr lang="en-US" sz="950" dirty="0">
+                      <a:endParaRPr lang="ja-JP" sz="950" dirty="0">
                         <a:latin typeface="Yu Gothic" charset="0"/>
                         <a:ea typeface="Yu Gothic" charset="0"/>
                         <a:cs typeface="Yu Gothic" charset="0"/>
@@ -6923,7 +6923,7 @@
                         <a:buNone/>
                       </a:pPr>
                       <a:r>
-                        <a:rPr lang="en-US" sz="950" dirty="0">
+                        <a:rPr lang="ja-JP" sz="950" dirty="0">
                           <a:solidFill>
                             <a:srgbClr val="53565A"/>
                           </a:solidFill>
@@ -6933,7 +6933,7 @@
                         </a:rPr>
                         <a:t>外部の類似事例が主役。①②の出力に類似局面を自動添付</a:t>
                       </a:r>
-                      <a:endParaRPr lang="en-US" sz="950" dirty="0">
+                      <a:endParaRPr lang="ja-JP" sz="950" dirty="0">
                         <a:latin typeface="Yu Gothic" charset="0"/>
                         <a:ea typeface="Yu Gothic" charset="0"/>
                         <a:cs typeface="Yu Gothic" charset="0"/>
@@ -6988,7 +6988,7 @@
                         <a:buNone/>
                       </a:pPr>
                       <a:r>
-                        <a:rPr lang="en-US" sz="950" dirty="0">
+                        <a:rPr lang="ja-JP" sz="950" dirty="0">
                           <a:solidFill>
                             <a:srgbClr val="53565A"/>
                           </a:solidFill>
@@ -6998,7 +6998,7 @@
                         </a:rPr>
                         <a:t>全UCに供給</a:t>
                       </a:r>
-                      <a:endParaRPr lang="en-US" sz="950" dirty="0">
+                      <a:endParaRPr lang="ja-JP" sz="950" dirty="0">
                         <a:latin typeface="Yu Gothic" charset="0"/>
                         <a:ea typeface="Yu Gothic" charset="0"/>
                         <a:cs typeface="Yu Gothic" charset="0"/>
@@ -7053,7 +7053,7 @@
                         <a:buNone/>
                       </a:pPr>
                       <a:r>
-                        <a:rPr lang="en-US" sz="950" dirty="0">
+                        <a:rPr lang="ja-JP" sz="950" dirty="0">
                           <a:solidFill>
                             <a:srgbClr val="53565A"/>
                           </a:solidFill>
@@ -7063,7 +7063,7 @@
                         </a:rPr>
                         <a:t>②③の確からしさ</a:t>
                       </a:r>
-                      <a:endParaRPr lang="en-US" sz="950" dirty="0">
+                      <a:endParaRPr lang="ja-JP" sz="950" dirty="0">
                         <a:latin typeface="Yu Gothic" charset="0"/>
                         <a:ea typeface="Yu Gothic" charset="0"/>
                         <a:cs typeface="Yu Gothic" charset="0"/>
@@ -7139,7 +7139,7 @@
               <a:buNone/>
             </a:pPr>
             <a:r>
-              <a:rPr lang="en-US" sz="900" b="1" dirty="0">
+              <a:rPr lang="ja-JP" sz="900" b="1" dirty="0">
                 <a:solidFill>
                   <a:srgbClr val="046A38"/>
                 </a:solidFill>
@@ -7153,7 +7153,7 @@
               <a:buNone/>
             </a:pPr>
             <a:r>
-              <a:rPr lang="en-US" sz="900" dirty="0">
+              <a:rPr lang="ja-JP" sz="900" dirty="0">
                 <a:solidFill>
                   <a:srgbClr val="8A8D87"/>
                 </a:solidFill>
@@ -7163,7 +7163,7 @@
               </a:rPr>
               <a:t>    ｜    アプリ全体像</a:t>
             </a:r>
-            <a:endParaRPr lang="en-US" sz="900" dirty="0"/>
+            <a:endParaRPr lang="ja-JP" sz="900" dirty="0"/>
           </a:p>
         </p:txBody>
       </p:sp>
@@ -7192,7 +7192,7 @@
               <a:buNone/>
             </a:pPr>
             <a:r>
-              <a:rPr lang="en-US" sz="900" dirty="0">
+              <a:rPr lang="ja-JP" sz="900" dirty="0">
                 <a:solidFill>
                   <a:srgbClr val="8A8D87"/>
                 </a:solidFill>
@@ -7202,7 +7202,7 @@
               </a:rPr>
               <a:t>04</a:t>
             </a:r>
-            <a:endParaRPr lang="en-US" sz="900" dirty="0"/>
+            <a:endParaRPr lang="ja-JP" sz="900" dirty="0"/>
           </a:p>
         </p:txBody>
       </p:sp>
@@ -7306,7 +7306,7 @@
               <a:buNone/>
             </a:pPr>
             <a:r>
-              <a:rPr lang="en-US" sz="1100" b="1" spc="200" kern="0" dirty="0">
+              <a:rPr lang="ja-JP" sz="1100" b="1" spc="200" kern="0" dirty="0">
                 <a:solidFill>
                   <a:srgbClr val="046A38"/>
                 </a:solidFill>
@@ -7316,7 +7316,7 @@
               </a:rPr>
               <a:t>02 ｜ PRIORITIZATION &amp; MECHANISM</a:t>
             </a:r>
-            <a:endParaRPr lang="en-US" sz="1100" dirty="0"/>
+            <a:endParaRPr lang="ja-JP" sz="1100" dirty="0"/>
           </a:p>
         </p:txBody>
       </p:sp>
@@ -7345,7 +7345,7 @@
               <a:buNone/>
             </a:pPr>
             <a:r>
-              <a:rPr lang="en-US" sz="2500" b="1" dirty="0">
+              <a:rPr lang="ja-JP" sz="2500" b="1" dirty="0">
                 <a:solidFill>
                   <a:srgbClr val="1A1A1A"/>
                 </a:solidFill>
@@ -7355,7 +7355,7 @@
               </a:rPr>
               <a:t>優先度検討 と 実現の仕組み</a:t>
             </a:r>
-            <a:endParaRPr lang="en-US" sz="2500" dirty="0"/>
+            <a:endParaRPr lang="ja-JP" sz="2500" dirty="0"/>
           </a:p>
         </p:txBody>
       </p:sp>
@@ -7387,7 +7387,7 @@
               <a:buNone/>
             </a:pPr>
             <a:r>
-              <a:rPr lang="en-US" sz="1150" dirty="0">
+              <a:rPr lang="ja-JP" sz="1150" dirty="0">
                 <a:solidFill>
                   <a:srgbClr val="53565A"/>
                 </a:solidFill>
@@ -7397,7 +7397,7 @@
               </a:rPr>
               <a:t>4機能はいずれも実現前提。Impact × Feasibility で立ち上げ順序を仕分け、難点は計画的に潰す。（▲データ取得／◆技術難易度／●運用・体制／■ライセンス）</a:t>
             </a:r>
-            <a:endParaRPr lang="en-US" sz="1150" dirty="0"/>
+            <a:endParaRPr lang="ja-JP" sz="1150" dirty="0"/>
           </a:p>
         </p:txBody>
       </p:sp>
@@ -7426,7 +7426,7 @@
               <a:buNone/>
             </a:pPr>
             <a:r>
-              <a:rPr lang="en-US" sz="1200" b="1" spc="100" kern="0" dirty="0">
+              <a:rPr lang="ja-JP" sz="1200" b="1" spc="100" kern="0" dirty="0">
                 <a:solidFill>
                   <a:srgbClr val="046A38"/>
                 </a:solidFill>
@@ -7436,7 +7436,7 @@
               </a:rPr>
               <a:t>Impact × Feasibility（初期仮説）</a:t>
             </a:r>
-            <a:endParaRPr lang="en-US" sz="1200" dirty="0"/>
+            <a:endParaRPr lang="ja-JP" sz="1200" dirty="0"/>
           </a:p>
         </p:txBody>
       </p:sp>
@@ -7499,7 +7499,7 @@
               <a:buNone/>
             </a:pPr>
             <a:r>
-              <a:rPr lang="en-US" sz="1000" b="1" dirty="0">
+              <a:rPr lang="ja-JP" sz="1000" b="1" dirty="0">
                 <a:solidFill>
                   <a:srgbClr val="C9860A"/>
                 </a:solidFill>
@@ -7509,7 +7509,7 @@
               </a:rPr>
               <a:t>【次の重点】高 × 中</a:t>
             </a:r>
-            <a:endParaRPr lang="en-US" sz="1000" dirty="0"/>
+            <a:endParaRPr lang="ja-JP" sz="1000" dirty="0"/>
           </a:p>
         </p:txBody>
       </p:sp>
@@ -7541,7 +7541,7 @@
               <a:buNone/>
             </a:pPr>
             <a:r>
-              <a:rPr lang="en-US" sz="1050" b="1" dirty="0">
+              <a:rPr lang="ja-JP" sz="1050" b="1" dirty="0">
                 <a:solidFill>
                   <a:srgbClr val="B33A2B"/>
                 </a:solidFill>
@@ -7558,7 +7558,7 @@
               <a:buNone/>
             </a:pPr>
             <a:r>
-              <a:rPr lang="en-US" sz="950" dirty="0">
+              <a:rPr lang="ja-JP" sz="950" dirty="0">
                 <a:solidFill>
                   <a:srgbClr val="53565A"/>
                 </a:solidFill>
@@ -7568,7 +7568,7 @@
               </a:rPr>
               <a:t>（UC5-7）▲◆</a:t>
             </a:r>
-            <a:endParaRPr lang="en-US" sz="1050" dirty="0"/>
+            <a:endParaRPr lang="ja-JP" sz="1050" dirty="0"/>
           </a:p>
           <a:p>
             <a:pPr indent="0" marL="0">
@@ -7578,7 +7578,7 @@
               <a:buNone/>
             </a:pPr>
             <a:r>
-              <a:rPr lang="en-US" sz="1050" b="1" dirty="0">
+              <a:rPr lang="ja-JP" sz="1050" b="1" dirty="0">
                 <a:solidFill>
                   <a:srgbClr val="1A1A1A"/>
                 </a:solidFill>
@@ -7595,7 +7595,7 @@
               <a:buNone/>
             </a:pPr>
             <a:r>
-              <a:rPr lang="en-US" sz="950" dirty="0">
+              <a:rPr lang="ja-JP" sz="950" dirty="0">
                 <a:solidFill>
                   <a:srgbClr val="53565A"/>
                 </a:solidFill>
@@ -7605,7 +7605,7 @@
               </a:rPr>
               <a:t>（▲■）</a:t>
             </a:r>
-            <a:endParaRPr lang="en-US" sz="1050" dirty="0"/>
+            <a:endParaRPr lang="ja-JP" sz="1050" dirty="0"/>
           </a:p>
         </p:txBody>
       </p:sp>
@@ -7637,7 +7637,7 @@
               <a:buNone/>
             </a:pPr>
             <a:r>
-              <a:rPr lang="en-US" sz="900" dirty="0">
+              <a:rPr lang="ja-JP" sz="900" dirty="0">
                 <a:solidFill>
                   <a:srgbClr val="8A8D87"/>
                 </a:solidFill>
@@ -7647,7 +7647,7 @@
               </a:rPr>
               <a:t>③が充実するほど②の実現性が上がる（③→②依存）</a:t>
             </a:r>
-            <a:endParaRPr lang="en-US" sz="900" dirty="0"/>
+            <a:endParaRPr lang="ja-JP" sz="900" dirty="0"/>
           </a:p>
         </p:txBody>
       </p:sp>
@@ -7710,7 +7710,7 @@
               <a:buNone/>
             </a:pPr>
             <a:r>
-              <a:rPr lang="en-US" sz="1000" b="1" dirty="0">
+              <a:rPr lang="ja-JP" sz="1000" b="1" dirty="0">
                 <a:solidFill>
                   <a:srgbClr val="046A38"/>
                 </a:solidFill>
@@ -7720,7 +7720,7 @@
               </a:rPr>
               <a:t>【継続深化】高 × 高</a:t>
             </a:r>
-            <a:endParaRPr lang="en-US" sz="1000" dirty="0"/>
+            <a:endParaRPr lang="ja-JP" sz="1000" dirty="0"/>
           </a:p>
         </p:txBody>
       </p:sp>
@@ -7752,7 +7752,7 @@
               <a:buNone/>
             </a:pPr>
             <a:r>
-              <a:rPr lang="en-US" sz="1050" b="1" dirty="0">
+              <a:rPr lang="ja-JP" sz="1050" b="1" dirty="0">
                 <a:solidFill>
                   <a:srgbClr val="046A38"/>
                 </a:solidFill>
@@ -7769,7 +7769,7 @@
               <a:buNone/>
             </a:pPr>
             <a:r>
-              <a:rPr lang="en-US" sz="950" dirty="0">
+              <a:rPr lang="ja-JP" sz="950" dirty="0">
                 <a:solidFill>
                   <a:srgbClr val="53565A"/>
                 </a:solidFill>
@@ -7779,7 +7779,7 @@
               </a:rPr>
               <a:t>（UC1-4）◆一部</a:t>
             </a:r>
-            <a:endParaRPr lang="en-US" sz="1050" dirty="0"/>
+            <a:endParaRPr lang="ja-JP" sz="1050" dirty="0"/>
           </a:p>
         </p:txBody>
       </p:sp>
@@ -7811,7 +7811,7 @@
               <a:buNone/>
             </a:pPr>
             <a:r>
-              <a:rPr lang="en-US" sz="900" dirty="0">
+              <a:rPr lang="ja-JP" sz="900" dirty="0">
                 <a:solidFill>
                   <a:srgbClr val="8A8D87"/>
                 </a:solidFill>
@@ -7821,7 +7821,7 @@
               </a:rPr>
               <a:t>実装済。UC-3の変化検知精度を磨き込む</a:t>
             </a:r>
-            <a:endParaRPr lang="en-US" sz="900" dirty="0"/>
+            <a:endParaRPr lang="ja-JP" sz="900" dirty="0"/>
           </a:p>
         </p:txBody>
       </p:sp>
@@ -7884,7 +7884,7 @@
               <a:buNone/>
             </a:pPr>
             <a:r>
-              <a:rPr lang="en-US" sz="1000" b="1" dirty="0">
+              <a:rPr lang="ja-JP" sz="1000" b="1" dirty="0">
                 <a:solidFill>
                   <a:srgbClr val="8A8D87"/>
                 </a:solidFill>
@@ -7894,7 +7894,7 @@
               </a:rPr>
               <a:t>中 × 中</a:t>
             </a:r>
-            <a:endParaRPr lang="en-US" sz="1000" dirty="0"/>
+            <a:endParaRPr lang="ja-JP" sz="1000" dirty="0"/>
           </a:p>
         </p:txBody>
       </p:sp>
@@ -7926,7 +7926,7 @@
               <a:buNone/>
             </a:pPr>
             <a:r>
-              <a:rPr lang="en-US" sz="1000" dirty="0">
+              <a:rPr lang="ja-JP" sz="1000" dirty="0">
                 <a:solidFill>
                   <a:srgbClr val="8A8D87"/>
                 </a:solidFill>
@@ -7936,7 +7936,7 @@
               </a:rPr>
               <a:t>―（該当なし）</a:t>
             </a:r>
-            <a:endParaRPr lang="en-US" sz="1050" dirty="0"/>
+            <a:endParaRPr lang="ja-JP" sz="1050" dirty="0"/>
           </a:p>
         </p:txBody>
       </p:sp>
@@ -7999,7 +7999,7 @@
               <a:buNone/>
             </a:pPr>
             <a:r>
-              <a:rPr lang="en-US" sz="1000" b="1" dirty="0">
+              <a:rPr lang="ja-JP" sz="1000" b="1" dirty="0">
                 <a:solidFill>
                   <a:srgbClr val="046A38"/>
                 </a:solidFill>
@@ -8009,7 +8009,7 @@
               </a:rPr>
               <a:t>【土台維持】中 × 高</a:t>
             </a:r>
-            <a:endParaRPr lang="en-US" sz="1000" dirty="0"/>
+            <a:endParaRPr lang="ja-JP" sz="1000" dirty="0"/>
           </a:p>
         </p:txBody>
       </p:sp>
@@ -8041,7 +8041,7 @@
               <a:buNone/>
             </a:pPr>
             <a:r>
-              <a:rPr lang="en-US" sz="1050" b="1" dirty="0">
+              <a:rPr lang="ja-JP" sz="1050" b="1" dirty="0">
                 <a:solidFill>
                   <a:srgbClr val="046A38"/>
                 </a:solidFill>
@@ -8058,7 +8058,7 @@
               <a:buNone/>
             </a:pPr>
             <a:r>
-              <a:rPr lang="en-US" sz="950" dirty="0">
+              <a:rPr lang="ja-JP" sz="950" dirty="0">
                 <a:solidFill>
                   <a:srgbClr val="53565A"/>
                 </a:solidFill>
@@ -8068,7 +8068,7 @@
               </a:rPr>
               <a:t>（▲）</a:t>
             </a:r>
-            <a:endParaRPr lang="en-US" sz="1050" dirty="0"/>
+            <a:endParaRPr lang="ja-JP" sz="1050" dirty="0"/>
           </a:p>
         </p:txBody>
       </p:sp>
@@ -8100,7 +8100,7 @@
               <a:buNone/>
             </a:pPr>
             <a:r>
-              <a:rPr lang="en-US" sz="900" dirty="0">
+              <a:rPr lang="ja-JP" sz="900" dirty="0">
                 <a:solidFill>
                   <a:srgbClr val="8A8D87"/>
                 </a:solidFill>
@@ -8110,7 +8110,7 @@
               </a:rPr>
               <a:t>単体価値より②の発火装置として効く</a:t>
             </a:r>
-            <a:endParaRPr lang="en-US" sz="900" dirty="0"/>
+            <a:endParaRPr lang="ja-JP" sz="900" dirty="0"/>
           </a:p>
         </p:txBody>
       </p:sp>
@@ -8139,7 +8139,7 @@
               <a:buNone/>
             </a:pPr>
             <a:r>
-              <a:rPr lang="en-US" sz="900" dirty="0">
+              <a:rPr lang="ja-JP" sz="900" dirty="0">
                 <a:solidFill>
                   <a:srgbClr val="8A8D87"/>
                 </a:solidFill>
@@ -8149,7 +8149,7 @@
               </a:rPr>
               <a:t>← Feasibility 中 → 高 →</a:t>
             </a:r>
-            <a:endParaRPr lang="en-US" sz="900" dirty="0"/>
+            <a:endParaRPr lang="ja-JP" sz="900" dirty="0"/>
           </a:p>
         </p:txBody>
       </p:sp>
@@ -8178,7 +8178,7 @@
               <a:buNone/>
             </a:pPr>
             <a:r>
-              <a:rPr lang="en-US" sz="1200" b="1" spc="100" kern="0" dirty="0">
+              <a:rPr lang="ja-JP" sz="1200" b="1" spc="100" kern="0" dirty="0">
                 <a:solidFill>
                   <a:srgbClr val="046A38"/>
                 </a:solidFill>
@@ -8188,7 +8188,7 @@
               </a:rPr>
               <a:t>実現の仕組み ― 重要ポイント</a:t>
             </a:r>
-            <a:endParaRPr lang="en-US" sz="1200" dirty="0"/>
+            <a:endParaRPr lang="ja-JP" sz="1200" dirty="0"/>
           </a:p>
         </p:txBody>
       </p:sp>
@@ -8221,7 +8221,7 @@
               <a:buChar char="•"/>
             </a:pPr>
             <a:r>
-              <a:rPr lang="en-US" sz="1050" b="1" dirty="0">
+              <a:rPr lang="ja-JP" sz="1050" b="1" dirty="0">
                 <a:solidFill>
                   <a:srgbClr val="1A1A1A"/>
                 </a:solidFill>
@@ -8241,7 +8241,7 @@
               <a:buNone/>
             </a:pPr>
             <a:r>
-              <a:rPr lang="en-US" sz="1050" dirty="0">
+              <a:rPr lang="ja-JP" sz="1050" dirty="0">
                 <a:solidFill>
                   <a:srgbClr val="53565A"/>
                 </a:solidFill>
@@ -8251,7 +8251,7 @@
               </a:rPr>
               <a:t>①定期と②臨時は診断の中身がほぼ同一。開発量を大きく圧縮。</a:t>
             </a:r>
-            <a:endParaRPr lang="en-US" sz="1050" dirty="0"/>
+            <a:endParaRPr lang="ja-JP" sz="1050" dirty="0"/>
           </a:p>
           <a:p>
             <a:pPr indent="0" marL="0">
@@ -8261,7 +8261,7 @@
               <a:buNone/>
             </a:pPr>
             <a:r>
-              <a:rPr lang="en-US" sz="1050" b="1" dirty="0">
+              <a:rPr lang="ja-JP" sz="1050" b="1" dirty="0">
                 <a:solidFill>
                   <a:srgbClr val="1A1A1A"/>
                 </a:solidFill>
@@ -8281,7 +8281,7 @@
               <a:buNone/>
             </a:pPr>
             <a:r>
-              <a:rPr lang="en-US" sz="1050" dirty="0">
+              <a:rPr lang="ja-JP" sz="1050" dirty="0">
                 <a:solidFill>
                   <a:srgbClr val="53565A"/>
                 </a:solidFill>
@@ -8291,7 +8291,7 @@
               </a:rPr>
               <a:t>事例基盤の網羅性が②の確からしさを左右。③の整備が全体の鍵。</a:t>
             </a:r>
-            <a:endParaRPr lang="en-US" sz="1050" dirty="0"/>
+            <a:endParaRPr lang="ja-JP" sz="1050" dirty="0"/>
           </a:p>
           <a:p>
             <a:pPr indent="0" marL="0">
@@ -8301,7 +8301,7 @@
               <a:buNone/>
             </a:pPr>
             <a:r>
-              <a:rPr lang="en-US" sz="1050" b="1" dirty="0">
+              <a:rPr lang="ja-JP" sz="1050" b="1" dirty="0">
                 <a:solidFill>
                   <a:srgbClr val="1A1A1A"/>
                 </a:solidFill>
@@ -8318,7 +8318,7 @@
               <a:buNone/>
             </a:pPr>
             <a:r>
-              <a:rPr lang="en-US" sz="1050" dirty="0">
+              <a:rPr lang="ja-JP" sz="1050" dirty="0">
                 <a:solidFill>
                   <a:srgbClr val="53565A"/>
                 </a:solidFill>
@@ -8328,7 +8328,7 @@
               </a:rPr>
               <a:t>点推定せず「方向×オーダー×確度」＋根拠（パスID）を必ず添える。</a:t>
             </a:r>
-            <a:endParaRPr lang="en-US" sz="1050" dirty="0"/>
+            <a:endParaRPr lang="ja-JP" sz="1050" dirty="0"/>
           </a:p>
         </p:txBody>
       </p:sp>
@@ -8357,7 +8357,7 @@
               <a:buNone/>
             </a:pPr>
             <a:r>
-              <a:rPr lang="en-US" sz="1200" b="1" spc="100" kern="0" dirty="0">
+              <a:rPr lang="ja-JP" sz="1200" b="1" spc="100" kern="0" dirty="0">
                 <a:solidFill>
                   <a:srgbClr val="046A38"/>
                 </a:solidFill>
@@ -8367,7 +8367,7 @@
               </a:rPr>
               <a:t>想定の実現手法</a:t>
             </a:r>
-            <a:endParaRPr lang="en-US" sz="1200" dirty="0"/>
+            <a:endParaRPr lang="ja-JP" sz="1200" dirty="0"/>
           </a:p>
         </p:txBody>
       </p:sp>
@@ -8400,7 +8400,7 @@
               <a:buChar char="•"/>
             </a:pPr>
             <a:r>
-              <a:rPr lang="en-US" sz="1050" b="1" dirty="0">
+              <a:rPr lang="ja-JP" sz="1050" b="1" dirty="0">
                 <a:solidFill>
                   <a:srgbClr val="1A1A1A"/>
                 </a:solidFill>
@@ -8420,7 +8420,7 @@
               <a:buNone/>
             </a:pPr>
             <a:r>
-              <a:rPr lang="en-US" sz="1050" dirty="0">
+              <a:rPr lang="ja-JP" sz="1050" dirty="0">
                 <a:solidFill>
                   <a:srgbClr val="53565A"/>
                 </a:solidFill>
@@ -8430,7 +8430,7 @@
               </a:rPr>
               <a:t>自動取得→閾値・変化率ルールで異常検知→LLMが差分を言語化。</a:t>
             </a:r>
-            <a:endParaRPr lang="en-US" sz="1050" dirty="0"/>
+            <a:endParaRPr lang="ja-JP" sz="1050" dirty="0"/>
           </a:p>
           <a:p>
             <a:pPr indent="0" marL="0">
@@ -8440,7 +8440,7 @@
               <a:buNone/>
             </a:pPr>
             <a:r>
-              <a:rPr lang="en-US" sz="1050" b="1" dirty="0">
+              <a:rPr lang="ja-JP" sz="1050" b="1" dirty="0">
                 <a:solidFill>
                   <a:srgbClr val="1A1A1A"/>
                 </a:solidFill>
@@ -8460,7 +8460,7 @@
               <a:buNone/>
             </a:pPr>
             <a:r>
-              <a:rPr lang="en-US" sz="1050" dirty="0">
+              <a:rPr lang="ja-JP" sz="1050" dirty="0">
                 <a:solidFill>
                   <a:srgbClr val="53565A"/>
                 </a:solidFill>
@@ -8470,7 +8470,7 @@
               </a:rPr>
               <a:t>観点別プロンプトチェーン（外部整合→内部論理→リスク→事例→ブリーフ）。</a:t>
             </a:r>
-            <a:endParaRPr lang="en-US" sz="1050" dirty="0"/>
+            <a:endParaRPr lang="ja-JP" sz="1050" dirty="0"/>
           </a:p>
           <a:p>
             <a:pPr indent="0" marL="0">
@@ -8480,7 +8480,7 @@
               <a:buNone/>
             </a:pPr>
             <a:r>
-              <a:rPr lang="en-US" sz="1050" b="1" dirty="0">
+              <a:rPr lang="ja-JP" sz="1050" b="1" dirty="0">
                 <a:solidFill>
                   <a:srgbClr val="1A1A1A"/>
                 </a:solidFill>
@@ -8500,7 +8500,7 @@
               <a:buNone/>
             </a:pPr>
             <a:r>
-              <a:rPr lang="en-US" sz="1050" dirty="0">
+              <a:rPr lang="ja-JP" sz="1050" dirty="0">
                 <a:solidFill>
                   <a:srgbClr val="53565A"/>
                 </a:solidFill>
@@ -8510,7 +8510,7 @@
               </a:rPr>
               <a:t>イベント構造化→事業構造マップで因果トレース→相場観取得→打ち手網羅。</a:t>
             </a:r>
-            <a:endParaRPr lang="en-US" sz="1050" dirty="0"/>
+            <a:endParaRPr lang="ja-JP" sz="1050" dirty="0"/>
           </a:p>
           <a:p>
             <a:pPr indent="0" marL="0">
@@ -8520,7 +8520,7 @@
               <a:buNone/>
             </a:pPr>
             <a:r>
-              <a:rPr lang="en-US" sz="1050" b="1" dirty="0">
+              <a:rPr lang="ja-JP" sz="1050" b="1" dirty="0">
                 <a:solidFill>
                   <a:srgbClr val="1A1A1A"/>
                 </a:solidFill>
@@ -8537,7 +8537,7 @@
               <a:buNone/>
             </a:pPr>
             <a:r>
-              <a:rPr lang="en-US" sz="1050" dirty="0">
+              <a:rPr lang="ja-JP" sz="1050" dirty="0">
                 <a:solidFill>
                   <a:srgbClr val="53565A"/>
                 </a:solidFill>
@@ -8547,7 +8547,7 @@
               </a:rPr>
               <a:t>カタログ定義→収集→LLM構造化→人がレビュー登録→構造的類似で検索。</a:t>
             </a:r>
-            <a:endParaRPr lang="en-US" sz="1050" dirty="0"/>
+            <a:endParaRPr lang="ja-JP" sz="1050" dirty="0"/>
           </a:p>
         </p:txBody>
       </p:sp>
@@ -8576,7 +8576,7 @@
               <a:buNone/>
             </a:pPr>
             <a:r>
-              <a:rPr lang="en-US" sz="900" b="1" dirty="0">
+              <a:rPr lang="ja-JP" sz="900" b="1" dirty="0">
                 <a:solidFill>
                   <a:srgbClr val="046A38"/>
                 </a:solidFill>
@@ -8590,7 +8590,7 @@
               <a:buNone/>
             </a:pPr>
             <a:r>
-              <a:rPr lang="en-US" sz="900" dirty="0">
+              <a:rPr lang="ja-JP" sz="900" dirty="0">
                 <a:solidFill>
                   <a:srgbClr val="8A8D87"/>
                 </a:solidFill>
@@ -8600,7 +8600,7 @@
               </a:rPr>
               <a:t>    ｜    優先度検討と実現の仕組み</a:t>
             </a:r>
-            <a:endParaRPr lang="en-US" sz="900" dirty="0"/>
+            <a:endParaRPr lang="ja-JP" sz="900" dirty="0"/>
           </a:p>
         </p:txBody>
       </p:sp>
@@ -8629,7 +8629,7 @@
               <a:buNone/>
             </a:pPr>
             <a:r>
-              <a:rPr lang="en-US" sz="900" dirty="0">
+              <a:rPr lang="ja-JP" sz="900" dirty="0">
                 <a:solidFill>
                   <a:srgbClr val="8A8D87"/>
                 </a:solidFill>
@@ -8639,7 +8639,7 @@
               </a:rPr>
               <a:t>05</a:t>
             </a:r>
-            <a:endParaRPr lang="en-US" sz="900" dirty="0"/>
+            <a:endParaRPr lang="ja-JP" sz="900" dirty="0"/>
           </a:p>
         </p:txBody>
       </p:sp>
@@ -8743,7 +8743,7 @@
               <a:buNone/>
             </a:pPr>
             <a:r>
-              <a:rPr lang="en-US" sz="1100" b="1" spc="200" kern="0" dirty="0">
+              <a:rPr lang="ja-JP" sz="1100" b="1" spc="200" kern="0" dirty="0">
                 <a:solidFill>
                   <a:srgbClr val="046A38"/>
                 </a:solidFill>
@@ -8753,7 +8753,7 @@
               </a:rPr>
               <a:t>03 ｜ FUNCTION CORE ELEMENTS</a:t>
             </a:r>
-            <a:endParaRPr lang="en-US" sz="1100" dirty="0"/>
+            <a:endParaRPr lang="ja-JP" sz="1100" dirty="0"/>
           </a:p>
         </p:txBody>
       </p:sp>
@@ -8782,7 +8782,7 @@
               <a:buNone/>
             </a:pPr>
             <a:r>
-              <a:rPr lang="en-US" sz="2500" b="1" dirty="0">
+              <a:rPr lang="ja-JP" sz="2500" b="1" dirty="0">
                 <a:solidFill>
                   <a:srgbClr val="1A1A1A"/>
                 </a:solidFill>
@@ -8792,7 +8792,7 @@
               </a:rPr>
               <a:t>各機能のコア要素 ― 機能 × リンクUC × 想定データ一覧</a:t>
             </a:r>
-            <a:endParaRPr lang="en-US" sz="2500" dirty="0"/>
+            <a:endParaRPr lang="ja-JP" sz="2500" dirty="0"/>
           </a:p>
         </p:txBody>
       </p:sp>
@@ -8824,7 +8824,7 @@
               <a:buNone/>
             </a:pPr>
             <a:r>
-              <a:rPr lang="en-US" sz="1150" dirty="0">
+              <a:rPr lang="ja-JP" sz="1150" dirty="0">
                 <a:solidFill>
                   <a:srgbClr val="53565A"/>
                 </a:solidFill>
@@ -8834,7 +8834,7 @@
               </a:rPr>
               <a:t>各機能が「食べる情報」を、データ種類・概要・取得可否で整理。取得可否は現段階の見立て（次頁で詳細）。</a:t>
             </a:r>
-            <a:endParaRPr lang="en-US" sz="1150" dirty="0"/>
+            <a:endParaRPr lang="ja-JP" sz="1150" dirty="0"/>
           </a:p>
         </p:txBody>
       </p:sp>
@@ -8877,7 +8877,7 @@
                         <a:buNone/>
                       </a:pPr>
                       <a:r>
-                        <a:rPr lang="en-US" sz="900" b="1" dirty="0">
+                        <a:rPr lang="ja-JP" sz="900" b="1" dirty="0">
                           <a:solidFill>
                             <a:srgbClr val="FFFFFF"/>
                           </a:solidFill>
@@ -8887,7 +8887,7 @@
                         </a:rPr>
                         <a:t>機能 / リンクUC</a:t>
                       </a:r>
-                      <a:endParaRPr lang="en-US" sz="900" dirty="0">
+                      <a:endParaRPr lang="ja-JP" sz="900" dirty="0">
                         <a:latin typeface="Yu Gothic" charset="0"/>
                         <a:ea typeface="Yu Gothic" charset="0"/>
                         <a:cs typeface="Yu Gothic" charset="0"/>
@@ -8945,7 +8945,7 @@
                         <a:buNone/>
                       </a:pPr>
                       <a:r>
-                        <a:rPr lang="en-US" sz="900" b="1" dirty="0">
+                        <a:rPr lang="ja-JP" sz="900" b="1" dirty="0">
                           <a:solidFill>
                             <a:srgbClr val="FFFFFF"/>
                           </a:solidFill>
@@ -8955,7 +8955,7 @@
                         </a:rPr>
                         <a:t>データ種類</a:t>
                       </a:r>
-                      <a:endParaRPr lang="en-US" sz="900" dirty="0">
+                      <a:endParaRPr lang="ja-JP" sz="900" dirty="0">
                         <a:latin typeface="Yu Gothic" charset="0"/>
                         <a:ea typeface="Yu Gothic" charset="0"/>
                         <a:cs typeface="Yu Gothic" charset="0"/>
@@ -9013,7 +9013,7 @@
                         <a:buNone/>
                       </a:pPr>
                       <a:r>
-                        <a:rPr lang="en-US" sz="900" b="1" dirty="0">
+                        <a:rPr lang="ja-JP" sz="900" b="1" dirty="0">
                           <a:solidFill>
                             <a:srgbClr val="FFFFFF"/>
                           </a:solidFill>
@@ -9023,7 +9023,7 @@
                         </a:rPr>
                         <a:t>概要</a:t>
                       </a:r>
-                      <a:endParaRPr lang="en-US" sz="900" dirty="0">
+                      <a:endParaRPr lang="ja-JP" sz="900" dirty="0">
                         <a:latin typeface="Yu Gothic" charset="0"/>
                         <a:ea typeface="Yu Gothic" charset="0"/>
                         <a:cs typeface="Yu Gothic" charset="0"/>
@@ -9081,7 +9081,7 @@
                         <a:buNone/>
                       </a:pPr>
                       <a:r>
-                        <a:rPr lang="en-US" sz="900" b="1" dirty="0">
+                        <a:rPr lang="ja-JP" sz="900" b="1" dirty="0">
                           <a:solidFill>
                             <a:srgbClr val="FFFFFF"/>
                           </a:solidFill>
@@ -9091,7 +9091,7 @@
                         </a:rPr>
                         <a:t>取得可否</a:t>
                       </a:r>
-                      <a:endParaRPr lang="en-US" sz="900" dirty="0">
+                      <a:endParaRPr lang="ja-JP" sz="900" dirty="0">
                         <a:latin typeface="Yu Gothic" charset="0"/>
                         <a:ea typeface="Yu Gothic" charset="0"/>
                         <a:cs typeface="Yu Gothic" charset="0"/>
@@ -9149,7 +9149,7 @@
                         <a:buNone/>
                       </a:pPr>
                       <a:r>
-                        <a:rPr lang="en-US" sz="900" b="1" dirty="0">
+                        <a:rPr lang="ja-JP" sz="900" b="1" dirty="0">
                           <a:solidFill>
                             <a:srgbClr val="FFFFFF"/>
                           </a:solidFill>
@@ -9159,7 +9159,7 @@
                         </a:rPr>
                         <a:t>区分</a:t>
                       </a:r>
-                      <a:endParaRPr lang="en-US" sz="900" dirty="0">
+                      <a:endParaRPr lang="ja-JP" sz="900" dirty="0">
                         <a:latin typeface="Yu Gothic" charset="0"/>
                         <a:ea typeface="Yu Gothic" charset="0"/>
                         <a:cs typeface="Yu Gothic" charset="0"/>
@@ -9219,7 +9219,7 @@
                         <a:buNone/>
                       </a:pPr>
                       <a:r>
-                        <a:rPr lang="en-US" sz="900" b="1" dirty="0">
+                        <a:rPr lang="ja-JP" sz="900" b="1" dirty="0">
                           <a:solidFill>
                             <a:srgbClr val="046A38"/>
                           </a:solidFill>
@@ -9234,7 +9234,7 @@
                         <a:buNone/>
                       </a:pPr>
                       <a:r>
-                        <a:rPr lang="en-US" sz="800" dirty="0">
+                        <a:rPr lang="ja-JP" sz="800" dirty="0">
                           <a:solidFill>
                             <a:srgbClr val="53565A"/>
                           </a:solidFill>
@@ -9244,7 +9244,7 @@
                         </a:rPr>
                         <a:t>UC-1・2</a:t>
                       </a:r>
-                      <a:endParaRPr lang="en-US" sz="1200" dirty="0">
+                      <a:endParaRPr lang="ja-JP" sz="1200" dirty="0">
                         <a:latin typeface="Yu Gothic" charset="0"/>
                         <a:ea typeface="Yu Gothic" charset="0"/>
                         <a:cs typeface="Yu Gothic" charset="0"/>
@@ -9299,7 +9299,7 @@
                         <a:buNone/>
                       </a:pPr>
                       <a:r>
-                        <a:rPr lang="en-US" sz="880" b="1" dirty="0">
+                        <a:rPr lang="ja-JP" sz="880" b="1" dirty="0">
                           <a:solidFill>
                             <a:srgbClr val="1A1A1A"/>
                           </a:solidFill>
@@ -9309,7 +9309,7 @@
                         </a:rPr>
                         <a:t>公開外部指標</a:t>
                       </a:r>
-                      <a:endParaRPr lang="en-US" sz="880" dirty="0">
+                      <a:endParaRPr lang="ja-JP" sz="880" dirty="0">
                         <a:latin typeface="Yu Gothic" charset="0"/>
                         <a:ea typeface="Yu Gothic" charset="0"/>
                         <a:cs typeface="Yu Gothic" charset="0"/>
@@ -9364,7 +9364,7 @@
                         <a:buNone/>
                       </a:pPr>
                       <a:r>
-                        <a:rPr lang="en-US" sz="880" dirty="0">
+                        <a:rPr lang="ja-JP" sz="880" dirty="0">
                           <a:solidFill>
                             <a:srgbClr val="53565A"/>
                           </a:solidFill>
@@ -9374,7 +9374,7 @@
                         </a:rPr>
                         <a:t>為替・金利・訪日客数・地価等。Web／公開APIから自動取得</a:t>
                       </a:r>
-                      <a:endParaRPr lang="en-US" sz="880" dirty="0">
+                      <a:endParaRPr lang="ja-JP" sz="880" dirty="0">
                         <a:latin typeface="Yu Gothic" charset="0"/>
                         <a:ea typeface="Yu Gothic" charset="0"/>
                         <a:cs typeface="Yu Gothic" charset="0"/>
@@ -9429,7 +9429,7 @@
                         <a:buNone/>
                       </a:pPr>
                       <a:r>
-                        <a:rPr lang="en-US" sz="1100" b="1" dirty="0">
+                        <a:rPr lang="ja-JP" sz="1100" b="1" dirty="0">
                           <a:solidFill>
                             <a:srgbClr val="3F8F2E"/>
                           </a:solidFill>
@@ -9439,7 +9439,7 @@
                         </a:rPr>
                         <a:t>○</a:t>
                       </a:r>
-                      <a:endParaRPr lang="en-US" sz="1100" dirty="0">
+                      <a:endParaRPr lang="ja-JP" sz="1100" dirty="0">
                         <a:latin typeface="Yu Gothic" charset="0"/>
                         <a:ea typeface="Yu Gothic" charset="0"/>
                         <a:cs typeface="Yu Gothic" charset="0"/>
@@ -9494,7 +9494,7 @@
                         <a:buNone/>
                       </a:pPr>
                       <a:r>
-                        <a:rPr lang="en-US" sz="880" dirty="0">
+                        <a:rPr lang="ja-JP" sz="880" dirty="0">
                           <a:solidFill>
                             <a:srgbClr val="53565A"/>
                           </a:solidFill>
@@ -9504,7 +9504,7 @@
                         </a:rPr>
                         <a:t>公開</a:t>
                       </a:r>
-                      <a:endParaRPr lang="en-US" sz="880" dirty="0">
+                      <a:endParaRPr lang="ja-JP" sz="880" dirty="0">
                         <a:latin typeface="Yu Gothic" charset="0"/>
                         <a:ea typeface="Yu Gothic" charset="0"/>
                         <a:cs typeface="Yu Gothic" charset="0"/>
@@ -9564,7 +9564,7 @@
                         <a:buNone/>
                       </a:pPr>
                       <a:r>
-                        <a:rPr lang="en-US" sz="880" b="1" dirty="0">
+                        <a:rPr lang="ja-JP" sz="880" b="1" dirty="0">
                           <a:solidFill>
                             <a:srgbClr val="1A1A1A"/>
                           </a:solidFill>
@@ -9574,7 +9574,7 @@
                         </a:rPr>
                         <a:t>社内KPI実績</a:t>
                       </a:r>
-                      <a:endParaRPr lang="en-US" sz="880" dirty="0">
+                      <a:endParaRPr lang="ja-JP" sz="880" dirty="0">
                         <a:latin typeface="Yu Gothic" charset="0"/>
                         <a:ea typeface="Yu Gothic" charset="0"/>
                         <a:cs typeface="Yu Gothic" charset="0"/>
@@ -9629,7 +9629,7 @@
                         <a:buNone/>
                       </a:pPr>
                       <a:r>
-                        <a:rPr lang="en-US" sz="880" dirty="0">
+                        <a:rPr lang="ja-JP" sz="880" dirty="0">
                           <a:solidFill>
                             <a:srgbClr val="53565A"/>
                           </a:solidFill>
@@ -9639,7 +9639,7 @@
                         </a:rPr>
                         <a:t>運輸収入・稼働率・興行収入等（マスキング前提）</a:t>
                       </a:r>
-                      <a:endParaRPr lang="en-US" sz="880" dirty="0">
+                      <a:endParaRPr lang="ja-JP" sz="880" dirty="0">
                         <a:latin typeface="Yu Gothic" charset="0"/>
                         <a:ea typeface="Yu Gothic" charset="0"/>
                         <a:cs typeface="Yu Gothic" charset="0"/>
@@ -9694,7 +9694,7 @@
                         <a:buNone/>
                       </a:pPr>
                       <a:r>
-                        <a:rPr lang="en-US" sz="1100" b="1" dirty="0">
+                        <a:rPr lang="ja-JP" sz="1100" b="1" dirty="0">
                           <a:solidFill>
                             <a:srgbClr val="C9860A"/>
                           </a:solidFill>
@@ -9704,7 +9704,7 @@
                         </a:rPr>
                         <a:t>△</a:t>
                       </a:r>
-                      <a:endParaRPr lang="en-US" sz="1100" dirty="0">
+                      <a:endParaRPr lang="ja-JP" sz="1100" dirty="0">
                         <a:latin typeface="Yu Gothic" charset="0"/>
                         <a:ea typeface="Yu Gothic" charset="0"/>
                         <a:cs typeface="Yu Gothic" charset="0"/>
@@ -9759,7 +9759,7 @@
                         <a:buNone/>
                       </a:pPr>
                       <a:r>
-                        <a:rPr lang="en-US" sz="880" dirty="0">
+                        <a:rPr lang="ja-JP" sz="880" dirty="0">
                           <a:solidFill>
                             <a:srgbClr val="53565A"/>
                           </a:solidFill>
@@ -9769,7 +9769,7 @@
                         </a:rPr>
                         <a:t>要提供</a:t>
                       </a:r>
-                      <a:endParaRPr lang="en-US" sz="880" dirty="0">
+                      <a:endParaRPr lang="ja-JP" sz="880" dirty="0">
                         <a:latin typeface="Yu Gothic" charset="0"/>
                         <a:ea typeface="Yu Gothic" charset="0"/>
                         <a:cs typeface="Yu Gothic" charset="0"/>
@@ -9829,7 +9829,7 @@
                         <a:buNone/>
                       </a:pPr>
                       <a:r>
-                        <a:rPr lang="en-US" sz="880" b="1" dirty="0">
+                        <a:rPr lang="ja-JP" sz="880" b="1" dirty="0">
                           <a:solidFill>
                             <a:srgbClr val="1A1A1A"/>
                           </a:solidFill>
@@ -9839,7 +9839,7 @@
                         </a:rPr>
                         <a:t>監視ルール定義</a:t>
                       </a:r>
-                      <a:endParaRPr lang="en-US" sz="880" dirty="0">
+                      <a:endParaRPr lang="ja-JP" sz="880" dirty="0">
                         <a:latin typeface="Yu Gothic" charset="0"/>
                         <a:ea typeface="Yu Gothic" charset="0"/>
                         <a:cs typeface="Yu Gothic" charset="0"/>
@@ -9894,7 +9894,7 @@
                         <a:buNone/>
                       </a:pPr>
                       <a:r>
-                        <a:rPr lang="en-US" sz="880" dirty="0">
+                        <a:rPr lang="ja-JP" sz="880" dirty="0">
                           <a:solidFill>
                             <a:srgbClr val="53565A"/>
                           </a:solidFill>
@@ -9904,7 +9904,7 @@
                         </a:rPr>
                         <a:t>閾値・変化率ルール（自社で定義）</a:t>
                       </a:r>
-                      <a:endParaRPr lang="en-US" sz="880" dirty="0">
+                      <a:endParaRPr lang="ja-JP" sz="880" dirty="0">
                         <a:latin typeface="Yu Gothic" charset="0"/>
                         <a:ea typeface="Yu Gothic" charset="0"/>
                         <a:cs typeface="Yu Gothic" charset="0"/>
@@ -9959,7 +9959,7 @@
                         <a:buNone/>
                       </a:pPr>
                       <a:r>
-                        <a:rPr lang="en-US" sz="1100" b="1" dirty="0">
+                        <a:rPr lang="ja-JP" sz="1100" b="1" dirty="0">
                           <a:solidFill>
                             <a:srgbClr val="3F8F2E"/>
                           </a:solidFill>
@@ -9969,7 +9969,7 @@
                         </a:rPr>
                         <a:t>○</a:t>
                       </a:r>
-                      <a:endParaRPr lang="en-US" sz="1100" dirty="0">
+                      <a:endParaRPr lang="ja-JP" sz="1100" dirty="0">
                         <a:latin typeface="Yu Gothic" charset="0"/>
                         <a:ea typeface="Yu Gothic" charset="0"/>
                         <a:cs typeface="Yu Gothic" charset="0"/>
@@ -10024,7 +10024,7 @@
                         <a:buNone/>
                       </a:pPr>
                       <a:r>
-                        <a:rPr lang="en-US" sz="880" dirty="0">
+                        <a:rPr lang="ja-JP" sz="880" dirty="0">
                           <a:solidFill>
                             <a:srgbClr val="53565A"/>
                           </a:solidFill>
@@ -10034,7 +10034,7 @@
                         </a:rPr>
                         <a:t>自社</a:t>
                       </a:r>
-                      <a:endParaRPr lang="en-US" sz="880" dirty="0">
+                      <a:endParaRPr lang="ja-JP" sz="880" dirty="0">
                         <a:latin typeface="Yu Gothic" charset="0"/>
                         <a:ea typeface="Yu Gothic" charset="0"/>
                         <a:cs typeface="Yu Gothic" charset="0"/>
@@ -10091,7 +10091,7 @@
                         <a:buNone/>
                       </a:pPr>
                       <a:r>
-                        <a:rPr lang="en-US" sz="900" b="1" dirty="0">
+                        <a:rPr lang="ja-JP" sz="900" b="1" dirty="0">
                           <a:solidFill>
                             <a:srgbClr val="046A38"/>
                           </a:solidFill>
@@ -10106,7 +10106,7 @@
                         <a:buNone/>
                       </a:pPr>
                       <a:r>
-                        <a:rPr lang="en-US" sz="800" dirty="0">
+                        <a:rPr lang="ja-JP" sz="800" dirty="0">
                           <a:solidFill>
                             <a:srgbClr val="53565A"/>
                           </a:solidFill>
@@ -10116,7 +10116,7 @@
                         </a:rPr>
                         <a:t>UC-1〜4</a:t>
                       </a:r>
-                      <a:endParaRPr lang="en-US" sz="1200" dirty="0">
+                      <a:endParaRPr lang="ja-JP" sz="1200" dirty="0">
                         <a:latin typeface="Yu Gothic" charset="0"/>
                         <a:ea typeface="Yu Gothic" charset="0"/>
                         <a:cs typeface="Yu Gothic" charset="0"/>
@@ -10171,7 +10171,7 @@
                         <a:buNone/>
                       </a:pPr>
                       <a:r>
-                        <a:rPr lang="en-US" sz="880" b="1" dirty="0">
+                        <a:rPr lang="ja-JP" sz="880" b="1" dirty="0">
                           <a:solidFill>
                             <a:srgbClr val="1A1A1A"/>
                           </a:solidFill>
@@ -10181,7 +10181,7 @@
                         </a:rPr>
                         <a:t>提出事業計画</a:t>
                       </a:r>
-                      <a:endParaRPr lang="en-US" sz="880" dirty="0">
+                      <a:endParaRPr lang="ja-JP" sz="880" dirty="0">
                         <a:latin typeface="Yu Gothic" charset="0"/>
                         <a:ea typeface="Yu Gothic" charset="0"/>
                         <a:cs typeface="Yu Gothic" charset="0"/>
@@ -10236,7 +10236,7 @@
                         <a:buNone/>
                       </a:pPr>
                       <a:r>
-                        <a:rPr lang="en-US" sz="880" dirty="0">
+                        <a:rPr lang="ja-JP" sz="880" dirty="0">
                           <a:solidFill>
                             <a:srgbClr val="53565A"/>
                           </a:solidFill>
@@ -10246,7 +10246,7 @@
                         </a:rPr>
                         <a:t>各社の事業計画（提出タイミングで投入）</a:t>
                       </a:r>
-                      <a:endParaRPr lang="en-US" sz="880" dirty="0">
+                      <a:endParaRPr lang="ja-JP" sz="880" dirty="0">
                         <a:latin typeface="Yu Gothic" charset="0"/>
                         <a:ea typeface="Yu Gothic" charset="0"/>
                         <a:cs typeface="Yu Gothic" charset="0"/>
@@ -10301,7 +10301,7 @@
                         <a:buNone/>
                       </a:pPr>
                       <a:r>
-                        <a:rPr lang="en-US" sz="1100" b="1" dirty="0">
+                        <a:rPr lang="ja-JP" sz="1100" b="1" dirty="0">
                           <a:solidFill>
                             <a:srgbClr val="C9860A"/>
                           </a:solidFill>
@@ -10311,7 +10311,7 @@
                         </a:rPr>
                         <a:t>△</a:t>
                       </a:r>
-                      <a:endParaRPr lang="en-US" sz="1100" dirty="0">
+                      <a:endParaRPr lang="ja-JP" sz="1100" dirty="0">
                         <a:latin typeface="Yu Gothic" charset="0"/>
                         <a:ea typeface="Yu Gothic" charset="0"/>
                         <a:cs typeface="Yu Gothic" charset="0"/>
@@ -10366,7 +10366,7 @@
                         <a:buNone/>
                       </a:pPr>
                       <a:r>
-                        <a:rPr lang="en-US" sz="880" dirty="0">
+                        <a:rPr lang="ja-JP" sz="880" dirty="0">
                           <a:solidFill>
                             <a:srgbClr val="53565A"/>
                           </a:solidFill>
@@ -10376,7 +10376,7 @@
                         </a:rPr>
                         <a:t>要提供</a:t>
                       </a:r>
-                      <a:endParaRPr lang="en-US" sz="880" dirty="0">
+                      <a:endParaRPr lang="ja-JP" sz="880" dirty="0">
                         <a:latin typeface="Yu Gothic" charset="0"/>
                         <a:ea typeface="Yu Gothic" charset="0"/>
                         <a:cs typeface="Yu Gothic" charset="0"/>
@@ -10436,7 +10436,7 @@
                         <a:buNone/>
                       </a:pPr>
                       <a:r>
-                        <a:rPr lang="en-US" sz="880" b="1" dirty="0">
+                        <a:rPr lang="ja-JP" sz="880" b="1" dirty="0">
                           <a:solidFill>
                             <a:srgbClr val="1A1A1A"/>
                           </a:solidFill>
@@ -10446,7 +10446,7 @@
                         </a:rPr>
                         <a:t>前回計画・前回診断</a:t>
                       </a:r>
-                      <a:endParaRPr lang="en-US" sz="880" dirty="0">
+                      <a:endParaRPr lang="ja-JP" sz="880" dirty="0">
                         <a:latin typeface="Yu Gothic" charset="0"/>
                         <a:ea typeface="Yu Gothic" charset="0"/>
                         <a:cs typeface="Yu Gothic" charset="0"/>
@@ -10501,7 +10501,7 @@
                         <a:buNone/>
                       </a:pPr>
                       <a:r>
-                        <a:rPr lang="en-US" sz="880" dirty="0">
+                        <a:rPr lang="ja-JP" sz="880" dirty="0">
                           <a:solidFill>
                             <a:srgbClr val="53565A"/>
                           </a:solidFill>
@@ -10511,7 +10511,7 @@
                         </a:rPr>
                         <a:t>差分・トーン変化の比較基準</a:t>
                       </a:r>
-                      <a:endParaRPr lang="en-US" sz="880" dirty="0">
+                      <a:endParaRPr lang="ja-JP" sz="880" dirty="0">
                         <a:latin typeface="Yu Gothic" charset="0"/>
                         <a:ea typeface="Yu Gothic" charset="0"/>
                         <a:cs typeface="Yu Gothic" charset="0"/>
@@ -10566,7 +10566,7 @@
                         <a:buNone/>
                       </a:pPr>
                       <a:r>
-                        <a:rPr lang="en-US" sz="1100" b="1" dirty="0">
+                        <a:rPr lang="ja-JP" sz="1100" b="1" dirty="0">
                           <a:solidFill>
                             <a:srgbClr val="C9860A"/>
                           </a:solidFill>
@@ -10576,7 +10576,7 @@
                         </a:rPr>
                         <a:t>△</a:t>
                       </a:r>
-                      <a:endParaRPr lang="en-US" sz="1100" dirty="0">
+                      <a:endParaRPr lang="ja-JP" sz="1100" dirty="0">
                         <a:latin typeface="Yu Gothic" charset="0"/>
                         <a:ea typeface="Yu Gothic" charset="0"/>
                         <a:cs typeface="Yu Gothic" charset="0"/>
@@ -10631,7 +10631,7 @@
                         <a:buNone/>
                       </a:pPr>
                       <a:r>
-                        <a:rPr lang="en-US" sz="880" dirty="0">
+                        <a:rPr lang="ja-JP" sz="880" dirty="0">
                           <a:solidFill>
                             <a:srgbClr val="53565A"/>
                           </a:solidFill>
@@ -10641,7 +10641,7 @@
                         </a:rPr>
                         <a:t>要提供</a:t>
                       </a:r>
-                      <a:endParaRPr lang="en-US" sz="880" dirty="0">
+                      <a:endParaRPr lang="ja-JP" sz="880" dirty="0">
                         <a:latin typeface="Yu Gothic" charset="0"/>
                         <a:ea typeface="Yu Gothic" charset="0"/>
                         <a:cs typeface="Yu Gothic" charset="0"/>
@@ -10701,7 +10701,7 @@
                         <a:buNone/>
                       </a:pPr>
                       <a:r>
-                        <a:rPr lang="en-US" sz="880" b="1" dirty="0">
+                        <a:rPr lang="ja-JP" sz="880" b="1" dirty="0">
                           <a:solidFill>
                             <a:srgbClr val="1A1A1A"/>
                           </a:solidFill>
@@ -10711,7 +10711,7 @@
                         </a:rPr>
                         <a:t>最新外部環境</a:t>
                       </a:r>
-                      <a:endParaRPr lang="en-US" sz="880" dirty="0">
+                      <a:endParaRPr lang="ja-JP" sz="880" dirty="0">
                         <a:latin typeface="Yu Gothic" charset="0"/>
                         <a:ea typeface="Yu Gothic" charset="0"/>
                         <a:cs typeface="Yu Gothic" charset="0"/>
@@ -10766,7 +10766,7 @@
                         <a:buNone/>
                       </a:pPr>
                       <a:r>
-                        <a:rPr lang="en-US" sz="880" dirty="0">
+                        <a:rPr lang="ja-JP" sz="880" dirty="0">
                           <a:solidFill>
                             <a:srgbClr val="53565A"/>
                           </a:solidFill>
@@ -10776,7 +10776,7 @@
                         </a:rPr>
                         <a:t>計画前提と突合する外部データ（Web取得）</a:t>
                       </a:r>
-                      <a:endParaRPr lang="en-US" sz="880" dirty="0">
+                      <a:endParaRPr lang="ja-JP" sz="880" dirty="0">
                         <a:latin typeface="Yu Gothic" charset="0"/>
                         <a:ea typeface="Yu Gothic" charset="0"/>
                         <a:cs typeface="Yu Gothic" charset="0"/>
@@ -10831,7 +10831,7 @@
                         <a:buNone/>
                       </a:pPr>
                       <a:r>
-                        <a:rPr lang="en-US" sz="1100" b="1" dirty="0">
+                        <a:rPr lang="ja-JP" sz="1100" b="1" dirty="0">
                           <a:solidFill>
                             <a:srgbClr val="3F8F2E"/>
                           </a:solidFill>
@@ -10841,7 +10841,7 @@
                         </a:rPr>
                         <a:t>○</a:t>
                       </a:r>
-                      <a:endParaRPr lang="en-US" sz="1100" dirty="0">
+                      <a:endParaRPr lang="ja-JP" sz="1100" dirty="0">
                         <a:latin typeface="Yu Gothic" charset="0"/>
                         <a:ea typeface="Yu Gothic" charset="0"/>
                         <a:cs typeface="Yu Gothic" charset="0"/>
@@ -10896,7 +10896,7 @@
                         <a:buNone/>
                       </a:pPr>
                       <a:r>
-                        <a:rPr lang="en-US" sz="880" dirty="0">
+                        <a:rPr lang="ja-JP" sz="880" dirty="0">
                           <a:solidFill>
                             <a:srgbClr val="53565A"/>
                           </a:solidFill>
@@ -10906,7 +10906,7 @@
                         </a:rPr>
                         <a:t>公開</a:t>
                       </a:r>
-                      <a:endParaRPr lang="en-US" sz="880" dirty="0">
+                      <a:endParaRPr lang="ja-JP" sz="880" dirty="0">
                         <a:latin typeface="Yu Gothic" charset="0"/>
                         <a:ea typeface="Yu Gothic" charset="0"/>
                         <a:cs typeface="Yu Gothic" charset="0"/>
@@ -10966,7 +10966,7 @@
                         <a:buNone/>
                       </a:pPr>
                       <a:r>
-                        <a:rPr lang="en-US" sz="880" b="1" dirty="0">
+                        <a:rPr lang="ja-JP" sz="880" b="1" dirty="0">
                           <a:solidFill>
                             <a:srgbClr val="1A1A1A"/>
                           </a:solidFill>
@@ -10976,7 +10976,7 @@
                         </a:rPr>
                         <a:t>事業構造マップ</a:t>
                       </a:r>
-                      <a:endParaRPr lang="en-US" sz="880" dirty="0">
+                      <a:endParaRPr lang="ja-JP" sz="880" dirty="0">
                         <a:latin typeface="Yu Gothic" charset="0"/>
                         <a:ea typeface="Yu Gothic" charset="0"/>
                         <a:cs typeface="Yu Gothic" charset="0"/>
@@ -11031,7 +11031,7 @@
                         <a:buNone/>
                       </a:pPr>
                       <a:r>
-                        <a:rPr lang="en-US" sz="880" dirty="0">
+                        <a:rPr lang="ja-JP" sz="880" dirty="0">
                           <a:solidFill>
                             <a:srgbClr val="53565A"/>
                           </a:solidFill>
@@ -11041,7 +11041,7 @@
                         </a:rPr>
                         <a:t>因果パス（EXT→BIZ→KPI）。自社ナレッジ</a:t>
                       </a:r>
-                      <a:endParaRPr lang="en-US" sz="880" dirty="0">
+                      <a:endParaRPr lang="ja-JP" sz="880" dirty="0">
                         <a:latin typeface="Yu Gothic" charset="0"/>
                         <a:ea typeface="Yu Gothic" charset="0"/>
                         <a:cs typeface="Yu Gothic" charset="0"/>
@@ -11096,7 +11096,7 @@
                         <a:buNone/>
                       </a:pPr>
                       <a:r>
-                        <a:rPr lang="en-US" sz="1100" b="1" dirty="0">
+                        <a:rPr lang="ja-JP" sz="1100" b="1" dirty="0">
                           <a:solidFill>
                             <a:srgbClr val="3F8F2E"/>
                           </a:solidFill>
@@ -11106,7 +11106,7 @@
                         </a:rPr>
                         <a:t>○</a:t>
                       </a:r>
-                      <a:endParaRPr lang="en-US" sz="1100" dirty="0">
+                      <a:endParaRPr lang="ja-JP" sz="1100" dirty="0">
                         <a:latin typeface="Yu Gothic" charset="0"/>
                         <a:ea typeface="Yu Gothic" charset="0"/>
                         <a:cs typeface="Yu Gothic" charset="0"/>
@@ -11161,7 +11161,7 @@
                         <a:buNone/>
                       </a:pPr>
                       <a:r>
-                        <a:rPr lang="en-US" sz="880" dirty="0">
+                        <a:rPr lang="ja-JP" sz="880" dirty="0">
                           <a:solidFill>
                             <a:srgbClr val="53565A"/>
                           </a:solidFill>
@@ -11171,7 +11171,7 @@
                         </a:rPr>
                         <a:t>自社ドラフト</a:t>
                       </a:r>
-                      <a:endParaRPr lang="en-US" sz="880" dirty="0">
+                      <a:endParaRPr lang="ja-JP" sz="880" dirty="0">
                         <a:latin typeface="Yu Gothic" charset="0"/>
                         <a:ea typeface="Yu Gothic" charset="0"/>
                         <a:cs typeface="Yu Gothic" charset="0"/>
@@ -11228,7 +11228,7 @@
                         <a:buNone/>
                       </a:pPr>
                       <a:r>
-                        <a:rPr lang="en-US" sz="900" b="1" dirty="0">
+                        <a:rPr lang="ja-JP" sz="900" b="1" dirty="0">
                           <a:solidFill>
                             <a:srgbClr val="B33A2B"/>
                           </a:solidFill>
@@ -11243,7 +11243,7 @@
                         <a:buNone/>
                       </a:pPr>
                       <a:r>
-                        <a:rPr lang="en-US" sz="800" dirty="0">
+                        <a:rPr lang="ja-JP" sz="800" dirty="0">
                           <a:solidFill>
                             <a:srgbClr val="53565A"/>
                           </a:solidFill>
@@ -11253,7 +11253,7 @@
                         </a:rPr>
                         <a:t>UC-5〜7</a:t>
                       </a:r>
-                      <a:endParaRPr lang="en-US" sz="1200" dirty="0">
+                      <a:endParaRPr lang="ja-JP" sz="1200" dirty="0">
                         <a:latin typeface="Yu Gothic" charset="0"/>
                         <a:ea typeface="Yu Gothic" charset="0"/>
                         <a:cs typeface="Yu Gothic" charset="0"/>
@@ -11308,7 +11308,7 @@
                         <a:buNone/>
                       </a:pPr>
                       <a:r>
-                        <a:rPr lang="en-US" sz="880" b="1" dirty="0">
+                        <a:rPr lang="ja-JP" sz="880" b="1" dirty="0">
                           <a:solidFill>
                             <a:srgbClr val="1A1A1A"/>
                           </a:solidFill>
@@ -11318,7 +11318,7 @@
                         </a:rPr>
                         <a:t>トリガーイベント</a:t>
                       </a:r>
-                      <a:endParaRPr lang="en-US" sz="880" dirty="0">
+                      <a:endParaRPr lang="ja-JP" sz="880" dirty="0">
                         <a:latin typeface="Yu Gothic" charset="0"/>
                         <a:ea typeface="Yu Gothic" charset="0"/>
                         <a:cs typeface="Yu Gothic" charset="0"/>
@@ -11373,7 +11373,7 @@
                         <a:buNone/>
                       </a:pPr>
                       <a:r>
-                        <a:rPr lang="en-US" sz="880" dirty="0">
+                        <a:rPr lang="ja-JP" sz="880" dirty="0">
                           <a:solidFill>
                             <a:srgbClr val="53565A"/>
                           </a:solidFill>
@@ -11383,7 +11383,7 @@
                         </a:rPr>
                         <a:t>⓪の急変検知 or 人の手動起動（内容記述）</a:t>
                       </a:r>
-                      <a:endParaRPr lang="en-US" sz="880" dirty="0">
+                      <a:endParaRPr lang="ja-JP" sz="880" dirty="0">
                         <a:latin typeface="Yu Gothic" charset="0"/>
                         <a:ea typeface="Yu Gothic" charset="0"/>
                         <a:cs typeface="Yu Gothic" charset="0"/>
@@ -11438,7 +11438,7 @@
                         <a:buNone/>
                       </a:pPr>
                       <a:r>
-                        <a:rPr lang="en-US" sz="1100" b="1" dirty="0">
+                        <a:rPr lang="ja-JP" sz="1100" b="1" dirty="0">
                           <a:solidFill>
                             <a:srgbClr val="3F8F2E"/>
                           </a:solidFill>
@@ -11448,7 +11448,7 @@
                         </a:rPr>
                         <a:t>○</a:t>
                       </a:r>
-                      <a:endParaRPr lang="en-US" sz="1100" dirty="0">
+                      <a:endParaRPr lang="ja-JP" sz="1100" dirty="0">
                         <a:latin typeface="Yu Gothic" charset="0"/>
                         <a:ea typeface="Yu Gothic" charset="0"/>
                         <a:cs typeface="Yu Gothic" charset="0"/>
@@ -11503,7 +11503,7 @@
                         <a:buNone/>
                       </a:pPr>
                       <a:r>
-                        <a:rPr lang="en-US" sz="880" dirty="0">
+                        <a:rPr lang="ja-JP" sz="880" dirty="0">
                           <a:solidFill>
                             <a:srgbClr val="53565A"/>
                           </a:solidFill>
@@ -11513,7 +11513,7 @@
                         </a:rPr>
                         <a:t>自動／手動</a:t>
                       </a:r>
-                      <a:endParaRPr lang="en-US" sz="880" dirty="0">
+                      <a:endParaRPr lang="ja-JP" sz="880" dirty="0">
                         <a:latin typeface="Yu Gothic" charset="0"/>
                         <a:ea typeface="Yu Gothic" charset="0"/>
                         <a:cs typeface="Yu Gothic" charset="0"/>
@@ -11573,7 +11573,7 @@
                         <a:buNone/>
                       </a:pPr>
                       <a:r>
-                        <a:rPr lang="en-US" sz="880" b="1" dirty="0">
+                        <a:rPr lang="ja-JP" sz="880" b="1" dirty="0">
                           <a:solidFill>
                             <a:srgbClr val="1A1A1A"/>
                           </a:solidFill>
@@ -11583,7 +11583,7 @@
                         </a:rPr>
                         <a:t>直近KPI・計画値</a:t>
                       </a:r>
-                      <a:endParaRPr lang="en-US" sz="880" dirty="0">
+                      <a:endParaRPr lang="ja-JP" sz="880" dirty="0">
                         <a:latin typeface="Yu Gothic" charset="0"/>
                         <a:ea typeface="Yu Gothic" charset="0"/>
                         <a:cs typeface="Yu Gothic" charset="0"/>
@@ -11638,7 +11638,7 @@
                         <a:buNone/>
                       </a:pPr>
                       <a:r>
-                        <a:rPr lang="en-US" sz="880" dirty="0">
+                        <a:rPr lang="ja-JP" sz="880" dirty="0">
                           <a:solidFill>
                             <a:srgbClr val="53565A"/>
                           </a:solidFill>
@@ -11648,7 +11648,7 @@
                         </a:rPr>
                         <a:t>影響試算の起点（マスキング前提）</a:t>
                       </a:r>
-                      <a:endParaRPr lang="en-US" sz="880" dirty="0">
+                      <a:endParaRPr lang="ja-JP" sz="880" dirty="0">
                         <a:latin typeface="Yu Gothic" charset="0"/>
                         <a:ea typeface="Yu Gothic" charset="0"/>
                         <a:cs typeface="Yu Gothic" charset="0"/>
@@ -11703,7 +11703,7 @@
                         <a:buNone/>
                       </a:pPr>
                       <a:r>
-                        <a:rPr lang="en-US" sz="1100" b="1" dirty="0">
+                        <a:rPr lang="ja-JP" sz="1100" b="1" dirty="0">
                           <a:solidFill>
                             <a:srgbClr val="C9860A"/>
                           </a:solidFill>
@@ -11713,7 +11713,7 @@
                         </a:rPr>
                         <a:t>△</a:t>
                       </a:r>
-                      <a:endParaRPr lang="en-US" sz="1100" dirty="0">
+                      <a:endParaRPr lang="ja-JP" sz="1100" dirty="0">
                         <a:latin typeface="Yu Gothic" charset="0"/>
                         <a:ea typeface="Yu Gothic" charset="0"/>
                         <a:cs typeface="Yu Gothic" charset="0"/>
@@ -11768,7 +11768,7 @@
                         <a:buNone/>
                       </a:pPr>
                       <a:r>
-                        <a:rPr lang="en-US" sz="880" dirty="0">
+                        <a:rPr lang="ja-JP" sz="880" dirty="0">
                           <a:solidFill>
                             <a:srgbClr val="53565A"/>
                           </a:solidFill>
@@ -11778,7 +11778,7 @@
                         </a:rPr>
                         <a:t>要提供</a:t>
                       </a:r>
-                      <a:endParaRPr lang="en-US" sz="880" dirty="0">
+                      <a:endParaRPr lang="ja-JP" sz="880" dirty="0">
                         <a:latin typeface="Yu Gothic" charset="0"/>
                         <a:ea typeface="Yu Gothic" charset="0"/>
                         <a:cs typeface="Yu Gothic" charset="0"/>
@@ -11838,7 +11838,7 @@
                         <a:buNone/>
                       </a:pPr>
                       <a:r>
-                        <a:rPr lang="en-US" sz="880" b="1" dirty="0">
+                        <a:rPr lang="ja-JP" sz="880" b="1" dirty="0">
                           <a:solidFill>
                             <a:srgbClr val="1A1A1A"/>
                           </a:solidFill>
@@ -11848,7 +11848,7 @@
                         </a:rPr>
                         <a:t>最新報道</a:t>
                       </a:r>
-                      <a:endParaRPr lang="en-US" sz="880" dirty="0">
+                      <a:endParaRPr lang="ja-JP" sz="880" dirty="0">
                         <a:latin typeface="Yu Gothic" charset="0"/>
                         <a:ea typeface="Yu Gothic" charset="0"/>
                         <a:cs typeface="Yu Gothic" charset="0"/>
@@ -11903,7 +11903,7 @@
                         <a:buNone/>
                       </a:pPr>
                       <a:r>
-                        <a:rPr lang="en-US" sz="880" dirty="0">
+                        <a:rPr lang="ja-JP" sz="880" dirty="0">
                           <a:solidFill>
                             <a:srgbClr val="53565A"/>
                           </a:solidFill>
@@ -11913,7 +11913,7 @@
                         </a:rPr>
                         <a:t>イベント詳細のWeb検索</a:t>
                       </a:r>
-                      <a:endParaRPr lang="en-US" sz="880" dirty="0">
+                      <a:endParaRPr lang="ja-JP" sz="880" dirty="0">
                         <a:latin typeface="Yu Gothic" charset="0"/>
                         <a:ea typeface="Yu Gothic" charset="0"/>
                         <a:cs typeface="Yu Gothic" charset="0"/>
@@ -11968,7 +11968,7 @@
                         <a:buNone/>
                       </a:pPr>
                       <a:r>
-                        <a:rPr lang="en-US" sz="1100" b="1" dirty="0">
+                        <a:rPr lang="ja-JP" sz="1100" b="1" dirty="0">
                           <a:solidFill>
                             <a:srgbClr val="3F8F2E"/>
                           </a:solidFill>
@@ -11978,7 +11978,7 @@
                         </a:rPr>
                         <a:t>○</a:t>
                       </a:r>
-                      <a:endParaRPr lang="en-US" sz="1100" dirty="0">
+                      <a:endParaRPr lang="ja-JP" sz="1100" dirty="0">
                         <a:latin typeface="Yu Gothic" charset="0"/>
                         <a:ea typeface="Yu Gothic" charset="0"/>
                         <a:cs typeface="Yu Gothic" charset="0"/>
@@ -12033,7 +12033,7 @@
                         <a:buNone/>
                       </a:pPr>
                       <a:r>
-                        <a:rPr lang="en-US" sz="880" dirty="0">
+                        <a:rPr lang="ja-JP" sz="880" dirty="0">
                           <a:solidFill>
                             <a:srgbClr val="53565A"/>
                           </a:solidFill>
@@ -12043,7 +12043,7 @@
                         </a:rPr>
                         <a:t>公開</a:t>
                       </a:r>
-                      <a:endParaRPr lang="en-US" sz="880" dirty="0">
+                      <a:endParaRPr lang="ja-JP" sz="880" dirty="0">
                         <a:latin typeface="Yu Gothic" charset="0"/>
                         <a:ea typeface="Yu Gothic" charset="0"/>
                         <a:cs typeface="Yu Gothic" charset="0"/>
@@ -12100,7 +12100,7 @@
                         <a:buNone/>
                       </a:pPr>
                       <a:r>
-                        <a:rPr lang="en-US" sz="900" b="1" dirty="0">
+                        <a:rPr lang="ja-JP" sz="900" b="1" dirty="0">
                           <a:solidFill>
                             <a:srgbClr val="046A38"/>
                           </a:solidFill>
@@ -12115,7 +12115,7 @@
                         <a:buNone/>
                       </a:pPr>
                       <a:r>
-                        <a:rPr lang="en-US" sz="800" dirty="0">
+                        <a:rPr lang="ja-JP" sz="800" dirty="0">
                           <a:solidFill>
                             <a:srgbClr val="53565A"/>
                           </a:solidFill>
@@ -12125,7 +12125,7 @@
                         </a:rPr>
                         <a:t>全UCに供給</a:t>
                       </a:r>
-                      <a:endParaRPr lang="en-US" sz="1200" dirty="0">
+                      <a:endParaRPr lang="ja-JP" sz="1200" dirty="0">
                         <a:latin typeface="Yu Gothic" charset="0"/>
                         <a:ea typeface="Yu Gothic" charset="0"/>
                         <a:cs typeface="Yu Gothic" charset="0"/>
@@ -12180,7 +12180,7 @@
                         <a:buNone/>
                       </a:pPr>
                       <a:r>
-                        <a:rPr lang="en-US" sz="880" b="1" dirty="0">
+                        <a:rPr lang="ja-JP" sz="880" b="1" dirty="0">
                           <a:solidFill>
                             <a:srgbClr val="1A1A1A"/>
                           </a:solidFill>
@@ -12190,7 +12190,7 @@
                         </a:rPr>
                         <a:t>外部事例（主 8〜9割）</a:t>
                       </a:r>
-                      <a:endParaRPr lang="en-US" sz="880" dirty="0">
+                      <a:endParaRPr lang="ja-JP" sz="880" dirty="0">
                         <a:latin typeface="Yu Gothic" charset="0"/>
                         <a:ea typeface="Yu Gothic" charset="0"/>
                         <a:cs typeface="Yu Gothic" charset="0"/>
@@ -12245,7 +12245,7 @@
                         <a:buNone/>
                       </a:pPr>
                       <a:r>
-                        <a:rPr lang="en-US" sz="880" dirty="0">
+                        <a:rPr lang="ja-JP" sz="880" dirty="0">
                           <a:solidFill>
                             <a:srgbClr val="53565A"/>
                           </a:solidFill>
@@ -12255,7 +12255,7 @@
                         </a:rPr>
                         <a:t>有報・決算資料／官公庁統計／他社リリース／シンクタンク</a:t>
                       </a:r>
-                      <a:endParaRPr lang="en-US" sz="880" dirty="0">
+                      <a:endParaRPr lang="ja-JP" sz="880" dirty="0">
                         <a:latin typeface="Yu Gothic" charset="0"/>
                         <a:ea typeface="Yu Gothic" charset="0"/>
                         <a:cs typeface="Yu Gothic" charset="0"/>
@@ -12310,7 +12310,7 @@
                         <a:buNone/>
                       </a:pPr>
                       <a:r>
-                        <a:rPr lang="en-US" sz="1100" b="1" dirty="0">
+                        <a:rPr lang="ja-JP" sz="1100" b="1" dirty="0">
                           <a:solidFill>
                             <a:srgbClr val="3F8F2E"/>
                           </a:solidFill>
@@ -12320,7 +12320,7 @@
                         </a:rPr>
                         <a:t>○</a:t>
                       </a:r>
-                      <a:endParaRPr lang="en-US" sz="1100" dirty="0">
+                      <a:endParaRPr lang="ja-JP" sz="1100" dirty="0">
                         <a:latin typeface="Yu Gothic" charset="0"/>
                         <a:ea typeface="Yu Gothic" charset="0"/>
                         <a:cs typeface="Yu Gothic" charset="0"/>
@@ -12375,7 +12375,7 @@
                         <a:buNone/>
                       </a:pPr>
                       <a:r>
-                        <a:rPr lang="en-US" sz="880" dirty="0">
+                        <a:rPr lang="ja-JP" sz="880" dirty="0">
                           <a:solidFill>
                             <a:srgbClr val="53565A"/>
                           </a:solidFill>
@@ -12385,7 +12385,7 @@
                         </a:rPr>
                         <a:t>公開</a:t>
                       </a:r>
-                      <a:endParaRPr lang="en-US" sz="880" dirty="0">
+                      <a:endParaRPr lang="ja-JP" sz="880" dirty="0">
                         <a:latin typeface="Yu Gothic" charset="0"/>
                         <a:ea typeface="Yu Gothic" charset="0"/>
                         <a:cs typeface="Yu Gothic" charset="0"/>
@@ -12445,7 +12445,7 @@
                         <a:buNone/>
                       </a:pPr>
                       <a:r>
-                        <a:rPr lang="en-US" sz="880" b="1" dirty="0">
+                        <a:rPr lang="ja-JP" sz="880" b="1" dirty="0">
                           <a:solidFill>
                             <a:srgbClr val="1A1A1A"/>
                           </a:solidFill>
@@ -12455,7 +12455,7 @@
                         </a:rPr>
                         <a:t>外部事例（新聞DB）</a:t>
                       </a:r>
-                      <a:endParaRPr lang="en-US" sz="880" dirty="0">
+                      <a:endParaRPr lang="ja-JP" sz="880" dirty="0">
                         <a:latin typeface="Yu Gothic" charset="0"/>
                         <a:ea typeface="Yu Gothic" charset="0"/>
                         <a:cs typeface="Yu Gothic" charset="0"/>
@@ -12510,7 +12510,7 @@
                         <a:buNone/>
                       </a:pPr>
                       <a:r>
-                        <a:rPr lang="en-US" sz="880" dirty="0">
+                        <a:rPr lang="ja-JP" sz="880" dirty="0">
                           <a:solidFill>
                             <a:srgbClr val="53565A"/>
                           </a:solidFill>
@@ -12520,7 +12520,7 @@
                         </a:rPr>
                         <a:t>新聞・業界紙データベース（相場観の中核）</a:t>
                       </a:r>
-                      <a:endParaRPr lang="en-US" sz="880" dirty="0">
+                      <a:endParaRPr lang="ja-JP" sz="880" dirty="0">
                         <a:latin typeface="Yu Gothic" charset="0"/>
                         <a:ea typeface="Yu Gothic" charset="0"/>
                         <a:cs typeface="Yu Gothic" charset="0"/>
@@ -12575,7 +12575,7 @@
                         <a:buNone/>
                       </a:pPr>
                       <a:r>
-                        <a:rPr lang="en-US" sz="1100" b="1" dirty="0">
+                        <a:rPr lang="ja-JP" sz="1100" b="1" dirty="0">
                           <a:solidFill>
                             <a:srgbClr val="C9860A"/>
                           </a:solidFill>
@@ -12585,7 +12585,7 @@
                         </a:rPr>
                         <a:t>△</a:t>
                       </a:r>
-                      <a:endParaRPr lang="en-US" sz="1100" dirty="0">
+                      <a:endParaRPr lang="ja-JP" sz="1100" dirty="0">
                         <a:latin typeface="Yu Gothic" charset="0"/>
                         <a:ea typeface="Yu Gothic" charset="0"/>
                         <a:cs typeface="Yu Gothic" charset="0"/>
@@ -12640,7 +12640,7 @@
                         <a:buNone/>
                       </a:pPr>
                       <a:r>
-                        <a:rPr lang="en-US" sz="880" dirty="0">
+                        <a:rPr lang="ja-JP" sz="880" dirty="0">
                           <a:solidFill>
                             <a:srgbClr val="B33A2B"/>
                           </a:solidFill>
@@ -12650,7 +12650,7 @@
                         </a:rPr>
                         <a:t>■ライセンス</a:t>
                       </a:r>
-                      <a:endParaRPr lang="en-US" sz="880" dirty="0">
+                      <a:endParaRPr lang="ja-JP" sz="880" dirty="0">
                         <a:latin typeface="Yu Gothic" charset="0"/>
                         <a:ea typeface="Yu Gothic" charset="0"/>
                         <a:cs typeface="Yu Gothic" charset="0"/>
@@ -12710,7 +12710,7 @@
                         <a:buNone/>
                       </a:pPr>
                       <a:r>
-                        <a:rPr lang="en-US" sz="880" b="1" dirty="0">
+                        <a:rPr lang="ja-JP" sz="880" b="1" dirty="0">
                           <a:solidFill>
                             <a:srgbClr val="1A1A1A"/>
                           </a:solidFill>
@@ -12720,7 +12720,7 @@
                         </a:rPr>
                         <a:t>自社意思決定ログ（従）</a:t>
                       </a:r>
-                      <a:endParaRPr lang="en-US" sz="880" dirty="0">
+                      <a:endParaRPr lang="ja-JP" sz="880" dirty="0">
                         <a:latin typeface="Yu Gothic" charset="0"/>
                         <a:ea typeface="Yu Gothic" charset="0"/>
                         <a:cs typeface="Yu Gothic" charset="0"/>
@@ -12775,7 +12775,7 @@
                         <a:buNone/>
                       </a:pPr>
                       <a:r>
-                        <a:rPr lang="en-US" sz="880" dirty="0">
+                        <a:rPr lang="ja-JP" sz="880" dirty="0">
                           <a:solidFill>
                             <a:srgbClr val="53565A"/>
                           </a:solidFill>
@@ -12785,7 +12785,7 @@
                         </a:rPr>
                         <a:t>過去の対応・結果の蓄積</a:t>
                       </a:r>
-                      <a:endParaRPr lang="en-US" sz="880" dirty="0">
+                      <a:endParaRPr lang="ja-JP" sz="880" dirty="0">
                         <a:latin typeface="Yu Gothic" charset="0"/>
                         <a:ea typeface="Yu Gothic" charset="0"/>
                         <a:cs typeface="Yu Gothic" charset="0"/>
@@ -12840,7 +12840,7 @@
                         <a:buNone/>
                       </a:pPr>
                       <a:r>
-                        <a:rPr lang="en-US" sz="1100" b="1" dirty="0">
+                        <a:rPr lang="ja-JP" sz="1100" b="1" dirty="0">
                           <a:solidFill>
                             <a:srgbClr val="C9860A"/>
                           </a:solidFill>
@@ -12850,7 +12850,7 @@
                         </a:rPr>
                         <a:t>△</a:t>
                       </a:r>
-                      <a:endParaRPr lang="en-US" sz="1100" dirty="0">
+                      <a:endParaRPr lang="ja-JP" sz="1100" dirty="0">
                         <a:latin typeface="Yu Gothic" charset="0"/>
                         <a:ea typeface="Yu Gothic" charset="0"/>
                         <a:cs typeface="Yu Gothic" charset="0"/>
@@ -12905,7 +12905,7 @@
                         <a:buNone/>
                       </a:pPr>
                       <a:r>
-                        <a:rPr lang="en-US" sz="880" dirty="0">
+                        <a:rPr lang="ja-JP" sz="880" dirty="0">
                           <a:solidFill>
                             <a:srgbClr val="53565A"/>
                           </a:solidFill>
@@ -12915,7 +12915,7 @@
                         </a:rPr>
                         <a:t>要提供</a:t>
                       </a:r>
-                      <a:endParaRPr lang="en-US" sz="880" dirty="0">
+                      <a:endParaRPr lang="ja-JP" sz="880" dirty="0">
                         <a:latin typeface="Yu Gothic" charset="0"/>
                         <a:ea typeface="Yu Gothic" charset="0"/>
                         <a:cs typeface="Yu Gothic" charset="0"/>
@@ -12991,7 +12991,7 @@
               <a:buNone/>
             </a:pPr>
             <a:r>
-              <a:rPr lang="en-US" sz="850" dirty="0">
+              <a:rPr lang="ja-JP" sz="850" dirty="0">
                 <a:solidFill>
                   <a:srgbClr val="8A8D87"/>
                 </a:solidFill>
@@ -13001,7 +13001,7 @@
               </a:rPr>
               <a:t>取得可否　○ 公開／API等で取得可　　△ 一部・要調整（マスキング提供・契約・整備が必要）　　× 未整備・新規開拓が必要</a:t>
             </a:r>
-            <a:endParaRPr lang="en-US" sz="850" dirty="0"/>
+            <a:endParaRPr lang="ja-JP" sz="850" dirty="0"/>
           </a:p>
         </p:txBody>
       </p:sp>
@@ -13030,7 +13030,7 @@
               <a:buNone/>
             </a:pPr>
             <a:r>
-              <a:rPr lang="en-US" sz="900" b="1" dirty="0">
+              <a:rPr lang="ja-JP" sz="900" b="1" dirty="0">
                 <a:solidFill>
                   <a:srgbClr val="046A38"/>
                 </a:solidFill>
@@ -13044,7 +13044,7 @@
               <a:buNone/>
             </a:pPr>
             <a:r>
-              <a:rPr lang="en-US" sz="900" dirty="0">
+              <a:rPr lang="ja-JP" sz="900" dirty="0">
                 <a:solidFill>
                   <a:srgbClr val="8A8D87"/>
                 </a:solidFill>
@@ -13054,7 +13054,7 @@
               </a:rPr>
               <a:t>    ｜    各機能のコア要素</a:t>
             </a:r>
-            <a:endParaRPr lang="en-US" sz="900" dirty="0"/>
+            <a:endParaRPr lang="ja-JP" sz="900" dirty="0"/>
           </a:p>
         </p:txBody>
       </p:sp>
@@ -13083,7 +13083,7 @@
               <a:buNone/>
             </a:pPr>
             <a:r>
-              <a:rPr lang="en-US" sz="900" dirty="0">
+              <a:rPr lang="ja-JP" sz="900" dirty="0">
                 <a:solidFill>
                   <a:srgbClr val="8A8D87"/>
                 </a:solidFill>
@@ -13093,7 +13093,7 @@
               </a:rPr>
               <a:t>06</a:t>
             </a:r>
-            <a:endParaRPr lang="en-US" sz="900" dirty="0"/>
+            <a:endParaRPr lang="ja-JP" sz="900" dirty="0"/>
           </a:p>
         </p:txBody>
       </p:sp>
@@ -13197,7 +13197,7 @@
               <a:buNone/>
             </a:pPr>
             <a:r>
-              <a:rPr lang="en-US" sz="1100" b="1" spc="200" kern="0" dirty="0">
+              <a:rPr lang="ja-JP" sz="1100" b="1" spc="200" kern="0" dirty="0">
                 <a:solidFill>
                   <a:srgbClr val="046A38"/>
                 </a:solidFill>
@@ -13207,7 +13207,7 @@
               </a:rPr>
               <a:t>04 ｜ DATA DETAIL</a:t>
             </a:r>
-            <a:endParaRPr lang="en-US" sz="1100" dirty="0"/>
+            <a:endParaRPr lang="ja-JP" sz="1100" dirty="0"/>
           </a:p>
         </p:txBody>
       </p:sp>
@@ -13236,7 +13236,7 @@
               <a:buNone/>
             </a:pPr>
             <a:r>
-              <a:rPr lang="en-US" sz="2500" b="1" dirty="0">
+              <a:rPr lang="ja-JP" sz="2500" b="1" dirty="0">
                 <a:solidFill>
                   <a:srgbClr val="1A1A1A"/>
                 </a:solidFill>
@@ -13246,7 +13246,7 @@
               </a:rPr>
               <a:t>データ詳細 ― ソース・取得方法・取得可否</a:t>
             </a:r>
-            <a:endParaRPr lang="en-US" sz="2500" dirty="0"/>
+            <a:endParaRPr lang="ja-JP" sz="2500" dirty="0"/>
           </a:p>
         </p:txBody>
       </p:sp>
@@ -13278,7 +13278,7 @@
               <a:buNone/>
             </a:pPr>
             <a:r>
-              <a:rPr lang="en-US" sz="1150" dirty="0">
+              <a:rPr lang="ja-JP" sz="1150" dirty="0">
                 <a:solidFill>
                   <a:srgbClr val="53565A"/>
                 </a:solidFill>
@@ -13288,7 +13288,7 @@
               </a:rPr>
               <a:t>各データの想定ソースと取得方法（API／DL／提供／手動）を整理。ソースは現段階のたたき台で、確定は先方レビューによる。</a:t>
             </a:r>
-            <a:endParaRPr lang="en-US" sz="1150" dirty="0"/>
+            <a:endParaRPr lang="ja-JP" sz="1150" dirty="0"/>
           </a:p>
         </p:txBody>
       </p:sp>
@@ -13332,7 +13332,7 @@
                         <a:buNone/>
                       </a:pPr>
                       <a:r>
-                        <a:rPr lang="en-US" sz="850" b="1" dirty="0">
+                        <a:rPr lang="ja-JP" sz="850" b="1" dirty="0">
                           <a:solidFill>
                             <a:srgbClr val="FFFFFF"/>
                           </a:solidFill>
@@ -13342,7 +13342,7 @@
                         </a:rPr>
                         <a:t>データ</a:t>
                       </a:r>
-                      <a:endParaRPr lang="en-US" sz="850" dirty="0">
+                      <a:endParaRPr lang="ja-JP" sz="850" dirty="0">
                         <a:latin typeface="Yu Gothic" charset="0"/>
                         <a:ea typeface="Yu Gothic" charset="0"/>
                         <a:cs typeface="Yu Gothic" charset="0"/>
@@ -13400,7 +13400,7 @@
                         <a:buNone/>
                       </a:pPr>
                       <a:r>
-                        <a:rPr lang="en-US" sz="850" b="1" dirty="0">
+                        <a:rPr lang="ja-JP" sz="850" b="1" dirty="0">
                           <a:solidFill>
                             <a:srgbClr val="FFFFFF"/>
                           </a:solidFill>
@@ -13410,7 +13410,7 @@
                         </a:rPr>
                         <a:t>想定ソース</a:t>
                       </a:r>
-                      <a:endParaRPr lang="en-US" sz="850" dirty="0">
+                      <a:endParaRPr lang="ja-JP" sz="850" dirty="0">
                         <a:latin typeface="Yu Gothic" charset="0"/>
                         <a:ea typeface="Yu Gothic" charset="0"/>
                         <a:cs typeface="Yu Gothic" charset="0"/>
@@ -13468,7 +13468,7 @@
                         <a:buNone/>
                       </a:pPr>
                       <a:r>
-                        <a:rPr lang="en-US" sz="850" b="1" dirty="0">
+                        <a:rPr lang="ja-JP" sz="850" b="1" dirty="0">
                           <a:solidFill>
                             <a:srgbClr val="FFFFFF"/>
                           </a:solidFill>
@@ -13478,7 +13478,7 @@
                         </a:rPr>
                         <a:t>リンク / 参照先</a:t>
                       </a:r>
-                      <a:endParaRPr lang="en-US" sz="850" dirty="0">
+                      <a:endParaRPr lang="ja-JP" sz="850" dirty="0">
                         <a:latin typeface="Yu Gothic" charset="0"/>
                         <a:ea typeface="Yu Gothic" charset="0"/>
                         <a:cs typeface="Yu Gothic" charset="0"/>
@@ -13536,7 +13536,7 @@
                         <a:buNone/>
                       </a:pPr>
                       <a:r>
-                        <a:rPr lang="en-US" sz="850" b="1" dirty="0">
+                        <a:rPr lang="ja-JP" sz="850" b="1" dirty="0">
                           <a:solidFill>
                             <a:srgbClr val="FFFFFF"/>
                           </a:solidFill>
@@ -13546,7 +13546,7 @@
                         </a:rPr>
                         <a:t>取得方法</a:t>
                       </a:r>
-                      <a:endParaRPr lang="en-US" sz="850" dirty="0">
+                      <a:endParaRPr lang="ja-JP" sz="850" dirty="0">
                         <a:latin typeface="Yu Gothic" charset="0"/>
                         <a:ea typeface="Yu Gothic" charset="0"/>
                         <a:cs typeface="Yu Gothic" charset="0"/>
@@ -13604,7 +13604,7 @@
                         <a:buNone/>
                       </a:pPr>
                       <a:r>
-                        <a:rPr lang="en-US" sz="850" b="1" dirty="0">
+                        <a:rPr lang="ja-JP" sz="850" b="1" dirty="0">
                           <a:solidFill>
                             <a:srgbClr val="FFFFFF"/>
                           </a:solidFill>
@@ -13614,7 +13614,7 @@
                         </a:rPr>
                         <a:t>可否</a:t>
                       </a:r>
-                      <a:endParaRPr lang="en-US" sz="850" dirty="0">
+                      <a:endParaRPr lang="ja-JP" sz="850" dirty="0">
                         <a:latin typeface="Yu Gothic" charset="0"/>
                         <a:ea typeface="Yu Gothic" charset="0"/>
                         <a:cs typeface="Yu Gothic" charset="0"/>
@@ -13672,7 +13672,7 @@
                         <a:buNone/>
                       </a:pPr>
                       <a:r>
-                        <a:rPr lang="en-US" sz="850" b="1" dirty="0">
+                        <a:rPr lang="ja-JP" sz="850" b="1" dirty="0">
                           <a:solidFill>
                             <a:srgbClr val="FFFFFF"/>
                           </a:solidFill>
@@ -13682,7 +13682,7 @@
                         </a:rPr>
                         <a:t>備考</a:t>
                       </a:r>
-                      <a:endParaRPr lang="en-US" sz="850" dirty="0">
+                      <a:endParaRPr lang="ja-JP" sz="850" dirty="0">
                         <a:latin typeface="Yu Gothic" charset="0"/>
                         <a:ea typeface="Yu Gothic" charset="0"/>
                         <a:cs typeface="Yu Gothic" charset="0"/>
@@ -13742,7 +13742,7 @@
                         <a:buNone/>
                       </a:pPr>
                       <a:r>
-                        <a:rPr lang="en-US" sz="830" b="1" dirty="0">
+                        <a:rPr lang="ja-JP" sz="830" b="1" dirty="0">
                           <a:solidFill>
                             <a:srgbClr val="1A1A1A"/>
                           </a:solidFill>
@@ -13752,7 +13752,7 @@
                         </a:rPr>
                         <a:t>為替（USD/JPY・CNY/JPY）</a:t>
                       </a:r>
-                      <a:endParaRPr lang="en-US" sz="830" dirty="0">
+                      <a:endParaRPr lang="ja-JP" sz="830" dirty="0">
                         <a:latin typeface="Yu Gothic" charset="0"/>
                         <a:ea typeface="Yu Gothic" charset="0"/>
                         <a:cs typeface="Yu Gothic" charset="0"/>
@@ -13807,7 +13807,7 @@
                         <a:buNone/>
                       </a:pPr>
                       <a:r>
-                        <a:rPr lang="en-US" sz="830" dirty="0">
+                        <a:rPr lang="ja-JP" sz="830" dirty="0">
                           <a:solidFill>
                             <a:srgbClr val="53565A"/>
                           </a:solidFill>
@@ -13817,7 +13817,7 @@
                         </a:rPr>
                         <a:t>日本銀行 時系列統計データ</a:t>
                       </a:r>
-                      <a:endParaRPr lang="en-US" sz="830" dirty="0">
+                      <a:endParaRPr lang="ja-JP" sz="830" dirty="0">
                         <a:latin typeface="Yu Gothic" charset="0"/>
                         <a:ea typeface="Yu Gothic" charset="0"/>
                         <a:cs typeface="Yu Gothic" charset="0"/>
@@ -13872,7 +13872,7 @@
                         <a:buNone/>
                       </a:pPr>
                       <a:r>
-                        <a:rPr lang="en-US" sz="830" dirty="0">
+                        <a:rPr lang="ja-JP" sz="830" dirty="0">
                           <a:solidFill>
                             <a:srgbClr val="53565A"/>
                           </a:solidFill>
@@ -13882,7 +13882,7 @@
                         </a:rPr>
                         <a:t>stat-search.boj.or.jp</a:t>
                       </a:r>
-                      <a:endParaRPr lang="en-US" sz="830" dirty="0">
+                      <a:endParaRPr lang="ja-JP" sz="830" dirty="0">
                         <a:latin typeface="Yu Gothic" charset="0"/>
                         <a:ea typeface="Yu Gothic" charset="0"/>
                         <a:cs typeface="Yu Gothic" charset="0"/>
@@ -13937,7 +13937,7 @@
                         <a:buNone/>
                       </a:pPr>
                       <a:r>
-                        <a:rPr lang="en-US" sz="830" dirty="0">
+                        <a:rPr lang="ja-JP" sz="830" dirty="0">
                           <a:solidFill>
                             <a:srgbClr val="53565A"/>
                           </a:solidFill>
@@ -13947,7 +13947,7 @@
                         </a:rPr>
                         <a:t>API／CSV DL</a:t>
                       </a:r>
-                      <a:endParaRPr lang="en-US" sz="830" dirty="0">
+                      <a:endParaRPr lang="ja-JP" sz="830" dirty="0">
                         <a:latin typeface="Yu Gothic" charset="0"/>
                         <a:ea typeface="Yu Gothic" charset="0"/>
                         <a:cs typeface="Yu Gothic" charset="0"/>
@@ -14002,7 +14002,7 @@
                         <a:buNone/>
                       </a:pPr>
                       <a:r>
-                        <a:rPr lang="en-US" sz="1000" b="1" dirty="0">
+                        <a:rPr lang="ja-JP" sz="1000" b="1" dirty="0">
                           <a:solidFill>
                             <a:srgbClr val="3F8F2E"/>
                           </a:solidFill>
@@ -14012,7 +14012,7 @@
                         </a:rPr>
                         <a:t>○</a:t>
                       </a:r>
-                      <a:endParaRPr lang="en-US" sz="1000" dirty="0">
+                      <a:endParaRPr lang="ja-JP" sz="1000" dirty="0">
                         <a:latin typeface="Yu Gothic" charset="0"/>
                         <a:ea typeface="Yu Gothic" charset="0"/>
                         <a:cs typeface="Yu Gothic" charset="0"/>
@@ -14067,7 +14067,7 @@
                         <a:buNone/>
                       </a:pPr>
                       <a:r>
-                        <a:rPr lang="en-US" sz="830" dirty="0">
+                        <a:rPr lang="ja-JP" sz="830" dirty="0">
                           <a:solidFill>
                             <a:srgbClr val="53565A"/>
                           </a:solidFill>
@@ -14077,7 +14077,7 @@
                         </a:rPr>
                         <a:t>日次更新</a:t>
                       </a:r>
-                      <a:endParaRPr lang="en-US" sz="830" dirty="0">
+                      <a:endParaRPr lang="ja-JP" sz="830" dirty="0">
                         <a:latin typeface="Yu Gothic" charset="0"/>
                         <a:ea typeface="Yu Gothic" charset="0"/>
                         <a:cs typeface="Yu Gothic" charset="0"/>
@@ -14134,7 +14134,7 @@
                         <a:buNone/>
                       </a:pPr>
                       <a:r>
-                        <a:rPr lang="en-US" sz="830" b="1" dirty="0">
+                        <a:rPr lang="ja-JP" sz="830" b="1" dirty="0">
                           <a:solidFill>
                             <a:srgbClr val="1A1A1A"/>
                           </a:solidFill>
@@ -14144,7 +14144,7 @@
                         </a:rPr>
                         <a:t>長期金利・政策金利</a:t>
                       </a:r>
-                      <a:endParaRPr lang="en-US" sz="830" dirty="0">
+                      <a:endParaRPr lang="ja-JP" sz="830" dirty="0">
                         <a:latin typeface="Yu Gothic" charset="0"/>
                         <a:ea typeface="Yu Gothic" charset="0"/>
                         <a:cs typeface="Yu Gothic" charset="0"/>
@@ -14199,7 +14199,7 @@
                         <a:buNone/>
                       </a:pPr>
                       <a:r>
-                        <a:rPr lang="en-US" sz="830" dirty="0">
+                        <a:rPr lang="ja-JP" sz="830" dirty="0">
                           <a:solidFill>
                             <a:srgbClr val="53565A"/>
                           </a:solidFill>
@@ -14209,7 +14209,7 @@
                         </a:rPr>
                         <a:t>財務省 国債金利情報／日銀</a:t>
                       </a:r>
-                      <a:endParaRPr lang="en-US" sz="830" dirty="0">
+                      <a:endParaRPr lang="ja-JP" sz="830" dirty="0">
                         <a:latin typeface="Yu Gothic" charset="0"/>
                         <a:ea typeface="Yu Gothic" charset="0"/>
                         <a:cs typeface="Yu Gothic" charset="0"/>
@@ -14264,7 +14264,7 @@
                         <a:buNone/>
                       </a:pPr>
                       <a:r>
-                        <a:rPr lang="en-US" sz="830" dirty="0">
+                        <a:rPr lang="ja-JP" sz="830" dirty="0">
                           <a:solidFill>
                             <a:srgbClr val="53565A"/>
                           </a:solidFill>
@@ -14274,7 +14274,7 @@
                         </a:rPr>
                         <a:t>mof.go.jp</a:t>
                       </a:r>
-                      <a:endParaRPr lang="en-US" sz="830" dirty="0">
+                      <a:endParaRPr lang="ja-JP" sz="830" dirty="0">
                         <a:latin typeface="Yu Gothic" charset="0"/>
                         <a:ea typeface="Yu Gothic" charset="0"/>
                         <a:cs typeface="Yu Gothic" charset="0"/>
@@ -14329,7 +14329,7 @@
                         <a:buNone/>
                       </a:pPr>
                       <a:r>
-                        <a:rPr lang="en-US" sz="830" dirty="0">
+                        <a:rPr lang="ja-JP" sz="830" dirty="0">
                           <a:solidFill>
                             <a:srgbClr val="53565A"/>
                           </a:solidFill>
@@ -14339,7 +14339,7 @@
                         </a:rPr>
                         <a:t>CSV DL</a:t>
                       </a:r>
-                      <a:endParaRPr lang="en-US" sz="830" dirty="0">
+                      <a:endParaRPr lang="ja-JP" sz="830" dirty="0">
                         <a:latin typeface="Yu Gothic" charset="0"/>
                         <a:ea typeface="Yu Gothic" charset="0"/>
                         <a:cs typeface="Yu Gothic" charset="0"/>
@@ -14394,7 +14394,7 @@
                         <a:buNone/>
                       </a:pPr>
                       <a:r>
-                        <a:rPr lang="en-US" sz="1000" b="1" dirty="0">
+                        <a:rPr lang="ja-JP" sz="1000" b="1" dirty="0">
                           <a:solidFill>
                             <a:srgbClr val="3F8F2E"/>
                           </a:solidFill>
@@ -14404,7 +14404,7 @@
                         </a:rPr>
                         <a:t>○</a:t>
                       </a:r>
-                      <a:endParaRPr lang="en-US" sz="1000" dirty="0">
+                      <a:endParaRPr lang="ja-JP" sz="1000" dirty="0">
                         <a:latin typeface="Yu Gothic" charset="0"/>
                         <a:ea typeface="Yu Gothic" charset="0"/>
                         <a:cs typeface="Yu Gothic" charset="0"/>
@@ -14459,7 +14459,7 @@
                         <a:buNone/>
                       </a:pPr>
                       <a:r>
-                        <a:rPr lang="en-US" sz="830" dirty="0">
+                        <a:rPr lang="ja-JP" sz="830" dirty="0">
                           <a:solidFill>
                             <a:srgbClr val="53565A"/>
                           </a:solidFill>
@@ -14469,7 +14469,7 @@
                         </a:rPr>
                         <a:t>日次</a:t>
                       </a:r>
-                      <a:endParaRPr lang="en-US" sz="830" dirty="0">
+                      <a:endParaRPr lang="ja-JP" sz="830" dirty="0">
                         <a:latin typeface="Yu Gothic" charset="0"/>
                         <a:ea typeface="Yu Gothic" charset="0"/>
                         <a:cs typeface="Yu Gothic" charset="0"/>
@@ -14526,7 +14526,7 @@
                         <a:buNone/>
                       </a:pPr>
                       <a:r>
-                        <a:rPr lang="en-US" sz="830" b="1" dirty="0">
+                        <a:rPr lang="ja-JP" sz="830" b="1" dirty="0">
                           <a:solidFill>
                             <a:srgbClr val="1A1A1A"/>
                           </a:solidFill>
@@ -14536,7 +14536,7 @@
                         </a:rPr>
                         <a:t>訪日外客数</a:t>
                       </a:r>
-                      <a:endParaRPr lang="en-US" sz="830" dirty="0">
+                      <a:endParaRPr lang="ja-JP" sz="830" dirty="0">
                         <a:latin typeface="Yu Gothic" charset="0"/>
                         <a:ea typeface="Yu Gothic" charset="0"/>
                         <a:cs typeface="Yu Gothic" charset="0"/>
@@ -14591,7 +14591,7 @@
                         <a:buNone/>
                       </a:pPr>
                       <a:r>
-                        <a:rPr lang="en-US" sz="830" dirty="0">
+                        <a:rPr lang="ja-JP" sz="830" dirty="0">
                           <a:solidFill>
                             <a:srgbClr val="53565A"/>
                           </a:solidFill>
@@ -14601,7 +14601,7 @@
                         </a:rPr>
                         <a:t>日本政府観光局（JNTO）／観光庁</a:t>
                       </a:r>
-                      <a:endParaRPr lang="en-US" sz="830" dirty="0">
+                      <a:endParaRPr lang="ja-JP" sz="830" dirty="0">
                         <a:latin typeface="Yu Gothic" charset="0"/>
                         <a:ea typeface="Yu Gothic" charset="0"/>
                         <a:cs typeface="Yu Gothic" charset="0"/>
@@ -14656,7 +14656,7 @@
                         <a:buNone/>
                       </a:pPr>
                       <a:r>
-                        <a:rPr lang="en-US" sz="830" dirty="0">
+                        <a:rPr lang="ja-JP" sz="830" dirty="0">
                           <a:solidFill>
                             <a:srgbClr val="53565A"/>
                           </a:solidFill>
@@ -14666,7 +14666,7 @@
                         </a:rPr>
                         <a:t>jnto.go.jp</a:t>
                       </a:r>
-                      <a:endParaRPr lang="en-US" sz="830" dirty="0">
+                      <a:endParaRPr lang="ja-JP" sz="830" dirty="0">
                         <a:latin typeface="Yu Gothic" charset="0"/>
                         <a:ea typeface="Yu Gothic" charset="0"/>
                         <a:cs typeface="Yu Gothic" charset="0"/>
@@ -14721,7 +14721,7 @@
                         <a:buNone/>
                       </a:pPr>
                       <a:r>
-                        <a:rPr lang="en-US" sz="830" dirty="0">
+                        <a:rPr lang="ja-JP" sz="830" dirty="0">
                           <a:solidFill>
                             <a:srgbClr val="53565A"/>
                           </a:solidFill>
@@ -14731,7 +14731,7 @@
                         </a:rPr>
                         <a:t>Excel／CSV DL</a:t>
                       </a:r>
-                      <a:endParaRPr lang="en-US" sz="830" dirty="0">
+                      <a:endParaRPr lang="ja-JP" sz="830" dirty="0">
                         <a:latin typeface="Yu Gothic" charset="0"/>
                         <a:ea typeface="Yu Gothic" charset="0"/>
                         <a:cs typeface="Yu Gothic" charset="0"/>
@@ -14786,7 +14786,7 @@
                         <a:buNone/>
                       </a:pPr>
                       <a:r>
-                        <a:rPr lang="en-US" sz="1000" b="1" dirty="0">
+                        <a:rPr lang="ja-JP" sz="1000" b="1" dirty="0">
                           <a:solidFill>
                             <a:srgbClr val="3F8F2E"/>
                           </a:solidFill>
@@ -14796,7 +14796,7 @@
                         </a:rPr>
                         <a:t>○</a:t>
                       </a:r>
-                      <a:endParaRPr lang="en-US" sz="1000" dirty="0">
+                      <a:endParaRPr lang="ja-JP" sz="1000" dirty="0">
                         <a:latin typeface="Yu Gothic" charset="0"/>
                         <a:ea typeface="Yu Gothic" charset="0"/>
                         <a:cs typeface="Yu Gothic" charset="0"/>
@@ -14851,7 +14851,7 @@
                         <a:buNone/>
                       </a:pPr>
                       <a:r>
-                        <a:rPr lang="en-US" sz="830" dirty="0">
+                        <a:rPr lang="ja-JP" sz="830" dirty="0">
                           <a:solidFill>
                             <a:srgbClr val="53565A"/>
                           </a:solidFill>
@@ -14861,7 +14861,7 @@
                         </a:rPr>
                         <a:t>月次</a:t>
                       </a:r>
-                      <a:endParaRPr lang="en-US" sz="830" dirty="0">
+                      <a:endParaRPr lang="ja-JP" sz="830" dirty="0">
                         <a:latin typeface="Yu Gothic" charset="0"/>
                         <a:ea typeface="Yu Gothic" charset="0"/>
                         <a:cs typeface="Yu Gothic" charset="0"/>
@@ -14918,7 +14918,7 @@
                         <a:buNone/>
                       </a:pPr>
                       <a:r>
-                        <a:rPr lang="en-US" sz="830" b="1" dirty="0">
+                        <a:rPr lang="ja-JP" sz="830" b="1" dirty="0">
                           <a:solidFill>
                             <a:srgbClr val="1A1A1A"/>
                           </a:solidFill>
@@ -14928,7 +14928,7 @@
                         </a:rPr>
                         <a:t>関西空港入国者数</a:t>
                       </a:r>
-                      <a:endParaRPr lang="en-US" sz="830" dirty="0">
+                      <a:endParaRPr lang="ja-JP" sz="830" dirty="0">
                         <a:latin typeface="Yu Gothic" charset="0"/>
                         <a:ea typeface="Yu Gothic" charset="0"/>
                         <a:cs typeface="Yu Gothic" charset="0"/>
@@ -14983,7 +14983,7 @@
                         <a:buNone/>
                       </a:pPr>
                       <a:r>
-                        <a:rPr lang="en-US" sz="830" dirty="0">
+                        <a:rPr lang="ja-JP" sz="830" dirty="0">
                           <a:solidFill>
                             <a:srgbClr val="53565A"/>
                           </a:solidFill>
@@ -14993,7 +14993,7 @@
                         </a:rPr>
                         <a:t>出入国在留管理庁 統計</a:t>
                       </a:r>
-                      <a:endParaRPr lang="en-US" sz="830" dirty="0">
+                      <a:endParaRPr lang="ja-JP" sz="830" dirty="0">
                         <a:latin typeface="Yu Gothic" charset="0"/>
                         <a:ea typeface="Yu Gothic" charset="0"/>
                         <a:cs typeface="Yu Gothic" charset="0"/>
@@ -15048,7 +15048,7 @@
                         <a:buNone/>
                       </a:pPr>
                       <a:r>
-                        <a:rPr lang="en-US" sz="830" dirty="0">
+                        <a:rPr lang="ja-JP" sz="830" dirty="0">
                           <a:solidFill>
                             <a:srgbClr val="53565A"/>
                           </a:solidFill>
@@ -15058,7 +15058,7 @@
                         </a:rPr>
                         <a:t>e-stat.go.jp</a:t>
                       </a:r>
-                      <a:endParaRPr lang="en-US" sz="830" dirty="0">
+                      <a:endParaRPr lang="ja-JP" sz="830" dirty="0">
                         <a:latin typeface="Yu Gothic" charset="0"/>
                         <a:ea typeface="Yu Gothic" charset="0"/>
                         <a:cs typeface="Yu Gothic" charset="0"/>
@@ -15113,7 +15113,7 @@
                         <a:buNone/>
                       </a:pPr>
                       <a:r>
-                        <a:rPr lang="en-US" sz="830" dirty="0">
+                        <a:rPr lang="ja-JP" sz="830" dirty="0">
                           <a:solidFill>
                             <a:srgbClr val="53565A"/>
                           </a:solidFill>
@@ -15123,7 +15123,7 @@
                         </a:rPr>
                         <a:t>API／DL</a:t>
                       </a:r>
-                      <a:endParaRPr lang="en-US" sz="830" dirty="0">
+                      <a:endParaRPr lang="ja-JP" sz="830" dirty="0">
                         <a:latin typeface="Yu Gothic" charset="0"/>
                         <a:ea typeface="Yu Gothic" charset="0"/>
                         <a:cs typeface="Yu Gothic" charset="0"/>
@@ -15178,7 +15178,7 @@
                         <a:buNone/>
                       </a:pPr>
                       <a:r>
-                        <a:rPr lang="en-US" sz="1000" b="1" dirty="0">
+                        <a:rPr lang="ja-JP" sz="1000" b="1" dirty="0">
                           <a:solidFill>
                             <a:srgbClr val="3F8F2E"/>
                           </a:solidFill>
@@ -15188,7 +15188,7 @@
                         </a:rPr>
                         <a:t>○</a:t>
                       </a:r>
-                      <a:endParaRPr lang="en-US" sz="1000" dirty="0">
+                      <a:endParaRPr lang="ja-JP" sz="1000" dirty="0">
                         <a:latin typeface="Yu Gothic" charset="0"/>
                         <a:ea typeface="Yu Gothic" charset="0"/>
                         <a:cs typeface="Yu Gothic" charset="0"/>
@@ -15243,7 +15243,7 @@
                         <a:buNone/>
                       </a:pPr>
                       <a:r>
-                        <a:rPr lang="en-US" sz="830" dirty="0">
+                        <a:rPr lang="ja-JP" sz="830" dirty="0">
                           <a:solidFill>
                             <a:srgbClr val="53565A"/>
                           </a:solidFill>
@@ -15253,7 +15253,7 @@
                         </a:rPr>
                         <a:t>月次</a:t>
                       </a:r>
-                      <a:endParaRPr lang="en-US" sz="830" dirty="0">
+                      <a:endParaRPr lang="ja-JP" sz="830" dirty="0">
                         <a:latin typeface="Yu Gothic" charset="0"/>
                         <a:ea typeface="Yu Gothic" charset="0"/>
                         <a:cs typeface="Yu Gothic" charset="0"/>
@@ -15310,7 +15310,7 @@
                         <a:buNone/>
                       </a:pPr>
                       <a:r>
-                        <a:rPr lang="en-US" sz="830" b="1" dirty="0">
+                        <a:rPr lang="ja-JP" sz="830" b="1" dirty="0">
                           <a:solidFill>
                             <a:srgbClr val="1A1A1A"/>
                           </a:solidFill>
@@ -15320,7 +15320,7 @@
                         </a:rPr>
                         <a:t>沿線人口・転入超過</a:t>
                       </a:r>
-                      <a:endParaRPr lang="en-US" sz="830" dirty="0">
+                      <a:endParaRPr lang="ja-JP" sz="830" dirty="0">
                         <a:latin typeface="Yu Gothic" charset="0"/>
                         <a:ea typeface="Yu Gothic" charset="0"/>
                         <a:cs typeface="Yu Gothic" charset="0"/>
@@ -15375,7 +15375,7 @@
                         <a:buNone/>
                       </a:pPr>
                       <a:r>
-                        <a:rPr lang="en-US" sz="830" dirty="0">
+                        <a:rPr lang="ja-JP" sz="830" dirty="0">
                           <a:solidFill>
                             <a:srgbClr val="53565A"/>
                           </a:solidFill>
@@ -15385,7 +15385,7 @@
                         </a:rPr>
                         <a:t>総務省 住民基本台帳人口移動</a:t>
                       </a:r>
-                      <a:endParaRPr lang="en-US" sz="830" dirty="0">
+                      <a:endParaRPr lang="ja-JP" sz="830" dirty="0">
                         <a:latin typeface="Yu Gothic" charset="0"/>
                         <a:ea typeface="Yu Gothic" charset="0"/>
                         <a:cs typeface="Yu Gothic" charset="0"/>
@@ -15440,7 +15440,7 @@
                         <a:buNone/>
                       </a:pPr>
                       <a:r>
-                        <a:rPr lang="en-US" sz="830" dirty="0">
+                        <a:rPr lang="ja-JP" sz="830" dirty="0">
                           <a:solidFill>
                             <a:srgbClr val="53565A"/>
                           </a:solidFill>
@@ -15450,7 +15450,7 @@
                         </a:rPr>
                         <a:t>e-Stat API</a:t>
                       </a:r>
-                      <a:endParaRPr lang="en-US" sz="830" dirty="0">
+                      <a:endParaRPr lang="ja-JP" sz="830" dirty="0">
                         <a:latin typeface="Yu Gothic" charset="0"/>
                         <a:ea typeface="Yu Gothic" charset="0"/>
                         <a:cs typeface="Yu Gothic" charset="0"/>
@@ -15505,7 +15505,7 @@
                         <a:buNone/>
                       </a:pPr>
                       <a:r>
-                        <a:rPr lang="en-US" sz="830" dirty="0">
+                        <a:rPr lang="ja-JP" sz="830" dirty="0">
                           <a:solidFill>
                             <a:srgbClr val="53565A"/>
                           </a:solidFill>
@@ -15515,7 +15515,7 @@
                         </a:rPr>
                         <a:t>API／DL</a:t>
                       </a:r>
-                      <a:endParaRPr lang="en-US" sz="830" dirty="0">
+                      <a:endParaRPr lang="ja-JP" sz="830" dirty="0">
                         <a:latin typeface="Yu Gothic" charset="0"/>
                         <a:ea typeface="Yu Gothic" charset="0"/>
                         <a:cs typeface="Yu Gothic" charset="0"/>
@@ -15570,7 +15570,7 @@
                         <a:buNone/>
                       </a:pPr>
                       <a:r>
-                        <a:rPr lang="en-US" sz="1000" b="1" dirty="0">
+                        <a:rPr lang="ja-JP" sz="1000" b="1" dirty="0">
                           <a:solidFill>
                             <a:srgbClr val="3F8F2E"/>
                           </a:solidFill>
@@ -15580,7 +15580,7 @@
                         </a:rPr>
                         <a:t>○</a:t>
                       </a:r>
-                      <a:endParaRPr lang="en-US" sz="1000" dirty="0">
+                      <a:endParaRPr lang="ja-JP" sz="1000" dirty="0">
                         <a:latin typeface="Yu Gothic" charset="0"/>
                         <a:ea typeface="Yu Gothic" charset="0"/>
                         <a:cs typeface="Yu Gothic" charset="0"/>
@@ -15635,7 +15635,7 @@
                         <a:buNone/>
                       </a:pPr>
                       <a:r>
-                        <a:rPr lang="en-US" sz="830" dirty="0">
+                        <a:rPr lang="ja-JP" sz="830" dirty="0">
                           <a:solidFill>
                             <a:srgbClr val="53565A"/>
                           </a:solidFill>
@@ -15645,7 +15645,7 @@
                         </a:rPr>
                         <a:t>月次／年次</a:t>
                       </a:r>
-                      <a:endParaRPr lang="en-US" sz="830" dirty="0">
+                      <a:endParaRPr lang="ja-JP" sz="830" dirty="0">
                         <a:latin typeface="Yu Gothic" charset="0"/>
                         <a:ea typeface="Yu Gothic" charset="0"/>
                         <a:cs typeface="Yu Gothic" charset="0"/>
@@ -15702,7 +15702,7 @@
                         <a:buNone/>
                       </a:pPr>
                       <a:r>
-                        <a:rPr lang="en-US" sz="830" b="1" dirty="0">
+                        <a:rPr lang="ja-JP" sz="830" b="1" dirty="0">
                           <a:solidFill>
                             <a:srgbClr val="1A1A1A"/>
                           </a:solidFill>
@@ -15712,7 +15712,7 @@
                         </a:rPr>
                         <a:t>地価</a:t>
                       </a:r>
-                      <a:endParaRPr lang="en-US" sz="830" dirty="0">
+                      <a:endParaRPr lang="ja-JP" sz="830" dirty="0">
                         <a:latin typeface="Yu Gothic" charset="0"/>
                         <a:ea typeface="Yu Gothic" charset="0"/>
                         <a:cs typeface="Yu Gothic" charset="0"/>
@@ -15767,7 +15767,7 @@
                         <a:buNone/>
                       </a:pPr>
                       <a:r>
-                        <a:rPr lang="en-US" sz="830" dirty="0">
+                        <a:rPr lang="ja-JP" sz="830" dirty="0">
                           <a:solidFill>
                             <a:srgbClr val="53565A"/>
                           </a:solidFill>
@@ -15777,7 +15777,7 @@
                         </a:rPr>
                         <a:t>国交省 地価公示・地価調査</a:t>
                       </a:r>
-                      <a:endParaRPr lang="en-US" sz="830" dirty="0">
+                      <a:endParaRPr lang="ja-JP" sz="830" dirty="0">
                         <a:latin typeface="Yu Gothic" charset="0"/>
                         <a:ea typeface="Yu Gothic" charset="0"/>
                         <a:cs typeface="Yu Gothic" charset="0"/>
@@ -15832,7 +15832,7 @@
                         <a:buNone/>
                       </a:pPr>
                       <a:r>
-                        <a:rPr lang="en-US" sz="830" dirty="0">
+                        <a:rPr lang="ja-JP" sz="830" dirty="0">
                           <a:solidFill>
                             <a:srgbClr val="53565A"/>
                           </a:solidFill>
@@ -15842,7 +15842,7 @@
                         </a:rPr>
                         <a:t>土地総合情報システム</a:t>
                       </a:r>
-                      <a:endParaRPr lang="en-US" sz="830" dirty="0">
+                      <a:endParaRPr lang="ja-JP" sz="830" dirty="0">
                         <a:latin typeface="Yu Gothic" charset="0"/>
                         <a:ea typeface="Yu Gothic" charset="0"/>
                         <a:cs typeface="Yu Gothic" charset="0"/>
@@ -15897,7 +15897,7 @@
                         <a:buNone/>
                       </a:pPr>
                       <a:r>
-                        <a:rPr lang="en-US" sz="830" dirty="0">
+                        <a:rPr lang="ja-JP" sz="830" dirty="0">
                           <a:solidFill>
                             <a:srgbClr val="53565A"/>
                           </a:solidFill>
@@ -15907,7 +15907,7 @@
                         </a:rPr>
                         <a:t>API／DL</a:t>
                       </a:r>
-                      <a:endParaRPr lang="en-US" sz="830" dirty="0">
+                      <a:endParaRPr lang="ja-JP" sz="830" dirty="0">
                         <a:latin typeface="Yu Gothic" charset="0"/>
                         <a:ea typeface="Yu Gothic" charset="0"/>
                         <a:cs typeface="Yu Gothic" charset="0"/>
@@ -15962,7 +15962,7 @@
                         <a:buNone/>
                       </a:pPr>
                       <a:r>
-                        <a:rPr lang="en-US" sz="1000" b="1" dirty="0">
+                        <a:rPr lang="ja-JP" sz="1000" b="1" dirty="0">
                           <a:solidFill>
                             <a:srgbClr val="3F8F2E"/>
                           </a:solidFill>
@@ -15972,7 +15972,7 @@
                         </a:rPr>
                         <a:t>○</a:t>
                       </a:r>
-                      <a:endParaRPr lang="en-US" sz="1000" dirty="0">
+                      <a:endParaRPr lang="ja-JP" sz="1000" dirty="0">
                         <a:latin typeface="Yu Gothic" charset="0"/>
                         <a:ea typeface="Yu Gothic" charset="0"/>
                         <a:cs typeface="Yu Gothic" charset="0"/>
@@ -16027,7 +16027,7 @@
                         <a:buNone/>
                       </a:pPr>
                       <a:r>
-                        <a:rPr lang="en-US" sz="830" dirty="0">
+                        <a:rPr lang="ja-JP" sz="830" dirty="0">
                           <a:solidFill>
                             <a:srgbClr val="53565A"/>
                           </a:solidFill>
@@ -16037,7 +16037,7 @@
                         </a:rPr>
                         <a:t>年次</a:t>
                       </a:r>
-                      <a:endParaRPr lang="en-US" sz="830" dirty="0">
+                      <a:endParaRPr lang="ja-JP" sz="830" dirty="0">
                         <a:latin typeface="Yu Gothic" charset="0"/>
                         <a:ea typeface="Yu Gothic" charset="0"/>
                         <a:cs typeface="Yu Gothic" charset="0"/>
@@ -16094,7 +16094,7 @@
                         <a:buNone/>
                       </a:pPr>
                       <a:r>
-                        <a:rPr lang="en-US" sz="830" b="1" dirty="0">
+                        <a:rPr lang="ja-JP" sz="830" b="1" dirty="0">
                           <a:solidFill>
                             <a:srgbClr val="1A1A1A"/>
                           </a:solidFill>
@@ -16104,7 +16104,7 @@
                         </a:rPr>
                         <a:t>建設物価・労務単価</a:t>
                       </a:r>
-                      <a:endParaRPr lang="en-US" sz="830" dirty="0">
+                      <a:endParaRPr lang="ja-JP" sz="830" dirty="0">
                         <a:latin typeface="Yu Gothic" charset="0"/>
                         <a:ea typeface="Yu Gothic" charset="0"/>
                         <a:cs typeface="Yu Gothic" charset="0"/>
@@ -16159,7 +16159,7 @@
                         <a:buNone/>
                       </a:pPr>
                       <a:r>
-                        <a:rPr lang="en-US" sz="830" dirty="0">
+                        <a:rPr lang="ja-JP" sz="830" dirty="0">
                           <a:solidFill>
                             <a:srgbClr val="53565A"/>
                           </a:solidFill>
@@ -16169,7 +16169,7 @@
                         </a:rPr>
                         <a:t>国交省／建設物価調査会 等</a:t>
                       </a:r>
-                      <a:endParaRPr lang="en-US" sz="830" dirty="0">
+                      <a:endParaRPr lang="ja-JP" sz="830" dirty="0">
                         <a:latin typeface="Yu Gothic" charset="0"/>
                         <a:ea typeface="Yu Gothic" charset="0"/>
                         <a:cs typeface="Yu Gothic" charset="0"/>
@@ -16224,7 +16224,7 @@
                         <a:buNone/>
                       </a:pPr>
                       <a:r>
-                        <a:rPr lang="en-US" sz="830" dirty="0">
+                        <a:rPr lang="ja-JP" sz="830" dirty="0">
                           <a:solidFill>
                             <a:srgbClr val="53565A"/>
                           </a:solidFill>
@@ -16234,7 +16234,7 @@
                         </a:rPr>
                         <a:t>mlit.go.jp 他</a:t>
                       </a:r>
-                      <a:endParaRPr lang="en-US" sz="830" dirty="0">
+                      <a:endParaRPr lang="ja-JP" sz="830" dirty="0">
                         <a:latin typeface="Yu Gothic" charset="0"/>
                         <a:ea typeface="Yu Gothic" charset="0"/>
                         <a:cs typeface="Yu Gothic" charset="0"/>
@@ -16289,7 +16289,7 @@
                         <a:buNone/>
                       </a:pPr>
                       <a:r>
-                        <a:rPr lang="en-US" sz="830" dirty="0">
+                        <a:rPr lang="ja-JP" sz="830" dirty="0">
                           <a:solidFill>
                             <a:srgbClr val="53565A"/>
                           </a:solidFill>
@@ -16299,7 +16299,7 @@
                         </a:rPr>
                         <a:t>DL（一部有償）</a:t>
                       </a:r>
-                      <a:endParaRPr lang="en-US" sz="830" dirty="0">
+                      <a:endParaRPr lang="ja-JP" sz="830" dirty="0">
                         <a:latin typeface="Yu Gothic" charset="0"/>
                         <a:ea typeface="Yu Gothic" charset="0"/>
                         <a:cs typeface="Yu Gothic" charset="0"/>
@@ -16354,7 +16354,7 @@
                         <a:buNone/>
                       </a:pPr>
                       <a:r>
-                        <a:rPr lang="en-US" sz="1000" b="1" dirty="0">
+                        <a:rPr lang="ja-JP" sz="1000" b="1" dirty="0">
                           <a:solidFill>
                             <a:srgbClr val="C9860A"/>
                           </a:solidFill>
@@ -16364,7 +16364,7 @@
                         </a:rPr>
                         <a:t>△</a:t>
                       </a:r>
-                      <a:endParaRPr lang="en-US" sz="1000" dirty="0">
+                      <a:endParaRPr lang="ja-JP" sz="1000" dirty="0">
                         <a:latin typeface="Yu Gothic" charset="0"/>
                         <a:ea typeface="Yu Gothic" charset="0"/>
                         <a:cs typeface="Yu Gothic" charset="0"/>
@@ -16419,7 +16419,7 @@
                         <a:buNone/>
                       </a:pPr>
                       <a:r>
-                        <a:rPr lang="en-US" sz="830" dirty="0">
+                        <a:rPr lang="ja-JP" sz="830" dirty="0">
                           <a:solidFill>
                             <a:srgbClr val="53565A"/>
                           </a:solidFill>
@@ -16429,7 +16429,7 @@
                         </a:rPr>
                         <a:t>一部契約要</a:t>
                       </a:r>
-                      <a:endParaRPr lang="en-US" sz="830" dirty="0">
+                      <a:endParaRPr lang="ja-JP" sz="830" dirty="0">
                         <a:latin typeface="Yu Gothic" charset="0"/>
                         <a:ea typeface="Yu Gothic" charset="0"/>
                         <a:cs typeface="Yu Gothic" charset="0"/>
@@ -16486,7 +16486,7 @@
                         <a:buNone/>
                       </a:pPr>
                       <a:r>
-                        <a:rPr lang="en-US" sz="830" b="1" dirty="0">
+                        <a:rPr lang="ja-JP" sz="830" b="1" dirty="0">
                           <a:solidFill>
                             <a:srgbClr val="1A1A1A"/>
                           </a:solidFill>
@@ -16496,7 +16496,7 @@
                         </a:rPr>
                         <a:t>気象・災害</a:t>
                       </a:r>
-                      <a:endParaRPr lang="en-US" sz="830" dirty="0">
+                      <a:endParaRPr lang="ja-JP" sz="830" dirty="0">
                         <a:latin typeface="Yu Gothic" charset="0"/>
                         <a:ea typeface="Yu Gothic" charset="0"/>
                         <a:cs typeface="Yu Gothic" charset="0"/>
@@ -16551,7 +16551,7 @@
                         <a:buNone/>
                       </a:pPr>
                       <a:r>
-                        <a:rPr lang="en-US" sz="830" dirty="0">
+                        <a:rPr lang="ja-JP" sz="830" dirty="0">
                           <a:solidFill>
                             <a:srgbClr val="53565A"/>
                           </a:solidFill>
@@ -16561,7 +16561,7 @@
                         </a:rPr>
                         <a:t>気象庁 防災情報</a:t>
                       </a:r>
-                      <a:endParaRPr lang="en-US" sz="830" dirty="0">
+                      <a:endParaRPr lang="ja-JP" sz="830" dirty="0">
                         <a:latin typeface="Yu Gothic" charset="0"/>
                         <a:ea typeface="Yu Gothic" charset="0"/>
                         <a:cs typeface="Yu Gothic" charset="0"/>
@@ -16616,7 +16616,7 @@
                         <a:buNone/>
                       </a:pPr>
                       <a:r>
-                        <a:rPr lang="en-US" sz="830" dirty="0">
+                        <a:rPr lang="ja-JP" sz="830" dirty="0">
                           <a:solidFill>
                             <a:srgbClr val="53565A"/>
                           </a:solidFill>
@@ -16626,7 +16626,7 @@
                         </a:rPr>
                         <a:t>jma.go.jp</a:t>
                       </a:r>
-                      <a:endParaRPr lang="en-US" sz="830" dirty="0">
+                      <a:endParaRPr lang="ja-JP" sz="830" dirty="0">
                         <a:latin typeface="Yu Gothic" charset="0"/>
                         <a:ea typeface="Yu Gothic" charset="0"/>
                         <a:cs typeface="Yu Gothic" charset="0"/>
@@ -16681,7 +16681,7 @@
                         <a:buNone/>
                       </a:pPr>
                       <a:r>
-                        <a:rPr lang="en-US" sz="830" dirty="0">
+                        <a:rPr lang="ja-JP" sz="830" dirty="0">
                           <a:solidFill>
                             <a:srgbClr val="53565A"/>
                           </a:solidFill>
@@ -16691,7 +16691,7 @@
                         </a:rPr>
                         <a:t>API（XML）／DL</a:t>
                       </a:r>
-                      <a:endParaRPr lang="en-US" sz="830" dirty="0">
+                      <a:endParaRPr lang="ja-JP" sz="830" dirty="0">
                         <a:latin typeface="Yu Gothic" charset="0"/>
                         <a:ea typeface="Yu Gothic" charset="0"/>
                         <a:cs typeface="Yu Gothic" charset="0"/>
@@ -16746,7 +16746,7 @@
                         <a:buNone/>
                       </a:pPr>
                       <a:r>
-                        <a:rPr lang="en-US" sz="1000" b="1" dirty="0">
+                        <a:rPr lang="ja-JP" sz="1000" b="1" dirty="0">
                           <a:solidFill>
                             <a:srgbClr val="3F8F2E"/>
                           </a:solidFill>
@@ -16756,7 +16756,7 @@
                         </a:rPr>
                         <a:t>○</a:t>
                       </a:r>
-                      <a:endParaRPr lang="en-US" sz="1000" dirty="0">
+                      <a:endParaRPr lang="ja-JP" sz="1000" dirty="0">
                         <a:latin typeface="Yu Gothic" charset="0"/>
                         <a:ea typeface="Yu Gothic" charset="0"/>
                         <a:cs typeface="Yu Gothic" charset="0"/>
@@ -16811,7 +16811,7 @@
                         <a:buNone/>
                       </a:pPr>
                       <a:r>
-                        <a:rPr lang="en-US" sz="830" dirty="0">
+                        <a:rPr lang="ja-JP" sz="830" dirty="0">
                           <a:solidFill>
                             <a:srgbClr val="53565A"/>
                           </a:solidFill>
@@ -16821,7 +16821,7 @@
                         </a:rPr>
                         <a:t>随時</a:t>
                       </a:r>
-                      <a:endParaRPr lang="en-US" sz="830" dirty="0">
+                      <a:endParaRPr lang="ja-JP" sz="830" dirty="0">
                         <a:latin typeface="Yu Gothic" charset="0"/>
                         <a:ea typeface="Yu Gothic" charset="0"/>
                         <a:cs typeface="Yu Gothic" charset="0"/>
@@ -16878,7 +16878,7 @@
                         <a:buNone/>
                       </a:pPr>
                       <a:r>
-                        <a:rPr lang="en-US" sz="830" b="1" dirty="0">
+                        <a:rPr lang="ja-JP" sz="830" b="1" dirty="0">
                           <a:solidFill>
                             <a:srgbClr val="1A1A1A"/>
                           </a:solidFill>
@@ -16888,7 +16888,7 @@
                         </a:rPr>
                         <a:t>個人消費・景気</a:t>
                       </a:r>
-                      <a:endParaRPr lang="en-US" sz="830" dirty="0">
+                      <a:endParaRPr lang="ja-JP" sz="830" dirty="0">
                         <a:latin typeface="Yu Gothic" charset="0"/>
                         <a:ea typeface="Yu Gothic" charset="0"/>
                         <a:cs typeface="Yu Gothic" charset="0"/>
@@ -16943,7 +16943,7 @@
                         <a:buNone/>
                       </a:pPr>
                       <a:r>
-                        <a:rPr lang="en-US" sz="830" dirty="0">
+                        <a:rPr lang="ja-JP" sz="830" dirty="0">
                           <a:solidFill>
                             <a:srgbClr val="53565A"/>
                           </a:solidFill>
@@ -16953,7 +16953,7 @@
                         </a:rPr>
                         <a:t>総務省 家計調査／内閣府</a:t>
                       </a:r>
-                      <a:endParaRPr lang="en-US" sz="830" dirty="0">
+                      <a:endParaRPr lang="ja-JP" sz="830" dirty="0">
                         <a:latin typeface="Yu Gothic" charset="0"/>
                         <a:ea typeface="Yu Gothic" charset="0"/>
                         <a:cs typeface="Yu Gothic" charset="0"/>
@@ -17008,7 +17008,7 @@
                         <a:buNone/>
                       </a:pPr>
                       <a:r>
-                        <a:rPr lang="en-US" sz="830" dirty="0">
+                        <a:rPr lang="ja-JP" sz="830" dirty="0">
                           <a:solidFill>
                             <a:srgbClr val="53565A"/>
                           </a:solidFill>
@@ -17018,7 +17018,7 @@
                         </a:rPr>
                         <a:t>e-Stat／cao.go.jp</a:t>
                       </a:r>
-                      <a:endParaRPr lang="en-US" sz="830" dirty="0">
+                      <a:endParaRPr lang="ja-JP" sz="830" dirty="0">
                         <a:latin typeface="Yu Gothic" charset="0"/>
                         <a:ea typeface="Yu Gothic" charset="0"/>
                         <a:cs typeface="Yu Gothic" charset="0"/>
@@ -17073,7 +17073,7 @@
                         <a:buNone/>
                       </a:pPr>
                       <a:r>
-                        <a:rPr lang="en-US" sz="830" dirty="0">
+                        <a:rPr lang="ja-JP" sz="830" dirty="0">
                           <a:solidFill>
                             <a:srgbClr val="53565A"/>
                           </a:solidFill>
@@ -17083,7 +17083,7 @@
                         </a:rPr>
                         <a:t>API／DL</a:t>
                       </a:r>
-                      <a:endParaRPr lang="en-US" sz="830" dirty="0">
+                      <a:endParaRPr lang="ja-JP" sz="830" dirty="0">
                         <a:latin typeface="Yu Gothic" charset="0"/>
                         <a:ea typeface="Yu Gothic" charset="0"/>
                         <a:cs typeface="Yu Gothic" charset="0"/>
@@ -17138,7 +17138,7 @@
                         <a:buNone/>
                       </a:pPr>
                       <a:r>
-                        <a:rPr lang="en-US" sz="1000" b="1" dirty="0">
+                        <a:rPr lang="ja-JP" sz="1000" b="1" dirty="0">
                           <a:solidFill>
                             <a:srgbClr val="3F8F2E"/>
                           </a:solidFill>
@@ -17148,7 +17148,7 @@
                         </a:rPr>
                         <a:t>○</a:t>
                       </a:r>
-                      <a:endParaRPr lang="en-US" sz="1000" dirty="0">
+                      <a:endParaRPr lang="ja-JP" sz="1000" dirty="0">
                         <a:latin typeface="Yu Gothic" charset="0"/>
                         <a:ea typeface="Yu Gothic" charset="0"/>
                         <a:cs typeface="Yu Gothic" charset="0"/>
@@ -17203,7 +17203,7 @@
                         <a:buNone/>
                       </a:pPr>
                       <a:r>
-                        <a:rPr lang="en-US" sz="830" dirty="0">
+                        <a:rPr lang="ja-JP" sz="830" dirty="0">
                           <a:solidFill>
                             <a:srgbClr val="53565A"/>
                           </a:solidFill>
@@ -17213,7 +17213,7 @@
                         </a:rPr>
                         <a:t>月次</a:t>
                       </a:r>
-                      <a:endParaRPr lang="en-US" sz="830" dirty="0">
+                      <a:endParaRPr lang="ja-JP" sz="830" dirty="0">
                         <a:latin typeface="Yu Gothic" charset="0"/>
                         <a:ea typeface="Yu Gothic" charset="0"/>
                         <a:cs typeface="Yu Gothic" charset="0"/>
@@ -17270,7 +17270,7 @@
                         <a:buNone/>
                       </a:pPr>
                       <a:r>
-                        <a:rPr lang="en-US" sz="830" b="1" dirty="0">
+                        <a:rPr lang="ja-JP" sz="830" b="1" dirty="0">
                           <a:solidFill>
                             <a:srgbClr val="1A1A1A"/>
                           </a:solidFill>
@@ -17280,7 +17280,7 @@
                         </a:rPr>
                         <a:t>大型イベント・施設変更</a:t>
                       </a:r>
-                      <a:endParaRPr lang="en-US" sz="830" dirty="0">
+                      <a:endParaRPr lang="ja-JP" sz="830" dirty="0">
                         <a:latin typeface="Yu Gothic" charset="0"/>
                         <a:ea typeface="Yu Gothic" charset="0"/>
                         <a:cs typeface="Yu Gothic" charset="0"/>
@@ -17335,7 +17335,7 @@
                         <a:buNone/>
                       </a:pPr>
                       <a:r>
-                        <a:rPr lang="en-US" sz="830" dirty="0">
+                        <a:rPr lang="ja-JP" sz="830" dirty="0">
                           <a:solidFill>
                             <a:srgbClr val="53565A"/>
                           </a:solidFill>
@@ -17345,7 +17345,7 @@
                         </a:rPr>
                         <a:t>主催者・自治体・各社リリース</a:t>
                       </a:r>
-                      <a:endParaRPr lang="en-US" sz="830" dirty="0">
+                      <a:endParaRPr lang="ja-JP" sz="830" dirty="0">
                         <a:latin typeface="Yu Gothic" charset="0"/>
                         <a:ea typeface="Yu Gothic" charset="0"/>
                         <a:cs typeface="Yu Gothic" charset="0"/>
@@ -17400,7 +17400,7 @@
                         <a:buNone/>
                       </a:pPr>
                       <a:r>
-                        <a:rPr lang="en-US" sz="830" dirty="0">
+                        <a:rPr lang="ja-JP" sz="830" dirty="0">
                           <a:solidFill>
                             <a:srgbClr val="53565A"/>
                           </a:solidFill>
@@ -17410,7 +17410,7 @@
                         </a:rPr>
                         <a:t>各公式サイト</a:t>
                       </a:r>
-                      <a:endParaRPr lang="en-US" sz="830" dirty="0">
+                      <a:endParaRPr lang="ja-JP" sz="830" dirty="0">
                         <a:latin typeface="Yu Gothic" charset="0"/>
                         <a:ea typeface="Yu Gothic" charset="0"/>
                         <a:cs typeface="Yu Gothic" charset="0"/>
@@ -17465,7 +17465,7 @@
                         <a:buNone/>
                       </a:pPr>
                       <a:r>
-                        <a:rPr lang="en-US" sz="830" dirty="0">
+                        <a:rPr lang="ja-JP" sz="830" dirty="0">
                           <a:solidFill>
                             <a:srgbClr val="53565A"/>
                           </a:solidFill>
@@ -17475,7 +17475,7 @@
                         </a:rPr>
                         <a:t>Web／手動収集</a:t>
                       </a:r>
-                      <a:endParaRPr lang="en-US" sz="830" dirty="0">
+                      <a:endParaRPr lang="ja-JP" sz="830" dirty="0">
                         <a:latin typeface="Yu Gothic" charset="0"/>
                         <a:ea typeface="Yu Gothic" charset="0"/>
                         <a:cs typeface="Yu Gothic" charset="0"/>
@@ -17530,7 +17530,7 @@
                         <a:buNone/>
                       </a:pPr>
                       <a:r>
-                        <a:rPr lang="en-US" sz="1000" b="1" dirty="0">
+                        <a:rPr lang="ja-JP" sz="1000" b="1" dirty="0">
                           <a:solidFill>
                             <a:srgbClr val="C9860A"/>
                           </a:solidFill>
@@ -17540,7 +17540,7 @@
                         </a:rPr>
                         <a:t>△</a:t>
                       </a:r>
-                      <a:endParaRPr lang="en-US" sz="1000" dirty="0">
+                      <a:endParaRPr lang="ja-JP" sz="1000" dirty="0">
                         <a:latin typeface="Yu Gothic" charset="0"/>
                         <a:ea typeface="Yu Gothic" charset="0"/>
                         <a:cs typeface="Yu Gothic" charset="0"/>
@@ -17595,7 +17595,7 @@
                         <a:buNone/>
                       </a:pPr>
                       <a:r>
-                        <a:rPr lang="en-US" sz="830" dirty="0">
+                        <a:rPr lang="ja-JP" sz="830" dirty="0">
                           <a:solidFill>
                             <a:srgbClr val="53565A"/>
                           </a:solidFill>
@@ -17605,7 +17605,7 @@
                         </a:rPr>
                         <a:t>構造化要</a:t>
                       </a:r>
-                      <a:endParaRPr lang="en-US" sz="830" dirty="0">
+                      <a:endParaRPr lang="ja-JP" sz="830" dirty="0">
                         <a:latin typeface="Yu Gothic" charset="0"/>
                         <a:ea typeface="Yu Gothic" charset="0"/>
                         <a:cs typeface="Yu Gothic" charset="0"/>
@@ -17662,7 +17662,7 @@
                         <a:buNone/>
                       </a:pPr>
                       <a:r>
-                        <a:rPr lang="en-US" sz="830" b="1" dirty="0">
+                        <a:rPr lang="ja-JP" sz="830" b="1" dirty="0">
                           <a:solidFill>
                             <a:srgbClr val="1A1A1A"/>
                           </a:solidFill>
@@ -17672,7 +17672,7 @@
                         </a:rPr>
                         <a:t>決算・有報・IR資料</a:t>
                       </a:r>
-                      <a:endParaRPr lang="en-US" sz="830" dirty="0">
+                      <a:endParaRPr lang="ja-JP" sz="830" dirty="0">
                         <a:latin typeface="Yu Gothic" charset="0"/>
                         <a:ea typeface="Yu Gothic" charset="0"/>
                         <a:cs typeface="Yu Gothic" charset="0"/>
@@ -17727,7 +17727,7 @@
                         <a:buNone/>
                       </a:pPr>
                       <a:r>
-                        <a:rPr lang="en-US" sz="830" dirty="0">
+                        <a:rPr lang="ja-JP" sz="830" dirty="0">
                           <a:solidFill>
                             <a:srgbClr val="53565A"/>
                           </a:solidFill>
@@ -17737,7 +17737,7 @@
                         </a:rPr>
                         <a:t>EDINET／各社IR</a:t>
                       </a:r>
-                      <a:endParaRPr lang="en-US" sz="830" dirty="0">
+                      <a:endParaRPr lang="ja-JP" sz="830" dirty="0">
                         <a:latin typeface="Yu Gothic" charset="0"/>
                         <a:ea typeface="Yu Gothic" charset="0"/>
                         <a:cs typeface="Yu Gothic" charset="0"/>
@@ -17792,7 +17792,7 @@
                         <a:buNone/>
                       </a:pPr>
                       <a:r>
-                        <a:rPr lang="en-US" sz="830" dirty="0">
+                        <a:rPr lang="ja-JP" sz="830" dirty="0">
                           <a:solidFill>
                             <a:srgbClr val="53565A"/>
                           </a:solidFill>
@@ -17802,7 +17802,7 @@
                         </a:rPr>
                         <a:t>disclosure.edinet-fsa.go.jp</a:t>
                       </a:r>
-                      <a:endParaRPr lang="en-US" sz="830" dirty="0">
+                      <a:endParaRPr lang="ja-JP" sz="830" dirty="0">
                         <a:latin typeface="Yu Gothic" charset="0"/>
                         <a:ea typeface="Yu Gothic" charset="0"/>
                         <a:cs typeface="Yu Gothic" charset="0"/>
@@ -17857,7 +17857,7 @@
                         <a:buNone/>
                       </a:pPr>
                       <a:r>
-                        <a:rPr lang="en-US" sz="830" dirty="0">
+                        <a:rPr lang="ja-JP" sz="830" dirty="0">
                           <a:solidFill>
                             <a:srgbClr val="53565A"/>
                           </a:solidFill>
@@ -17867,7 +17867,7 @@
                         </a:rPr>
                         <a:t>API（XBRL）／DL</a:t>
                       </a:r>
-                      <a:endParaRPr lang="en-US" sz="830" dirty="0">
+                      <a:endParaRPr lang="ja-JP" sz="830" dirty="0">
                         <a:latin typeface="Yu Gothic" charset="0"/>
                         <a:ea typeface="Yu Gothic" charset="0"/>
                         <a:cs typeface="Yu Gothic" charset="0"/>
@@ -17922,7 +17922,7 @@
                         <a:buNone/>
                       </a:pPr>
                       <a:r>
-                        <a:rPr lang="en-US" sz="1000" b="1" dirty="0">
+                        <a:rPr lang="ja-JP" sz="1000" b="1" dirty="0">
                           <a:solidFill>
                             <a:srgbClr val="3F8F2E"/>
                           </a:solidFill>
@@ -17932,7 +17932,7 @@
                         </a:rPr>
                         <a:t>○</a:t>
                       </a:r>
-                      <a:endParaRPr lang="en-US" sz="1000" dirty="0">
+                      <a:endParaRPr lang="ja-JP" sz="1000" dirty="0">
                         <a:latin typeface="Yu Gothic" charset="0"/>
                         <a:ea typeface="Yu Gothic" charset="0"/>
                         <a:cs typeface="Yu Gothic" charset="0"/>
@@ -17987,7 +17987,7 @@
                         <a:buNone/>
                       </a:pPr>
                       <a:r>
-                        <a:rPr lang="en-US" sz="830" dirty="0">
+                        <a:rPr lang="ja-JP" sz="830" dirty="0">
                           <a:solidFill>
                             <a:srgbClr val="53565A"/>
                           </a:solidFill>
@@ -17997,7 +17997,7 @@
                         </a:rPr>
                         <a:t>四半期</a:t>
                       </a:r>
-                      <a:endParaRPr lang="en-US" sz="830" dirty="0">
+                      <a:endParaRPr lang="ja-JP" sz="830" dirty="0">
                         <a:latin typeface="Yu Gothic" charset="0"/>
                         <a:ea typeface="Yu Gothic" charset="0"/>
                         <a:cs typeface="Yu Gothic" charset="0"/>
@@ -18054,7 +18054,7 @@
                         <a:buNone/>
                       </a:pPr>
                       <a:r>
-                        <a:rPr lang="en-US" sz="830" b="1" dirty="0">
+                        <a:rPr lang="ja-JP" sz="830" b="1" dirty="0">
                           <a:solidFill>
                             <a:srgbClr val="1A1A1A"/>
                           </a:solidFill>
@@ -18064,7 +18064,7 @@
                         </a:rPr>
                         <a:t>事例（新聞・業界紙）</a:t>
                       </a:r>
-                      <a:endParaRPr lang="en-US" sz="830" dirty="0">
+                      <a:endParaRPr lang="ja-JP" sz="830" dirty="0">
                         <a:latin typeface="Yu Gothic" charset="0"/>
                         <a:ea typeface="Yu Gothic" charset="0"/>
                         <a:cs typeface="Yu Gothic" charset="0"/>
@@ -18119,7 +18119,7 @@
                         <a:buNone/>
                       </a:pPr>
                       <a:r>
-                        <a:rPr lang="en-US" sz="830" dirty="0">
+                        <a:rPr lang="ja-JP" sz="830" dirty="0">
                           <a:solidFill>
                             <a:srgbClr val="53565A"/>
                           </a:solidFill>
@@ -18129,7 +18129,7 @@
                         </a:rPr>
                         <a:t>日経テレコン 等 新聞DB</a:t>
                       </a:r>
-                      <a:endParaRPr lang="en-US" sz="830" dirty="0">
+                      <a:endParaRPr lang="ja-JP" sz="830" dirty="0">
                         <a:latin typeface="Yu Gothic" charset="0"/>
                         <a:ea typeface="Yu Gothic" charset="0"/>
                         <a:cs typeface="Yu Gothic" charset="0"/>
@@ -18184,7 +18184,7 @@
                         <a:buNone/>
                       </a:pPr>
                       <a:r>
-                        <a:rPr lang="en-US" sz="830" dirty="0">
+                        <a:rPr lang="ja-JP" sz="830" dirty="0">
                           <a:solidFill>
                             <a:srgbClr val="53565A"/>
                           </a:solidFill>
@@ -18194,7 +18194,7 @@
                         </a:rPr>
                         <a:t>要契約サービス</a:t>
                       </a:r>
-                      <a:endParaRPr lang="en-US" sz="830" dirty="0">
+                      <a:endParaRPr lang="ja-JP" sz="830" dirty="0">
                         <a:latin typeface="Yu Gothic" charset="0"/>
                         <a:ea typeface="Yu Gothic" charset="0"/>
                         <a:cs typeface="Yu Gothic" charset="0"/>
@@ -18249,7 +18249,7 @@
                         <a:buNone/>
                       </a:pPr>
                       <a:r>
-                        <a:rPr lang="en-US" sz="830" dirty="0">
+                        <a:rPr lang="ja-JP" sz="830" dirty="0">
                           <a:solidFill>
                             <a:srgbClr val="53565A"/>
                           </a:solidFill>
@@ -18259,7 +18259,7 @@
                         </a:rPr>
                         <a:t>契約／API（有償）</a:t>
                       </a:r>
-                      <a:endParaRPr lang="en-US" sz="830" dirty="0">
+                      <a:endParaRPr lang="ja-JP" sz="830" dirty="0">
                         <a:latin typeface="Yu Gothic" charset="0"/>
                         <a:ea typeface="Yu Gothic" charset="0"/>
                         <a:cs typeface="Yu Gothic" charset="0"/>
@@ -18314,7 +18314,7 @@
                         <a:buNone/>
                       </a:pPr>
                       <a:r>
-                        <a:rPr lang="en-US" sz="1000" b="1" dirty="0">
+                        <a:rPr lang="ja-JP" sz="1000" b="1" dirty="0">
                           <a:solidFill>
                             <a:srgbClr val="C9860A"/>
                           </a:solidFill>
@@ -18324,7 +18324,7 @@
                         </a:rPr>
                         <a:t>△</a:t>
                       </a:r>
-                      <a:endParaRPr lang="en-US" sz="1000" dirty="0">
+                      <a:endParaRPr lang="ja-JP" sz="1000" dirty="0">
                         <a:latin typeface="Yu Gothic" charset="0"/>
                         <a:ea typeface="Yu Gothic" charset="0"/>
                         <a:cs typeface="Yu Gothic" charset="0"/>
@@ -18379,7 +18379,7 @@
                         <a:buNone/>
                       </a:pPr>
                       <a:r>
-                        <a:rPr lang="en-US" sz="830" dirty="0">
+                        <a:rPr lang="ja-JP" sz="830" dirty="0">
                           <a:solidFill>
                             <a:srgbClr val="B33A2B"/>
                           </a:solidFill>
@@ -18389,7 +18389,7 @@
                         </a:rPr>
                         <a:t>■許諾判断要</a:t>
                       </a:r>
-                      <a:endParaRPr lang="en-US" sz="830" dirty="0">
+                      <a:endParaRPr lang="ja-JP" sz="830" dirty="0">
                         <a:latin typeface="Yu Gothic" charset="0"/>
                         <a:ea typeface="Yu Gothic" charset="0"/>
                         <a:cs typeface="Yu Gothic" charset="0"/>
@@ -18446,7 +18446,7 @@
                         <a:buNone/>
                       </a:pPr>
                       <a:r>
-                        <a:rPr lang="en-US" sz="830" b="1" dirty="0">
+                        <a:rPr lang="ja-JP" sz="830" b="1" dirty="0">
                           <a:solidFill>
                             <a:srgbClr val="1A1A1A"/>
                           </a:solidFill>
@@ -18456,7 +18456,7 @@
                         </a:rPr>
                         <a:t>社内KPI・事業計画</a:t>
                       </a:r>
-                      <a:endParaRPr lang="en-US" sz="830" dirty="0">
+                      <a:endParaRPr lang="ja-JP" sz="830" dirty="0">
                         <a:latin typeface="Yu Gothic" charset="0"/>
                         <a:ea typeface="Yu Gothic" charset="0"/>
                         <a:cs typeface="Yu Gothic" charset="0"/>
@@ -18511,7 +18511,7 @@
                         <a:buNone/>
                       </a:pPr>
                       <a:r>
-                        <a:rPr lang="en-US" sz="830" dirty="0">
+                        <a:rPr lang="ja-JP" sz="830" dirty="0">
                           <a:solidFill>
                             <a:srgbClr val="53565A"/>
                           </a:solidFill>
@@ -18521,7 +18521,7 @@
                         </a:rPr>
                         <a:t>HH各社 基幹／管理会計（マスク）</a:t>
                       </a:r>
-                      <a:endParaRPr lang="en-US" sz="830" dirty="0">
+                      <a:endParaRPr lang="ja-JP" sz="830" dirty="0">
                         <a:latin typeface="Yu Gothic" charset="0"/>
                         <a:ea typeface="Yu Gothic" charset="0"/>
                         <a:cs typeface="Yu Gothic" charset="0"/>
@@ -18576,7 +18576,7 @@
                         <a:buNone/>
                       </a:pPr>
                       <a:r>
-                        <a:rPr lang="en-US" sz="830" dirty="0">
+                        <a:rPr lang="ja-JP" sz="830" dirty="0">
                           <a:solidFill>
                             <a:srgbClr val="53565A"/>
                           </a:solidFill>
@@ -18586,7 +18586,7 @@
                         </a:rPr>
                         <a:t>先方提供</a:t>
                       </a:r>
-                      <a:endParaRPr lang="en-US" sz="830" dirty="0">
+                      <a:endParaRPr lang="ja-JP" sz="830" dirty="0">
                         <a:latin typeface="Yu Gothic" charset="0"/>
                         <a:ea typeface="Yu Gothic" charset="0"/>
                         <a:cs typeface="Yu Gothic" charset="0"/>
@@ -18641,7 +18641,7 @@
                         <a:buNone/>
                       </a:pPr>
                       <a:r>
-                        <a:rPr lang="en-US" sz="830" dirty="0">
+                        <a:rPr lang="ja-JP" sz="830" dirty="0">
                           <a:solidFill>
                             <a:srgbClr val="53565A"/>
                           </a:solidFill>
@@ -18651,7 +18651,7 @@
                         </a:rPr>
                         <a:t>提供（方式未定）</a:t>
                       </a:r>
-                      <a:endParaRPr lang="en-US" sz="830" dirty="0">
+                      <a:endParaRPr lang="ja-JP" sz="830" dirty="0">
                         <a:latin typeface="Yu Gothic" charset="0"/>
                         <a:ea typeface="Yu Gothic" charset="0"/>
                         <a:cs typeface="Yu Gothic" charset="0"/>
@@ -18706,7 +18706,7 @@
                         <a:buNone/>
                       </a:pPr>
                       <a:r>
-                        <a:rPr lang="en-US" sz="1000" b="1" dirty="0">
+                        <a:rPr lang="ja-JP" sz="1000" b="1" dirty="0">
                           <a:solidFill>
                             <a:srgbClr val="C9860A"/>
                           </a:solidFill>
@@ -18716,7 +18716,7 @@
                         </a:rPr>
                         <a:t>△</a:t>
                       </a:r>
-                      <a:endParaRPr lang="en-US" sz="1000" dirty="0">
+                      <a:endParaRPr lang="ja-JP" sz="1000" dirty="0">
                         <a:latin typeface="Yu Gothic" charset="0"/>
                         <a:ea typeface="Yu Gothic" charset="0"/>
                         <a:cs typeface="Yu Gothic" charset="0"/>
@@ -18771,7 +18771,7 @@
                         <a:buNone/>
                       </a:pPr>
                       <a:r>
-                        <a:rPr lang="en-US" sz="830" dirty="0">
+                        <a:rPr lang="ja-JP" sz="830" dirty="0">
                           <a:solidFill>
                             <a:srgbClr val="53565A"/>
                           </a:solidFill>
@@ -18781,7 +18781,7 @@
                         </a:rPr>
                         <a:t>粒度を要合意</a:t>
                       </a:r>
-                      <a:endParaRPr lang="en-US" sz="830" dirty="0">
+                      <a:endParaRPr lang="ja-JP" sz="830" dirty="0">
                         <a:latin typeface="Yu Gothic" charset="0"/>
                         <a:ea typeface="Yu Gothic" charset="0"/>
                         <a:cs typeface="Yu Gothic" charset="0"/>
@@ -18857,7 +18857,7 @@
               <a:buNone/>
             </a:pPr>
             <a:r>
-              <a:rPr lang="en-US" sz="830" dirty="0">
+              <a:rPr lang="ja-JP" sz="830" dirty="0">
                 <a:solidFill>
                   <a:srgbClr val="8A8D87"/>
                 </a:solidFill>
@@ -18867,7 +18867,7 @@
               </a:rPr>
               <a:t>※ URLは代表的な参照先の例示。API接続・提供方式・更新頻度は本番設計フェーズで確定。現PoCのモックは全てダミーデータでオフライン動作。</a:t>
             </a:r>
-            <a:endParaRPr lang="en-US" sz="830" dirty="0"/>
+            <a:endParaRPr lang="ja-JP" sz="830" dirty="0"/>
           </a:p>
         </p:txBody>
       </p:sp>
@@ -18896,7 +18896,7 @@
               <a:buNone/>
             </a:pPr>
             <a:r>
-              <a:rPr lang="en-US" sz="900" b="1" dirty="0">
+              <a:rPr lang="ja-JP" sz="900" b="1" dirty="0">
                 <a:solidFill>
                   <a:srgbClr val="046A38"/>
                 </a:solidFill>
@@ -18910,7 +18910,7 @@
               <a:buNone/>
             </a:pPr>
             <a:r>
-              <a:rPr lang="en-US" sz="900" dirty="0">
+              <a:rPr lang="ja-JP" sz="900" dirty="0">
                 <a:solidFill>
                   <a:srgbClr val="8A8D87"/>
                 </a:solidFill>
@@ -18920,7 +18920,7 @@
               </a:rPr>
               <a:t>    ｜    データ詳細</a:t>
             </a:r>
-            <a:endParaRPr lang="en-US" sz="900" dirty="0"/>
+            <a:endParaRPr lang="ja-JP" sz="900" dirty="0"/>
           </a:p>
         </p:txBody>
       </p:sp>
@@ -18949,7 +18949,7 @@
               <a:buNone/>
             </a:pPr>
             <a:r>
-              <a:rPr lang="en-US" sz="900" dirty="0">
+              <a:rPr lang="ja-JP" sz="900" dirty="0">
                 <a:solidFill>
                   <a:srgbClr val="8A8D87"/>
                 </a:solidFill>
@@ -18959,7 +18959,7 @@
               </a:rPr>
               <a:t>07</a:t>
             </a:r>
-            <a:endParaRPr lang="en-US" sz="900" dirty="0"/>
+            <a:endParaRPr lang="ja-JP" sz="900" dirty="0"/>
           </a:p>
         </p:txBody>
       </p:sp>
@@ -19063,7 +19063,7 @@
               <a:buNone/>
             </a:pPr>
             <a:r>
-              <a:rPr lang="en-US" sz="1100" b="1" spc="200" kern="0" dirty="0">
+              <a:rPr lang="ja-JP" sz="1100" b="1" spc="200" kern="0" dirty="0">
                 <a:solidFill>
                   <a:srgbClr val="046A38"/>
                 </a:solidFill>
@@ -19073,7 +19073,7 @@
               </a:rPr>
               <a:t>STATUS &amp; ISSUES</a:t>
             </a:r>
-            <a:endParaRPr lang="en-US" sz="1100" dirty="0"/>
+            <a:endParaRPr lang="ja-JP" sz="1100" dirty="0"/>
           </a:p>
         </p:txBody>
       </p:sp>
@@ -19102,7 +19102,7 @@
               <a:buNone/>
             </a:pPr>
             <a:r>
-              <a:rPr lang="en-US" sz="2500" b="1" dirty="0">
+              <a:rPr lang="ja-JP" sz="2500" b="1" dirty="0">
                 <a:solidFill>
                   <a:srgbClr val="1A1A1A"/>
                 </a:solidFill>
@@ -19112,7 +19112,7 @@
               </a:rPr>
               <a:t>進捗の現在地 と 課題</a:t>
             </a:r>
-            <a:endParaRPr lang="en-US" sz="2500" dirty="0"/>
+            <a:endParaRPr lang="ja-JP" sz="2500" dirty="0"/>
           </a:p>
         </p:txBody>
       </p:sp>
@@ -19144,7 +19144,7 @@
               <a:buNone/>
             </a:pPr>
             <a:r>
-              <a:rPr lang="en-US" sz="1150" dirty="0">
+              <a:rPr lang="ja-JP" sz="1150" dirty="0">
                 <a:solidFill>
                   <a:srgbClr val="53565A"/>
                 </a:solidFill>
@@ -19154,7 +19154,7 @@
               </a:rPr>
               <a:t>動作するモックで8ビューを体験可能。バックエンドは現段階すべてダミー（オフライン動作）。実装状況と主要課題を整理。</a:t>
             </a:r>
-            <a:endParaRPr lang="en-US" sz="1150" dirty="0"/>
+            <a:endParaRPr lang="ja-JP" sz="1150" dirty="0"/>
           </a:p>
         </p:txBody>
       </p:sp>
@@ -19183,7 +19183,7 @@
               <a:buNone/>
             </a:pPr>
             <a:r>
-              <a:rPr lang="en-US" sz="1200" b="1" spc="100" kern="0" dirty="0">
+              <a:rPr lang="ja-JP" sz="1200" b="1" spc="100" kern="0" dirty="0">
                 <a:solidFill>
                   <a:srgbClr val="046A38"/>
                 </a:solidFill>
@@ -19193,7 +19193,7 @@
               </a:rPr>
               <a:t>モック実装状況（8ビュー）</a:t>
             </a:r>
-            <a:endParaRPr lang="en-US" sz="1200" dirty="0"/>
+            <a:endParaRPr lang="ja-JP" sz="1200" dirty="0"/>
           </a:p>
         </p:txBody>
       </p:sp>
@@ -19234,7 +19234,7 @@
                         <a:buNone/>
                       </a:pPr>
                       <a:r>
-                        <a:rPr lang="en-US" sz="900" b="1" dirty="0">
+                        <a:rPr lang="ja-JP" sz="900" b="1" dirty="0">
                           <a:solidFill>
                             <a:srgbClr val="FFFFFF"/>
                           </a:solidFill>
@@ -19244,7 +19244,7 @@
                         </a:rPr>
                         <a:t>ビュー</a:t>
                       </a:r>
-                      <a:endParaRPr lang="en-US" sz="900" dirty="0">
+                      <a:endParaRPr lang="ja-JP" sz="900" dirty="0">
                         <a:latin typeface="Yu Gothic" charset="0"/>
                         <a:ea typeface="Yu Gothic" charset="0"/>
                         <a:cs typeface="Yu Gothic" charset="0"/>
@@ -19302,7 +19302,7 @@
                         <a:buNone/>
                       </a:pPr>
                       <a:r>
-                        <a:rPr lang="en-US" sz="900" b="1" dirty="0">
+                        <a:rPr lang="ja-JP" sz="900" b="1" dirty="0">
                           <a:solidFill>
                             <a:srgbClr val="FFFFFF"/>
                           </a:solidFill>
@@ -19312,7 +19312,7 @@
                         </a:rPr>
                         <a:t>状態</a:t>
                       </a:r>
-                      <a:endParaRPr lang="en-US" sz="900" dirty="0">
+                      <a:endParaRPr lang="ja-JP" sz="900" dirty="0">
                         <a:latin typeface="Yu Gothic" charset="0"/>
                         <a:ea typeface="Yu Gothic" charset="0"/>
                         <a:cs typeface="Yu Gothic" charset="0"/>
@@ -19370,7 +19370,7 @@
                         <a:buNone/>
                       </a:pPr>
                       <a:r>
-                        <a:rPr lang="en-US" sz="900" b="1" dirty="0">
+                        <a:rPr lang="ja-JP" sz="900" b="1" dirty="0">
                           <a:solidFill>
                             <a:srgbClr val="FFFFFF"/>
                           </a:solidFill>
@@ -19380,7 +19380,7 @@
                         </a:rPr>
                         <a:t>内容</a:t>
                       </a:r>
-                      <a:endParaRPr lang="en-US" sz="900" dirty="0">
+                      <a:endParaRPr lang="ja-JP" sz="900" dirty="0">
                         <a:latin typeface="Yu Gothic" charset="0"/>
                         <a:ea typeface="Yu Gothic" charset="0"/>
                         <a:cs typeface="Yu Gothic" charset="0"/>
@@ -19440,7 +19440,7 @@
                         <a:buNone/>
                       </a:pPr>
                       <a:r>
-                        <a:rPr lang="en-US" sz="900" b="1" dirty="0">
+                        <a:rPr lang="ja-JP" sz="900" b="1" dirty="0">
                           <a:solidFill>
                             <a:srgbClr val="1A1A1A"/>
                           </a:solidFill>
@@ -19450,7 +19450,7 @@
                         </a:rPr>
                         <a:t>センシング</a:t>
                       </a:r>
-                      <a:endParaRPr lang="en-US" sz="900" dirty="0">
+                      <a:endParaRPr lang="ja-JP" sz="900" dirty="0">
                         <a:latin typeface="Yu Gothic" charset="0"/>
                         <a:ea typeface="Yu Gothic" charset="0"/>
                         <a:cs typeface="Yu Gothic" charset="0"/>
@@ -19505,7 +19505,7 @@
                         <a:buNone/>
                       </a:pPr>
                       <a:r>
-                        <a:rPr lang="en-US" sz="850" b="1" dirty="0">
+                        <a:rPr lang="ja-JP" sz="850" b="1" dirty="0">
                           <a:solidFill>
                             <a:srgbClr val="3F8F2E"/>
                           </a:solidFill>
@@ -19515,7 +19515,7 @@
                         </a:rPr>
                         <a:t>実装済</a:t>
                       </a:r>
-                      <a:endParaRPr lang="en-US" sz="850" dirty="0">
+                      <a:endParaRPr lang="ja-JP" sz="850" dirty="0">
                         <a:latin typeface="Yu Gothic" charset="0"/>
                         <a:ea typeface="Yu Gothic" charset="0"/>
                         <a:cs typeface="Yu Gothic" charset="0"/>
@@ -19570,7 +19570,7 @@
                         <a:buNone/>
                       </a:pPr>
                       <a:r>
-                        <a:rPr lang="en-US" sz="900" dirty="0">
+                        <a:rPr lang="ja-JP" sz="900" dirty="0">
                           <a:solidFill>
                             <a:srgbClr val="53565A"/>
                           </a:solidFill>
@@ -19580,7 +19580,7 @@
                         </a:rPr>
                         <a:t>5事業シグナル＋指標詳細</a:t>
                       </a:r>
-                      <a:endParaRPr lang="en-US" sz="900" dirty="0">
+                      <a:endParaRPr lang="ja-JP" sz="900" dirty="0">
                         <a:latin typeface="Yu Gothic" charset="0"/>
                         <a:ea typeface="Yu Gothic" charset="0"/>
                         <a:cs typeface="Yu Gothic" charset="0"/>
@@ -19637,7 +19637,7 @@
                         <a:buNone/>
                       </a:pPr>
                       <a:r>
-                        <a:rPr lang="en-US" sz="900" b="1" dirty="0">
+                        <a:rPr lang="ja-JP" sz="900" b="1" dirty="0">
                           <a:solidFill>
                             <a:srgbClr val="1A1A1A"/>
                           </a:solidFill>
@@ -19647,7 +19647,7 @@
                         </a:rPr>
                         <a:t>定期診断</a:t>
                       </a:r>
-                      <a:endParaRPr lang="en-US" sz="900" dirty="0">
+                      <a:endParaRPr lang="ja-JP" sz="900" dirty="0">
                         <a:latin typeface="Yu Gothic" charset="0"/>
                         <a:ea typeface="Yu Gothic" charset="0"/>
                         <a:cs typeface="Yu Gothic" charset="0"/>
@@ -19702,7 +19702,7 @@
                         <a:buNone/>
                       </a:pPr>
                       <a:r>
-                        <a:rPr lang="en-US" sz="850" b="1" dirty="0">
+                        <a:rPr lang="ja-JP" sz="850" b="1" dirty="0">
                           <a:solidFill>
                             <a:srgbClr val="3F8F2E"/>
                           </a:solidFill>
@@ -19712,7 +19712,7 @@
                         </a:rPr>
                         <a:t>実装済</a:t>
                       </a:r>
-                      <a:endParaRPr lang="en-US" sz="850" dirty="0">
+                      <a:endParaRPr lang="ja-JP" sz="850" dirty="0">
                         <a:latin typeface="Yu Gothic" charset="0"/>
                         <a:ea typeface="Yu Gothic" charset="0"/>
                         <a:cs typeface="Yu Gothic" charset="0"/>
@@ -19767,7 +19767,7 @@
                         <a:buNone/>
                       </a:pPr>
                       <a:r>
-                        <a:rPr lang="en-US" sz="900" dirty="0">
+                        <a:rPr lang="ja-JP" sz="900" dirty="0">
                           <a:solidFill>
                             <a:srgbClr val="53565A"/>
                           </a:solidFill>
@@ -19777,7 +19777,7 @@
                         </a:rPr>
                         <a:t>5段パイプラインの段階表示</a:t>
                       </a:r>
-                      <a:endParaRPr lang="en-US" sz="900" dirty="0">
+                      <a:endParaRPr lang="ja-JP" sz="900" dirty="0">
                         <a:latin typeface="Yu Gothic" charset="0"/>
                         <a:ea typeface="Yu Gothic" charset="0"/>
                         <a:cs typeface="Yu Gothic" charset="0"/>
@@ -19834,7 +19834,7 @@
                         <a:buNone/>
                       </a:pPr>
                       <a:r>
-                        <a:rPr lang="en-US" sz="900" b="1" dirty="0">
+                        <a:rPr lang="ja-JP" sz="900" b="1" dirty="0">
                           <a:solidFill>
                             <a:srgbClr val="1A1A1A"/>
                           </a:solidFill>
@@ -19844,7 +19844,7 @@
                         </a:rPr>
                         <a:t>シナリオ（臨時）診断</a:t>
                       </a:r>
-                      <a:endParaRPr lang="en-US" sz="900" dirty="0">
+                      <a:endParaRPr lang="ja-JP" sz="900" dirty="0">
                         <a:latin typeface="Yu Gothic" charset="0"/>
                         <a:ea typeface="Yu Gothic" charset="0"/>
                         <a:cs typeface="Yu Gothic" charset="0"/>
@@ -19899,7 +19899,7 @@
                         <a:buNone/>
                       </a:pPr>
                       <a:r>
-                        <a:rPr lang="en-US" sz="850" b="1" dirty="0">
+                        <a:rPr lang="ja-JP" sz="850" b="1" dirty="0">
                           <a:solidFill>
                             <a:srgbClr val="C9860A"/>
                           </a:solidFill>
@@ -19909,7 +19909,7 @@
                         </a:rPr>
                         <a:t>一部</a:t>
                       </a:r>
-                      <a:endParaRPr lang="en-US" sz="850" dirty="0">
+                      <a:endParaRPr lang="ja-JP" sz="850" dirty="0">
                         <a:latin typeface="Yu Gothic" charset="0"/>
                         <a:ea typeface="Yu Gothic" charset="0"/>
                         <a:cs typeface="Yu Gothic" charset="0"/>
@@ -19964,7 +19964,7 @@
                         <a:buNone/>
                       </a:pPr>
                       <a:r>
-                        <a:rPr lang="en-US" sz="900" dirty="0">
+                        <a:rPr lang="ja-JP" sz="900" dirty="0">
                           <a:solidFill>
                             <a:srgbClr val="53565A"/>
                           </a:solidFill>
@@ -19974,7 +19974,7 @@
                         </a:rPr>
                         <a:t>画面・遷移は動作／内容は限定</a:t>
                       </a:r>
-                      <a:endParaRPr lang="en-US" sz="900" dirty="0">
+                      <a:endParaRPr lang="ja-JP" sz="900" dirty="0">
                         <a:latin typeface="Yu Gothic" charset="0"/>
                         <a:ea typeface="Yu Gothic" charset="0"/>
                         <a:cs typeface="Yu Gothic" charset="0"/>
@@ -20031,7 +20031,7 @@
                         <a:buNone/>
                       </a:pPr>
                       <a:r>
-                        <a:rPr lang="en-US" sz="900" b="1" dirty="0">
+                        <a:rPr lang="ja-JP" sz="900" b="1" dirty="0">
                           <a:solidFill>
                             <a:srgbClr val="1A1A1A"/>
                           </a:solidFill>
@@ -20041,7 +20041,7 @@
                         </a:rPr>
                         <a:t>経営ブリーフ</a:t>
                       </a:r>
-                      <a:endParaRPr lang="en-US" sz="900" dirty="0">
+                      <a:endParaRPr lang="ja-JP" sz="900" dirty="0">
                         <a:latin typeface="Yu Gothic" charset="0"/>
                         <a:ea typeface="Yu Gothic" charset="0"/>
                         <a:cs typeface="Yu Gothic" charset="0"/>
@@ -20096,7 +20096,7 @@
                         <a:buNone/>
                       </a:pPr>
                       <a:r>
-                        <a:rPr lang="en-US" sz="850" b="1" dirty="0">
+                        <a:rPr lang="ja-JP" sz="850" b="1" dirty="0">
                           <a:solidFill>
                             <a:srgbClr val="3F8F2E"/>
                           </a:solidFill>
@@ -20106,7 +20106,7 @@
                         </a:rPr>
                         <a:t>実装済</a:t>
                       </a:r>
-                      <a:endParaRPr lang="en-US" sz="850" dirty="0">
+                      <a:endParaRPr lang="ja-JP" sz="850" dirty="0">
                         <a:latin typeface="Yu Gothic" charset="0"/>
                         <a:ea typeface="Yu Gothic" charset="0"/>
                         <a:cs typeface="Yu Gothic" charset="0"/>
@@ -20161,7 +20161,7 @@
                         <a:buNone/>
                       </a:pPr>
                       <a:r>
-                        <a:rPr lang="en-US" sz="900" dirty="0">
+                        <a:rPr lang="ja-JP" sz="900" dirty="0">
                           <a:solidFill>
                             <a:srgbClr val="53565A"/>
                           </a:solidFill>
@@ -20171,7 +20171,7 @@
                         </a:rPr>
                         <a:t>共通1枚型レポート</a:t>
                       </a:r>
-                      <a:endParaRPr lang="en-US" sz="900" dirty="0">
+                      <a:endParaRPr lang="ja-JP" sz="900" dirty="0">
                         <a:latin typeface="Yu Gothic" charset="0"/>
                         <a:ea typeface="Yu Gothic" charset="0"/>
                         <a:cs typeface="Yu Gothic" charset="0"/>
@@ -20228,7 +20228,7 @@
                         <a:buNone/>
                       </a:pPr>
                       <a:r>
-                        <a:rPr lang="en-US" sz="900" b="1" dirty="0">
+                        <a:rPr lang="ja-JP" sz="900" b="1" dirty="0">
                           <a:solidFill>
                             <a:srgbClr val="1A1A1A"/>
                           </a:solidFill>
@@ -20238,7 +20238,7 @@
                         </a:rPr>
                         <a:t>事例ナレッジ基盤</a:t>
                       </a:r>
-                      <a:endParaRPr lang="en-US" sz="900" dirty="0">
+                      <a:endParaRPr lang="ja-JP" sz="900" dirty="0">
                         <a:latin typeface="Yu Gothic" charset="0"/>
                         <a:ea typeface="Yu Gothic" charset="0"/>
                         <a:cs typeface="Yu Gothic" charset="0"/>
@@ -20293,7 +20293,7 @@
                         <a:buNone/>
                       </a:pPr>
                       <a:r>
-                        <a:rPr lang="en-US" sz="850" b="1" dirty="0">
+                        <a:rPr lang="ja-JP" sz="850" b="1" dirty="0">
                           <a:solidFill>
                             <a:srgbClr val="3F8F2E"/>
                           </a:solidFill>
@@ -20303,7 +20303,7 @@
                         </a:rPr>
                         <a:t>実装済</a:t>
                       </a:r>
-                      <a:endParaRPr lang="en-US" sz="850" dirty="0">
+                      <a:endParaRPr lang="ja-JP" sz="850" dirty="0">
                         <a:latin typeface="Yu Gothic" charset="0"/>
                         <a:ea typeface="Yu Gothic" charset="0"/>
                         <a:cs typeface="Yu Gothic" charset="0"/>
@@ -20358,7 +20358,7 @@
                         <a:buNone/>
                       </a:pPr>
                       <a:r>
-                        <a:rPr lang="en-US" sz="900" dirty="0">
+                        <a:rPr lang="ja-JP" sz="900" dirty="0">
                           <a:solidFill>
                             <a:srgbClr val="53565A"/>
                           </a:solidFill>
@@ -20368,7 +20368,7 @@
                         </a:rPr>
                         <a:t>類似検索（ダミースコア）</a:t>
                       </a:r>
-                      <a:endParaRPr lang="en-US" sz="900" dirty="0">
+                      <a:endParaRPr lang="ja-JP" sz="900" dirty="0">
                         <a:latin typeface="Yu Gothic" charset="0"/>
                         <a:ea typeface="Yu Gothic" charset="0"/>
                         <a:cs typeface="Yu Gothic" charset="0"/>
@@ -20425,7 +20425,7 @@
                         <a:buNone/>
                       </a:pPr>
                       <a:r>
-                        <a:rPr lang="en-US" sz="900" b="1" dirty="0">
+                        <a:rPr lang="ja-JP" sz="900" b="1" dirty="0">
                           <a:solidFill>
                             <a:srgbClr val="1A1A1A"/>
                           </a:solidFill>
@@ -20435,7 +20435,7 @@
                         </a:rPr>
                         <a:t>AIアシスタント</a:t>
                       </a:r>
-                      <a:endParaRPr lang="en-US" sz="900" dirty="0">
+                      <a:endParaRPr lang="ja-JP" sz="900" dirty="0">
                         <a:latin typeface="Yu Gothic" charset="0"/>
                         <a:ea typeface="Yu Gothic" charset="0"/>
                         <a:cs typeface="Yu Gothic" charset="0"/>
@@ -20490,7 +20490,7 @@
                         <a:buNone/>
                       </a:pPr>
                       <a:r>
-                        <a:rPr lang="en-US" sz="850" b="1" dirty="0">
+                        <a:rPr lang="ja-JP" sz="850" b="1" dirty="0">
                           <a:solidFill>
                             <a:srgbClr val="C9860A"/>
                           </a:solidFill>
@@ -20500,7 +20500,7 @@
                         </a:rPr>
                         <a:t>一部</a:t>
                       </a:r>
-                      <a:endParaRPr lang="en-US" sz="850" dirty="0">
+                      <a:endParaRPr lang="ja-JP" sz="850" dirty="0">
                         <a:latin typeface="Yu Gothic" charset="0"/>
                         <a:ea typeface="Yu Gothic" charset="0"/>
                         <a:cs typeface="Yu Gothic" charset="0"/>
@@ -20555,7 +20555,7 @@
                         <a:buNone/>
                       </a:pPr>
                       <a:r>
-                        <a:rPr lang="en-US" sz="900" dirty="0">
+                        <a:rPr lang="ja-JP" sz="900" dirty="0">
                           <a:solidFill>
                             <a:srgbClr val="53565A"/>
                           </a:solidFill>
@@ -20565,7 +20565,7 @@
                         </a:rPr>
                         <a:t>深掘り／質問（ダミー応答）</a:t>
                       </a:r>
-                      <a:endParaRPr lang="en-US" sz="900" dirty="0">
+                      <a:endParaRPr lang="ja-JP" sz="900" dirty="0">
                         <a:latin typeface="Yu Gothic" charset="0"/>
                         <a:ea typeface="Yu Gothic" charset="0"/>
                         <a:cs typeface="Yu Gothic" charset="0"/>
@@ -20622,7 +20622,7 @@
                         <a:buNone/>
                       </a:pPr>
                       <a:r>
-                        <a:rPr lang="en-US" sz="900" b="1" dirty="0">
+                        <a:rPr lang="ja-JP" sz="900" b="1" dirty="0">
                           <a:solidFill>
                             <a:srgbClr val="1A1A1A"/>
                           </a:solidFill>
@@ -20632,7 +20632,7 @@
                         </a:rPr>
                         <a:t>株主総会QAサポート</a:t>
                       </a:r>
-                      <a:endParaRPr lang="en-US" sz="900" dirty="0">
+                      <a:endParaRPr lang="ja-JP" sz="900" dirty="0">
                         <a:latin typeface="Yu Gothic" charset="0"/>
                         <a:ea typeface="Yu Gothic" charset="0"/>
                         <a:cs typeface="Yu Gothic" charset="0"/>
@@ -20687,7 +20687,7 @@
                         <a:buNone/>
                       </a:pPr>
                       <a:r>
-                        <a:rPr lang="en-US" sz="850" b="1" dirty="0">
+                        <a:rPr lang="ja-JP" sz="850" b="1" dirty="0">
                           <a:solidFill>
                             <a:srgbClr val="B33A2B"/>
                           </a:solidFill>
@@ -20697,7 +20697,7 @@
                         </a:rPr>
                         <a:t>近日</a:t>
                       </a:r>
-                      <a:endParaRPr lang="en-US" sz="850" dirty="0">
+                      <a:endParaRPr lang="ja-JP" sz="850" dirty="0">
                         <a:latin typeface="Yu Gothic" charset="0"/>
                         <a:ea typeface="Yu Gothic" charset="0"/>
                         <a:cs typeface="Yu Gothic" charset="0"/>
@@ -20752,7 +20752,7 @@
                         <a:buNone/>
                       </a:pPr>
                       <a:r>
-                        <a:rPr lang="en-US" sz="900" dirty="0">
+                        <a:rPr lang="ja-JP" sz="900" dirty="0">
                           <a:solidFill>
                             <a:srgbClr val="53565A"/>
                           </a:solidFill>
@@ -20762,7 +20762,7 @@
                         </a:rPr>
                         <a:t>プレースホルダー</a:t>
                       </a:r>
-                      <a:endParaRPr lang="en-US" sz="900" dirty="0">
+                      <a:endParaRPr lang="ja-JP" sz="900" dirty="0">
                         <a:latin typeface="Yu Gothic" charset="0"/>
                         <a:ea typeface="Yu Gothic" charset="0"/>
                         <a:cs typeface="Yu Gothic" charset="0"/>
@@ -20819,7 +20819,7 @@
                         <a:buNone/>
                       </a:pPr>
                       <a:r>
-                        <a:rPr lang="en-US" sz="900" b="1" dirty="0">
+                        <a:rPr lang="ja-JP" sz="900" b="1" dirty="0">
                           <a:solidFill>
                             <a:srgbClr val="1A1A1A"/>
                           </a:solidFill>
@@ -20829,7 +20829,7 @@
                         </a:rPr>
                         <a:t>アプリの構造／FBボード</a:t>
                       </a:r>
-                      <a:endParaRPr lang="en-US" sz="900" dirty="0">
+                      <a:endParaRPr lang="ja-JP" sz="900" dirty="0">
                         <a:latin typeface="Yu Gothic" charset="0"/>
                         <a:ea typeface="Yu Gothic" charset="0"/>
                         <a:cs typeface="Yu Gothic" charset="0"/>
@@ -20884,7 +20884,7 @@
                         <a:buNone/>
                       </a:pPr>
                       <a:r>
-                        <a:rPr lang="en-US" sz="850" b="1" dirty="0">
+                        <a:rPr lang="ja-JP" sz="850" b="1" dirty="0">
                           <a:solidFill>
                             <a:srgbClr val="3F8F2E"/>
                           </a:solidFill>
@@ -20894,7 +20894,7 @@
                         </a:rPr>
                         <a:t>実装済</a:t>
                       </a:r>
-                      <a:endParaRPr lang="en-US" sz="850" dirty="0">
+                      <a:endParaRPr lang="ja-JP" sz="850" dirty="0">
                         <a:latin typeface="Yu Gothic" charset="0"/>
                         <a:ea typeface="Yu Gothic" charset="0"/>
                         <a:cs typeface="Yu Gothic" charset="0"/>
@@ -20949,7 +20949,7 @@
                         <a:buNone/>
                       </a:pPr>
                       <a:r>
-                        <a:rPr lang="en-US" sz="900" dirty="0">
+                        <a:rPr lang="ja-JP" sz="900" dirty="0">
                           <a:solidFill>
                             <a:srgbClr val="53565A"/>
                           </a:solidFill>
@@ -20959,7 +20959,7 @@
                         </a:rPr>
                         <a:t>ドキュメント／改善提案集計</a:t>
                       </a:r>
-                      <a:endParaRPr lang="en-US" sz="900" dirty="0">
+                      <a:endParaRPr lang="ja-JP" sz="900" dirty="0">
                         <a:latin typeface="Yu Gothic" charset="0"/>
                         <a:ea typeface="Yu Gothic" charset="0"/>
                         <a:cs typeface="Yu Gothic" charset="0"/>
@@ -21035,7 +21035,7 @@
               <a:buNone/>
             </a:pPr>
             <a:r>
-              <a:rPr lang="en-US" sz="1200" b="1" spc="100" kern="0" dirty="0">
+              <a:rPr lang="ja-JP" sz="1200" b="1" spc="100" kern="0" dirty="0">
                 <a:solidFill>
                   <a:srgbClr val="046A38"/>
                 </a:solidFill>
@@ -21045,7 +21045,7 @@
               </a:rPr>
               <a:t>主要課題</a:t>
             </a:r>
-            <a:endParaRPr lang="en-US" sz="1200" dirty="0"/>
+            <a:endParaRPr lang="ja-JP" sz="1200" dirty="0"/>
           </a:p>
         </p:txBody>
       </p:sp>
@@ -21078,7 +21078,7 @@
               <a:buChar char="•"/>
             </a:pPr>
             <a:r>
-              <a:rPr lang="en-US" sz="1100" b="1" dirty="0">
+              <a:rPr lang="ja-JP" sz="1100" b="1" dirty="0">
                 <a:solidFill>
                   <a:srgbClr val="1A1A1A"/>
                 </a:solidFill>
@@ -21098,7 +21098,7 @@
               <a:buNone/>
             </a:pPr>
             <a:r>
-              <a:rPr lang="en-US" sz="1100" dirty="0">
+              <a:rPr lang="ja-JP" sz="1100" dirty="0">
                 <a:solidFill>
                   <a:srgbClr val="53565A"/>
                 </a:solidFill>
@@ -21108,7 +21108,7 @@
               </a:rPr>
               <a:t>文書横断で同一テーマのトーン・論点変化を捉える精度に課題。磨き込み対象。</a:t>
             </a:r>
-            <a:endParaRPr lang="en-US" sz="1100" dirty="0"/>
+            <a:endParaRPr lang="ja-JP" sz="1100" dirty="0"/>
           </a:p>
           <a:p>
             <a:pPr indent="0" marL="0">
@@ -21118,7 +21118,7 @@
               <a:buNone/>
             </a:pPr>
             <a:r>
-              <a:rPr lang="en-US" sz="1100" b="1" dirty="0">
+              <a:rPr lang="ja-JP" sz="1100" b="1" dirty="0">
                 <a:solidFill>
                   <a:srgbClr val="1A1A1A"/>
                 </a:solidFill>
@@ -21138,7 +21138,7 @@
               <a:buNone/>
             </a:pPr>
             <a:r>
-              <a:rPr lang="en-US" sz="1100" dirty="0">
+              <a:rPr lang="ja-JP" sz="1100" dirty="0">
                 <a:solidFill>
                   <a:srgbClr val="53565A"/>
                 </a:solidFill>
@@ -21148,7 +21148,7 @@
               </a:rPr>
               <a:t>事例の網羅性が②の成否を左右。イベントカタログ定義と収集サイクルが未着手。</a:t>
             </a:r>
-            <a:endParaRPr lang="en-US" sz="1100" dirty="0"/>
+            <a:endParaRPr lang="ja-JP" sz="1100" dirty="0"/>
           </a:p>
           <a:p>
             <a:pPr indent="0" marL="0">
@@ -21158,7 +21158,7 @@
               <a:buNone/>
             </a:pPr>
             <a:r>
-              <a:rPr lang="en-US" sz="1100" b="1" dirty="0">
+              <a:rPr lang="ja-JP" sz="1100" b="1" dirty="0">
                 <a:solidFill>
                   <a:srgbClr val="1A1A1A"/>
                 </a:solidFill>
@@ -21178,7 +21178,7 @@
               <a:buNone/>
             </a:pPr>
             <a:r>
-              <a:rPr lang="en-US" sz="1100" dirty="0">
+              <a:rPr lang="ja-JP" sz="1100" dirty="0">
                 <a:solidFill>
                   <a:srgbClr val="53565A"/>
                 </a:solidFill>
@@ -21188,7 +21188,7 @@
               </a:rPr>
               <a:t>相場観の中核となる新聞・業界紙DBの契約可否・費用の判断が必要。</a:t>
             </a:r>
-            <a:endParaRPr lang="en-US" sz="1100" dirty="0"/>
+            <a:endParaRPr lang="ja-JP" sz="1100" dirty="0"/>
           </a:p>
           <a:p>
             <a:pPr indent="0" marL="0">
@@ -21198,7 +21198,7 @@
               <a:buNone/>
             </a:pPr>
             <a:r>
-              <a:rPr lang="en-US" sz="1100" b="1" dirty="0">
+              <a:rPr lang="ja-JP" sz="1100" b="1" dirty="0">
                 <a:solidFill>
                   <a:srgbClr val="1A1A1A"/>
                 </a:solidFill>
@@ -21218,7 +21218,7 @@
               <a:buNone/>
             </a:pPr>
             <a:r>
-              <a:rPr lang="en-US" sz="1100" dirty="0">
+              <a:rPr lang="ja-JP" sz="1100" dirty="0">
                 <a:solidFill>
                   <a:srgbClr val="53565A"/>
                 </a:solidFill>
@@ -21228,7 +21228,7 @@
               </a:rPr>
               <a:t>因果パス約20本はドラフト。向き・強さ・欠落の先方レビューが前提。</a:t>
             </a:r>
-            <a:endParaRPr lang="en-US" sz="1100" dirty="0"/>
+            <a:endParaRPr lang="ja-JP" sz="1100" dirty="0"/>
           </a:p>
           <a:p>
             <a:pPr indent="0" marL="0">
@@ -21238,7 +21238,7 @@
               <a:buNone/>
             </a:pPr>
             <a:r>
-              <a:rPr lang="en-US" sz="1100" b="1" dirty="0">
+              <a:rPr lang="ja-JP" sz="1100" b="1" dirty="0">
                 <a:solidFill>
                   <a:srgbClr val="1A1A1A"/>
                 </a:solidFill>
@@ -21255,7 +21255,7 @@
               <a:buNone/>
             </a:pPr>
             <a:r>
-              <a:rPr lang="en-US" sz="1100" dirty="0">
+              <a:rPr lang="ja-JP" sz="1100" dirty="0">
                 <a:solidFill>
                   <a:srgbClr val="53565A"/>
                 </a:solidFill>
@@ -21265,7 +21265,7 @@
               </a:rPr>
               <a:t>現状は全ダミー。社内KPIのマスキング提供方式・粒度が未定。</a:t>
             </a:r>
-            <a:endParaRPr lang="en-US" sz="1100" dirty="0"/>
+            <a:endParaRPr lang="ja-JP" sz="1100" dirty="0"/>
           </a:p>
         </p:txBody>
       </p:sp>
@@ -21294,7 +21294,7 @@
               <a:buNone/>
             </a:pPr>
             <a:r>
-              <a:rPr lang="en-US" sz="900" b="1" dirty="0">
+              <a:rPr lang="ja-JP" sz="900" b="1" dirty="0">
                 <a:solidFill>
                   <a:srgbClr val="046A38"/>
                 </a:solidFill>
@@ -21308,7 +21308,7 @@
               <a:buNone/>
             </a:pPr>
             <a:r>
-              <a:rPr lang="en-US" sz="900" dirty="0">
+              <a:rPr lang="ja-JP" sz="900" dirty="0">
                 <a:solidFill>
                   <a:srgbClr val="8A8D87"/>
                 </a:solidFill>
@@ -21318,7 +21318,7 @@
               </a:rPr>
               <a:t>    ｜    進捗の現在地と課題</a:t>
             </a:r>
-            <a:endParaRPr lang="en-US" sz="900" dirty="0"/>
+            <a:endParaRPr lang="ja-JP" sz="900" dirty="0"/>
           </a:p>
         </p:txBody>
       </p:sp>
@@ -21347,7 +21347,7 @@
               <a:buNone/>
             </a:pPr>
             <a:r>
-              <a:rPr lang="en-US" sz="900" dirty="0">
+              <a:rPr lang="ja-JP" sz="900" dirty="0">
                 <a:solidFill>
                   <a:srgbClr val="8A8D87"/>
                 </a:solidFill>
@@ -21357,7 +21357,7 @@
               </a:rPr>
               <a:t>08</a:t>
             </a:r>
-            <a:endParaRPr lang="en-US" sz="900" dirty="0"/>
+            <a:endParaRPr lang="ja-JP" sz="900" dirty="0"/>
           </a:p>
         </p:txBody>
       </p:sp>
@@ -21461,7 +21461,7 @@
               <a:buNone/>
             </a:pPr>
             <a:r>
-              <a:rPr lang="en-US" sz="1100" b="1" spc="200" kern="0" dirty="0">
+              <a:rPr lang="ja-JP" sz="1100" b="1" spc="200" kern="0" dirty="0">
                 <a:solidFill>
                   <a:srgbClr val="046A38"/>
                 </a:solidFill>
@@ -21471,7 +21471,7 @@
               </a:rPr>
               <a:t>DECISIONS, ASKS &amp; NEXT STEPS</a:t>
             </a:r>
-            <a:endParaRPr lang="en-US" sz="1100" dirty="0"/>
+            <a:endParaRPr lang="ja-JP" sz="1100" dirty="0"/>
           </a:p>
         </p:txBody>
       </p:sp>
@@ -21500,7 +21500,7 @@
               <a:buNone/>
             </a:pPr>
             <a:r>
-              <a:rPr lang="en-US" sz="2500" b="1" dirty="0">
+              <a:rPr lang="ja-JP" sz="2500" b="1" dirty="0">
                 <a:solidFill>
                   <a:srgbClr val="1A1A1A"/>
                 </a:solidFill>
@@ -21510,7 +21510,7 @@
               </a:rPr>
               <a:t>ご相談したいこと と 次のステップ</a:t>
             </a:r>
-            <a:endParaRPr lang="en-US" sz="2500" dirty="0"/>
+            <a:endParaRPr lang="ja-JP" sz="2500" dirty="0"/>
           </a:p>
         </p:txBody>
       </p:sp>
@@ -21542,7 +21542,7 @@
               <a:buNone/>
             </a:pPr>
             <a:r>
-              <a:rPr lang="en-US" sz="1150" dirty="0">
+              <a:rPr lang="ja-JP" sz="1150" dirty="0">
                 <a:solidFill>
                   <a:srgbClr val="53565A"/>
                 </a:solidFill>
@@ -21552,7 +21552,7 @@
               </a:rPr>
               <a:t>前進のために、本日ご意思決定・ご協力いただきたい事項です。</a:t>
             </a:r>
-            <a:endParaRPr lang="en-US" sz="1150" dirty="0"/>
+            <a:endParaRPr lang="ja-JP" sz="1150" dirty="0"/>
           </a:p>
         </p:txBody>
       </p:sp>
@@ -21615,7 +21615,7 @@
               <a:buNone/>
             </a:pPr>
             <a:r>
-              <a:rPr lang="en-US" sz="1300" b="1" dirty="0">
+              <a:rPr lang="ja-JP" sz="1300" b="1" dirty="0">
                 <a:solidFill>
                   <a:srgbClr val="046A38"/>
                 </a:solidFill>
@@ -21625,7 +21625,7 @@
               </a:rPr>
               <a:t>意思決定いただきたいこと</a:t>
             </a:r>
-            <a:endParaRPr lang="en-US" sz="1300" dirty="0"/>
+            <a:endParaRPr lang="ja-JP" sz="1300" dirty="0"/>
           </a:p>
         </p:txBody>
       </p:sp>
@@ -21658,7 +21658,7 @@
               <a:buChar char="•"/>
             </a:pPr>
             <a:r>
-              <a:rPr lang="en-US" sz="1050" b="1" dirty="0">
+              <a:rPr lang="ja-JP" sz="1050" b="1" dirty="0">
                 <a:solidFill>
                   <a:srgbClr val="1A1A1A"/>
                 </a:solidFill>
@@ -21678,7 +21678,7 @@
               <a:buNone/>
             </a:pPr>
             <a:r>
-              <a:rPr lang="en-US" sz="1050" dirty="0">
+              <a:rPr lang="ja-JP" sz="1050" dirty="0">
                 <a:solidFill>
                   <a:srgbClr val="53565A"/>
                 </a:solidFill>
@@ -21688,7 +21688,7 @@
               </a:rPr>
               <a:t>「①継続深化」＋「②③を次の重点」で進める方針でよいか。</a:t>
             </a:r>
-            <a:endParaRPr lang="en-US" sz="1050" dirty="0"/>
+            <a:endParaRPr lang="ja-JP" sz="1050" dirty="0"/>
           </a:p>
           <a:p>
             <a:pPr indent="0" marL="0">
@@ -21698,7 +21698,7 @@
               <a:buNone/>
             </a:pPr>
             <a:r>
-              <a:rPr lang="en-US" sz="1050" b="1" dirty="0">
+              <a:rPr lang="ja-JP" sz="1050" b="1" dirty="0">
                 <a:solidFill>
                   <a:srgbClr val="1A1A1A"/>
                 </a:solidFill>
@@ -21718,7 +21718,7 @@
               <a:buNone/>
             </a:pPr>
             <a:r>
-              <a:rPr lang="en-US" sz="1050" dirty="0">
+              <a:rPr lang="ja-JP" sz="1050" dirty="0">
                 <a:solidFill>
                   <a:srgbClr val="53565A"/>
                 </a:solidFill>
@@ -21728,7 +21728,7 @@
               </a:rPr>
               <a:t>社内KPI・事業計画のマスキング粒度と提供可能な範囲。</a:t>
             </a:r>
-            <a:endParaRPr lang="en-US" sz="1050" dirty="0"/>
+            <a:endParaRPr lang="ja-JP" sz="1050" dirty="0"/>
           </a:p>
           <a:p>
             <a:pPr indent="0" marL="0">
@@ -21738,7 +21738,7 @@
               <a:buNone/>
             </a:pPr>
             <a:r>
-              <a:rPr lang="en-US" sz="1050" b="1" dirty="0">
+              <a:rPr lang="ja-JP" sz="1050" b="1" dirty="0">
                 <a:solidFill>
                   <a:srgbClr val="1A1A1A"/>
                 </a:solidFill>
@@ -21755,7 +21755,7 @@
               <a:buNone/>
             </a:pPr>
             <a:r>
-              <a:rPr lang="en-US" sz="1050" dirty="0">
+              <a:rPr lang="ja-JP" sz="1050" dirty="0">
                 <a:solidFill>
                   <a:srgbClr val="53565A"/>
                 </a:solidFill>
@@ -21765,7 +21765,7 @@
               </a:rPr>
               <a:t>新聞DB等の有償ソースを採用するか（費用対効果の判断）。</a:t>
             </a:r>
-            <a:endParaRPr lang="en-US" sz="1050" dirty="0"/>
+            <a:endParaRPr lang="ja-JP" sz="1050" dirty="0"/>
           </a:p>
         </p:txBody>
       </p:sp>
@@ -21828,7 +21828,7 @@
               <a:buNone/>
             </a:pPr>
             <a:r>
-              <a:rPr lang="en-US" sz="1300" b="1" dirty="0">
+              <a:rPr lang="ja-JP" sz="1300" b="1" dirty="0">
                 <a:solidFill>
                   <a:srgbClr val="007680"/>
                 </a:solidFill>
@@ -21838,7 +21838,7 @@
               </a:rPr>
               <a:t>ご協力お願いしたいこと</a:t>
             </a:r>
-            <a:endParaRPr lang="en-US" sz="1300" dirty="0"/>
+            <a:endParaRPr lang="ja-JP" sz="1300" dirty="0"/>
           </a:p>
         </p:txBody>
       </p:sp>
@@ -21871,7 +21871,7 @@
               <a:buChar char="•"/>
             </a:pPr>
             <a:r>
-              <a:rPr lang="en-US" sz="1050" b="1" dirty="0">
+              <a:rPr lang="ja-JP" sz="1050" b="1" dirty="0">
                 <a:solidFill>
                   <a:srgbClr val="1A1A1A"/>
                 </a:solidFill>
@@ -21891,7 +21891,7 @@
               <a:buNone/>
             </a:pPr>
             <a:r>
-              <a:rPr lang="en-US" sz="1050" dirty="0">
+              <a:rPr lang="ja-JP" sz="1050" dirty="0">
                 <a:solidFill>
                   <a:srgbClr val="53565A"/>
                 </a:solidFill>
@@ -21901,7 +21901,7 @@
               </a:rPr>
               <a:t>因果パスの向き・強さ・欠落を有識者にご確認いただきたい。</a:t>
             </a:r>
-            <a:endParaRPr lang="en-US" sz="1050" dirty="0"/>
+            <a:endParaRPr lang="ja-JP" sz="1050" dirty="0"/>
           </a:p>
           <a:p>
             <a:pPr indent="0" marL="0">
@@ -21911,7 +21911,7 @@
               <a:buNone/>
             </a:pPr>
             <a:r>
-              <a:rPr lang="en-US" sz="1050" b="1" dirty="0">
+              <a:rPr lang="ja-JP" sz="1050" b="1" dirty="0">
                 <a:solidFill>
                   <a:srgbClr val="1A1A1A"/>
                 </a:solidFill>
@@ -21931,7 +21931,7 @@
               <a:buNone/>
             </a:pPr>
             <a:r>
-              <a:rPr lang="en-US" sz="1050" dirty="0">
+              <a:rPr lang="ja-JP" sz="1050" dirty="0">
                 <a:solidFill>
                   <a:srgbClr val="53565A"/>
                 </a:solidFill>
@@ -21941,7 +21941,7 @@
               </a:rPr>
               <a:t>①定期診断の検証用に1社分（マスキング可）。</a:t>
             </a:r>
-            <a:endParaRPr lang="en-US" sz="1050" dirty="0"/>
+            <a:endParaRPr lang="ja-JP" sz="1050" dirty="0"/>
           </a:p>
           <a:p>
             <a:pPr indent="0" marL="0">
@@ -21951,7 +21951,7 @@
               <a:buNone/>
             </a:pPr>
             <a:r>
-              <a:rPr lang="en-US" sz="1050" b="1" dirty="0">
+              <a:rPr lang="ja-JP" sz="1050" b="1" dirty="0">
                 <a:solidFill>
                   <a:srgbClr val="1A1A1A"/>
                 </a:solidFill>
@@ -21968,7 +21968,7 @@
               <a:buNone/>
             </a:pPr>
             <a:r>
-              <a:rPr lang="en-US" sz="1050" dirty="0">
+              <a:rPr lang="ja-JP" sz="1050" dirty="0">
                 <a:solidFill>
                   <a:srgbClr val="53565A"/>
                 </a:solidFill>
@@ -21978,7 +21978,7 @@
               </a:rPr>
               <a:t>収集すべき事象タイプ（コロナ・万博・災害・施設移転 等）の優先順位。</a:t>
             </a:r>
-            <a:endParaRPr lang="en-US" sz="1050" dirty="0"/>
+            <a:endParaRPr lang="ja-JP" sz="1050" dirty="0"/>
           </a:p>
         </p:txBody>
       </p:sp>
@@ -22007,7 +22007,7 @@
               <a:buNone/>
             </a:pPr>
             <a:r>
-              <a:rPr lang="en-US" sz="1200" b="1" spc="100" kern="0" dirty="0">
+              <a:rPr lang="ja-JP" sz="1200" b="1" spc="100" kern="0" dirty="0">
                 <a:solidFill>
                   <a:srgbClr val="046A38"/>
                 </a:solidFill>
@@ -22017,7 +22017,7 @@
               </a:rPr>
               <a:t>次のステップ</a:t>
             </a:r>
-            <a:endParaRPr lang="en-US" sz="1200" dirty="0"/>
+            <a:endParaRPr lang="ja-JP" sz="1200" dirty="0"/>
           </a:p>
         </p:txBody>
       </p:sp>
@@ -22080,7 +22080,7 @@
               <a:buNone/>
             </a:pPr>
             <a:r>
-              <a:rPr lang="en-US" sz="1000" b="1" dirty="0">
+              <a:rPr lang="ja-JP" sz="1000" b="1" dirty="0">
                 <a:solidFill>
                   <a:srgbClr val="8A8D87"/>
                 </a:solidFill>
@@ -22090,7 +22090,7 @@
               </a:rPr>
               <a:t>今回</a:t>
             </a:r>
-            <a:endParaRPr lang="en-US" sz="1000" dirty="0"/>
+            <a:endParaRPr lang="ja-JP" sz="1000" dirty="0"/>
           </a:p>
         </p:txBody>
       </p:sp>
@@ -22119,7 +22119,7 @@
               <a:buNone/>
             </a:pPr>
             <a:r>
-              <a:rPr lang="en-US" sz="1500" b="1" dirty="0">
+              <a:rPr lang="ja-JP" sz="1500" b="1" dirty="0">
                 <a:solidFill>
                   <a:srgbClr val="046A38"/>
                 </a:solidFill>
@@ -22129,7 +22129,7 @@
               </a:rPr>
               <a:t>モック体験</a:t>
             </a:r>
-            <a:endParaRPr lang="en-US" sz="1500" dirty="0"/>
+            <a:endParaRPr lang="ja-JP" sz="1500" dirty="0"/>
           </a:p>
         </p:txBody>
       </p:sp>
@@ -22158,7 +22158,7 @@
               <a:buNone/>
             </a:pPr>
             <a:r>
-              <a:rPr lang="en-US" sz="900" dirty="0">
+              <a:rPr lang="ja-JP" sz="900" dirty="0">
                 <a:solidFill>
                   <a:srgbClr val="53565A"/>
                 </a:solidFill>
@@ -22168,7 +22168,7 @@
               </a:rPr>
               <a:t>完成イメージ共有・FB取得</a:t>
             </a:r>
-            <a:endParaRPr lang="en-US" sz="900" dirty="0"/>
+            <a:endParaRPr lang="ja-JP" sz="900" dirty="0"/>
           </a:p>
         </p:txBody>
       </p:sp>
@@ -22231,7 +22231,7 @@
               <a:buNone/>
             </a:pPr>
             <a:r>
-              <a:rPr lang="en-US" sz="1000" b="1" dirty="0">
+              <a:rPr lang="ja-JP" sz="1000" b="1" dirty="0">
                 <a:solidFill>
                   <a:srgbClr val="8A8D87"/>
                 </a:solidFill>
@@ -22241,7 +22241,7 @@
               </a:rPr>
               <a:t>〜次回</a:t>
             </a:r>
-            <a:endParaRPr lang="en-US" sz="1000" dirty="0"/>
+            <a:endParaRPr lang="ja-JP" sz="1000" dirty="0"/>
           </a:p>
         </p:txBody>
       </p:sp>
@@ -22270,7 +22270,7 @@
               <a:buNone/>
             </a:pPr>
             <a:r>
-              <a:rPr lang="en-US" sz="1500" b="1" dirty="0">
+              <a:rPr lang="ja-JP" sz="1500" b="1" dirty="0">
                 <a:solidFill>
                   <a:srgbClr val="046A38"/>
                 </a:solidFill>
@@ -22280,7 +22280,7 @@
               </a:rPr>
               <a:t>FB反映</a:t>
             </a:r>
-            <a:endParaRPr lang="en-US" sz="1500" dirty="0"/>
+            <a:endParaRPr lang="ja-JP" sz="1500" dirty="0"/>
           </a:p>
         </p:txBody>
       </p:sp>
@@ -22309,7 +22309,7 @@
               <a:buNone/>
             </a:pPr>
             <a:r>
-              <a:rPr lang="en-US" sz="900" dirty="0">
+              <a:rPr lang="ja-JP" sz="900" dirty="0">
                 <a:solidFill>
                   <a:srgbClr val="53565A"/>
                 </a:solidFill>
@@ -22319,7 +22319,7 @@
               </a:rPr>
               <a:t>優先UC確定・データ調整</a:t>
             </a:r>
-            <a:endParaRPr lang="en-US" sz="900" dirty="0"/>
+            <a:endParaRPr lang="ja-JP" sz="900" dirty="0"/>
           </a:p>
         </p:txBody>
       </p:sp>
@@ -22382,7 +22382,7 @@
               <a:buNone/>
             </a:pPr>
             <a:r>
-              <a:rPr lang="en-US" sz="1000" b="1" dirty="0">
+              <a:rPr lang="ja-JP" sz="1000" b="1" dirty="0">
                 <a:solidFill>
                   <a:srgbClr val="8A8D87"/>
                 </a:solidFill>
@@ -22392,7 +22392,7 @@
               </a:rPr>
               <a:t>短期</a:t>
             </a:r>
-            <a:endParaRPr lang="en-US" sz="1000" dirty="0"/>
+            <a:endParaRPr lang="ja-JP" sz="1000" dirty="0"/>
           </a:p>
         </p:txBody>
       </p:sp>
@@ -22421,7 +22421,7 @@
               <a:buNone/>
             </a:pPr>
             <a:r>
-              <a:rPr lang="en-US" sz="1500" b="1" dirty="0">
+              <a:rPr lang="ja-JP" sz="1500" b="1" dirty="0">
                 <a:solidFill>
                   <a:srgbClr val="046A38"/>
                 </a:solidFill>
@@ -22431,7 +22431,7 @@
               </a:rPr>
               <a:t>②③着手</a:t>
             </a:r>
-            <a:endParaRPr lang="en-US" sz="1500" dirty="0"/>
+            <a:endParaRPr lang="ja-JP" sz="1500" dirty="0"/>
           </a:p>
         </p:txBody>
       </p:sp>
@@ -22460,7 +22460,7 @@
               <a:buNone/>
             </a:pPr>
             <a:r>
-              <a:rPr lang="en-US" sz="900" dirty="0">
+              <a:rPr lang="ja-JP" sz="900" dirty="0">
                 <a:solidFill>
                   <a:srgbClr val="53565A"/>
                 </a:solidFill>
@@ -22470,7 +22470,7 @@
               </a:rPr>
               <a:t>事例カタログ・臨時診断精緻化</a:t>
             </a:r>
-            <a:endParaRPr lang="en-US" sz="900" dirty="0"/>
+            <a:endParaRPr lang="ja-JP" sz="900" dirty="0"/>
           </a:p>
         </p:txBody>
       </p:sp>
@@ -22533,7 +22533,7 @@
               <a:buNone/>
             </a:pPr>
             <a:r>
-              <a:rPr lang="en-US" sz="1000" b="1" dirty="0">
+              <a:rPr lang="ja-JP" sz="1000" b="1" dirty="0">
                 <a:solidFill>
                   <a:srgbClr val="8A8D87"/>
                 </a:solidFill>
@@ -22543,7 +22543,7 @@
               </a:rPr>
               <a:t>本番へ</a:t>
             </a:r>
-            <a:endParaRPr lang="en-US" sz="1000" dirty="0"/>
+            <a:endParaRPr lang="ja-JP" sz="1000" dirty="0"/>
           </a:p>
         </p:txBody>
       </p:sp>
@@ -22572,7 +22572,7 @@
               <a:buNone/>
             </a:pPr>
             <a:r>
-              <a:rPr lang="en-US" sz="1500" b="1" dirty="0">
+              <a:rPr lang="ja-JP" sz="1500" b="1" dirty="0">
                 <a:solidFill>
                   <a:srgbClr val="046A38"/>
                 </a:solidFill>
@@ -22582,7 +22582,7 @@
               </a:rPr>
               <a:t>実データ接続</a:t>
             </a:r>
-            <a:endParaRPr lang="en-US" sz="1500" dirty="0"/>
+            <a:endParaRPr lang="ja-JP" sz="1500" dirty="0"/>
           </a:p>
         </p:txBody>
       </p:sp>
@@ -22611,7 +22611,7 @@
               <a:buNone/>
             </a:pPr>
             <a:r>
-              <a:rPr lang="en-US" sz="900" dirty="0">
+              <a:rPr lang="ja-JP" sz="900" dirty="0">
                 <a:solidFill>
                   <a:srgbClr val="53565A"/>
                 </a:solidFill>
@@ -22621,7 +22621,7 @@
               </a:rPr>
               <a:t>API接続・精度検証・体制設計</a:t>
             </a:r>
-            <a:endParaRPr lang="en-US" sz="900" dirty="0"/>
+            <a:endParaRPr lang="ja-JP" sz="900" dirty="0"/>
           </a:p>
         </p:txBody>
       </p:sp>
@@ -22684,7 +22684,7 @@
               <a:buNone/>
             </a:pPr>
             <a:r>
-              <a:rPr lang="en-US" sz="1200" b="1" dirty="0">
+              <a:rPr lang="ja-JP" sz="1200" b="1" dirty="0">
                 <a:solidFill>
                   <a:srgbClr val="1A1A1A"/>
                 </a:solidFill>
@@ -22698,7 +22698,7 @@
               <a:buNone/>
             </a:pPr>
             <a:r>
-              <a:rPr lang="en-US" sz="1200" dirty="0">
+              <a:rPr lang="ja-JP" sz="1200" dirty="0">
                 <a:solidFill>
                   <a:srgbClr val="53565A"/>
                 </a:solidFill>
@@ -22708,7 +22708,7 @@
               </a:rPr>
               <a:t>をいただくことがゴールです。</a:t>
             </a:r>
-            <a:endParaRPr lang="en-US" sz="1200" dirty="0"/>
+            <a:endParaRPr lang="ja-JP" sz="1200" dirty="0"/>
           </a:p>
         </p:txBody>
       </p:sp>
@@ -22737,7 +22737,7 @@
               <a:buNone/>
             </a:pPr>
             <a:r>
-              <a:rPr lang="en-US" sz="900" b="1" dirty="0">
+              <a:rPr lang="ja-JP" sz="900" b="1" dirty="0">
                 <a:solidFill>
                   <a:srgbClr val="046A38"/>
                 </a:solidFill>
@@ -22751,7 +22751,7 @@
               <a:buNone/>
             </a:pPr>
             <a:r>
-              <a:rPr lang="en-US" sz="900" dirty="0">
+              <a:rPr lang="ja-JP" sz="900" dirty="0">
                 <a:solidFill>
                   <a:srgbClr val="8A8D87"/>
                 </a:solidFill>
@@ -22761,7 +22761,7 @@
               </a:rPr>
               <a:t>    ｜    ご相談したいこと・次のステップ</a:t>
             </a:r>
-            <a:endParaRPr lang="en-US" sz="900" dirty="0"/>
+            <a:endParaRPr lang="ja-JP" sz="900" dirty="0"/>
           </a:p>
         </p:txBody>
       </p:sp>
@@ -22790,7 +22790,7 @@
               <a:buNone/>
             </a:pPr>
             <a:r>
-              <a:rPr lang="en-US" sz="900" dirty="0">
+              <a:rPr lang="ja-JP" sz="900" dirty="0">
                 <a:solidFill>
                   <a:srgbClr val="8A8D87"/>
                 </a:solidFill>
@@ -22800,7 +22800,7 @@
               </a:rPr>
               <a:t>09</a:t>
             </a:r>
-            <a:endParaRPr lang="en-US" sz="900" dirty="0"/>
+            <a:endParaRPr lang="ja-JP" sz="900" dirty="0"/>
           </a:p>
         </p:txBody>
       </p:sp>
